--- a/AgentIQ_Executive_Master_Presentation.pptx
+++ b/AgentIQ_Executive_Master_Presentation.pptx
@@ -3196,8 +3196,8 @@
         </p:nvSpPr>
         <p:spPr>
           <a:xfrm>
-            <a:off x="0" y="6537960"/>
-            <a:ext cx="12191695" cy="320040"/>
+            <a:off x="0" y="6510528"/>
+            <a:ext cx="12191695" cy="347472"/>
           </a:xfrm>
           <a:prstGeom prst="rect">
             <a:avLst/>
@@ -3207,7 +3207,7 @@
           </a:solidFill>
           <a:ln w="6350">
             <a:solidFill>
-              <a:srgbClr val="2D3C58"/>
+              <a:srgbClr val="283650"/>
             </a:solidFill>
           </a:ln>
         </p:spPr>
@@ -3241,8 +3241,8 @@
         </p:nvSpPr>
         <p:spPr>
           <a:xfrm>
-            <a:off x="731520" y="6556248"/>
-            <a:ext cx="6400800" cy="274320"/>
+            <a:off x="731520" y="6528816"/>
+            <a:ext cx="7315200" cy="274320"/>
           </a:xfrm>
           <a:prstGeom prst="rect">
             <a:avLst/>
@@ -3264,7 +3264,7 @@
               </a:defRPr>
             </a:pPr>
             <a:r>
-              <a:t>AgentIQ SENTINEL  •  Continuous Zero-Trust Cognitive Cyber Defense  •  TransOrg Datathon 2026</a:t>
+              <a:t>🛡️ AgentIQ SENTINEL  •  Continuous Zero-Trust Cognitive Cyber Defense  •  TransOrg Datathon 2026</a:t>
             </a:r>
           </a:p>
         </p:txBody>
@@ -3277,7 +3277,7 @@
         </p:nvSpPr>
         <p:spPr>
           <a:xfrm>
-            <a:off x="8686800" y="6556248"/>
+            <a:off x="8686800" y="6528816"/>
             <a:ext cx="2743200" cy="274320"/>
           </a:xfrm>
           <a:prstGeom prst="rect">
@@ -3314,7 +3314,7 @@
         <p:spPr>
           <a:xfrm>
             <a:off x="731520" y="731520"/>
-            <a:ext cx="10728655" cy="5394960"/>
+            <a:ext cx="10728655" cy="5486400"/>
           </a:xfrm>
           <a:prstGeom prst="roundRect">
             <a:avLst/>
@@ -3359,43 +3359,7 @@
         <p:spPr>
           <a:xfrm>
             <a:off x="1097280" y="1005840"/>
-            <a:ext cx="9875520" cy="365760"/>
-          </a:xfrm>
-          <a:prstGeom prst="rect">
-            <a:avLst/>
-          </a:prstGeom>
-          <a:noFill/>
-        </p:spPr>
-        <p:txBody>
-          <a:bodyPr wrap="none">
-            <a:spAutoFit/>
-          </a:bodyPr>
-          <a:lstStyle/>
-          <a:p>
-            <a:pPr>
-              <a:defRPr sz="1000" b="1">
-                <a:solidFill>
-                  <a:srgbClr val="06B6D4"/>
-                </a:solidFill>
-                <a:latin typeface="Trebuchet MS"/>
-              </a:defRPr>
-            </a:pPr>
-            <a:r>
-              <a:t>🛡️ TRANSORG DATATHON 2026  •  DEFCON LEVEL 2 ACTIVE  •  NIST SP 800-207 ZERO-TRUST</a:t>
-            </a:r>
-          </a:p>
-        </p:txBody>
-      </p:sp>
-      <p:sp>
-        <p:nvSpPr>
-          <p:cNvPr id="9" name="TextBox 8"/>
-          <p:cNvSpPr txBox="1"/>
-          <p:nvPr/>
-        </p:nvSpPr>
-        <p:spPr>
-          <a:xfrm>
-            <a:off x="1097280" y="1371600"/>
-            <a:ext cx="9875520" cy="2926080"/>
+            <a:ext cx="9966960" cy="3108960"/>
           </a:xfrm>
           <a:prstGeom prst="rect">
             <a:avLst/>
@@ -3409,21 +3373,37 @@
           <a:lstStyle/>
           <a:p>
             <a:pPr>
-              <a:defRPr sz="3800" b="1">
-                <a:solidFill>
-                  <a:srgbClr val="FFFFFF"/>
+              <a:defRPr sz="1050" b="1">
+                <a:solidFill>
+                  <a:srgbClr val="06B6D4"/>
                 </a:solidFill>
                 <a:latin typeface="Trebuchet MS"/>
               </a:defRPr>
             </a:pPr>
             <a:r>
-              <a:t>AgentIQ SENTINEL</a:t>
+              <a:t>🛡️ TRANSORG DATATHON 2026  •  DEFCON LEVEL 2 ACTIVE  •  NIST SP 800-207 ZERO-TRUST</a:t>
             </a:r>
           </a:p>
           <a:p>
             <a:pPr>
               <a:spcBef>
                 <a:spcPts val="400"/>
+              </a:spcBef>
+              <a:defRPr sz="4000" b="1">
+                <a:solidFill>
+                  <a:srgbClr val="FFFFFF"/>
+                </a:solidFill>
+                <a:latin typeface="Trebuchet MS"/>
+              </a:defRPr>
+            </a:pPr>
+            <a:r>
+              <a:t>AgentIQ SENTINEL</a:t>
+            </a:r>
+          </a:p>
+          <a:p>
+            <a:pPr>
+              <a:spcBef>
+                <a:spcPts val="200"/>
               </a:spcBef>
               <a:defRPr sz="2000" b="1">
                 <a:solidFill>
@@ -3449,20 +3429,20 @@
               </a:defRPr>
             </a:pPr>
             <a:r>
-              <a:t>Unifying 62,431 multi-vector telemetry events across 3,000 enterprise identities — surfacing 507 offboarded breaches, clock-skew tampering, and circular IP tunneling with sub-8ms DuckDB OLAP &amp; Dual-Model AI.</a:t>
-            </a:r>
-          </a:p>
-        </p:txBody>
-      </p:sp>
-      <p:sp>
-        <p:nvSpPr>
-          <p:cNvPr id="10" name="Rounded Rectangle 9"/>
+              <a:t>Unifying 62,431 multi-vector telemetry events across 3,000 enterprise identities in real time — surfacing 507 offboarded employee breaches, clock-skew log tampering, and circular IP tunneling with sub-8ms DuckDB OLAP &amp; Dual-Model AI.</a:t>
+            </a:r>
+          </a:p>
+        </p:txBody>
+      </p:sp>
+      <p:sp>
+        <p:nvSpPr>
+          <p:cNvPr id="9" name="Rounded Rectangle 8"/>
           <p:cNvSpPr/>
           <p:nvPr/>
         </p:nvSpPr>
         <p:spPr>
           <a:xfrm>
-            <a:off x="1097280" y="4389120"/>
+            <a:off x="1097280" y="4480560"/>
             <a:ext cx="2286000" cy="1371600"/>
           </a:xfrm>
           <a:prstGeom prst="roundRect">
@@ -3501,13 +3481,56 @@
       </p:sp>
       <p:sp>
         <p:nvSpPr>
+          <p:cNvPr id="10" name="Rectangle 9"/>
+          <p:cNvSpPr/>
+          <p:nvPr/>
+        </p:nvSpPr>
+        <p:spPr>
+          <a:xfrm>
+            <a:off x="1280160" y="4480560"/>
+            <a:ext cx="1920240" cy="36576"/>
+          </a:xfrm>
+          <a:prstGeom prst="rect">
+            <a:avLst/>
+          </a:prstGeom>
+          <a:solidFill>
+            <a:srgbClr val="06B6D4"/>
+          </a:solidFill>
+          <a:ln>
+            <a:noFill/>
+          </a:ln>
+        </p:spPr>
+        <p:style>
+          <a:lnRef idx="1">
+            <a:schemeClr val="accent1"/>
+          </a:lnRef>
+          <a:fillRef idx="3">
+            <a:schemeClr val="accent1"/>
+          </a:fillRef>
+          <a:effectRef idx="2">
+            <a:schemeClr val="accent1"/>
+          </a:effectRef>
+          <a:fontRef idx="minor">
+            <a:schemeClr val="lt1"/>
+          </a:fontRef>
+        </p:style>
+        <p:txBody>
+          <a:bodyPr rtlCol="0" anchor="ctr"/>
+          <a:lstStyle/>
+          <a:p>
+            <a:pPr algn="ctr"/>
+          </a:p>
+        </p:txBody>
+      </p:sp>
+      <p:sp>
+        <p:nvSpPr>
           <p:cNvPr id="11" name="TextBox 10"/>
           <p:cNvSpPr txBox="1"/>
           <p:nvPr/>
         </p:nvSpPr>
         <p:spPr>
           <a:xfrm>
-            <a:off x="1207007" y="4462272"/>
+            <a:off x="1207007" y="4553712"/>
             <a:ext cx="2066543" cy="1225296"/>
           </a:xfrm>
           <a:prstGeom prst="rect">
@@ -3575,7 +3598,7 @@
         </p:nvSpPr>
         <p:spPr>
           <a:xfrm>
-            <a:off x="3566160" y="4389120"/>
+            <a:off x="3566160" y="4480560"/>
             <a:ext cx="2286000" cy="1371600"/>
           </a:xfrm>
           <a:prstGeom prst="roundRect">
@@ -3614,13 +3637,56 @@
       </p:sp>
       <p:sp>
         <p:nvSpPr>
-          <p:cNvPr id="13" name="TextBox 12"/>
+          <p:cNvPr id="13" name="Rectangle 12"/>
+          <p:cNvSpPr/>
+          <p:nvPr/>
+        </p:nvSpPr>
+        <p:spPr>
+          <a:xfrm>
+            <a:off x="3749039" y="4480560"/>
+            <a:ext cx="1920240" cy="36576"/>
+          </a:xfrm>
+          <a:prstGeom prst="rect">
+            <a:avLst/>
+          </a:prstGeom>
+          <a:solidFill>
+            <a:srgbClr val="F43F5E"/>
+          </a:solidFill>
+          <a:ln>
+            <a:noFill/>
+          </a:ln>
+        </p:spPr>
+        <p:style>
+          <a:lnRef idx="1">
+            <a:schemeClr val="accent1"/>
+          </a:lnRef>
+          <a:fillRef idx="3">
+            <a:schemeClr val="accent1"/>
+          </a:fillRef>
+          <a:effectRef idx="2">
+            <a:schemeClr val="accent1"/>
+          </a:effectRef>
+          <a:fontRef idx="minor">
+            <a:schemeClr val="lt1"/>
+          </a:fontRef>
+        </p:style>
+        <p:txBody>
+          <a:bodyPr rtlCol="0" anchor="ctr"/>
+          <a:lstStyle/>
+          <a:p>
+            <a:pPr algn="ctr"/>
+          </a:p>
+        </p:txBody>
+      </p:sp>
+      <p:sp>
+        <p:nvSpPr>
+          <p:cNvPr id="14" name="TextBox 13"/>
           <p:cNvSpPr txBox="1"/>
           <p:nvPr/>
         </p:nvSpPr>
         <p:spPr>
           <a:xfrm>
-            <a:off x="3675887" y="4462272"/>
+            <a:off x="3675887" y="4553712"/>
             <a:ext cx="2066543" cy="1225296"/>
           </a:xfrm>
           <a:prstGeom prst="rect">
@@ -3675,20 +3741,20 @@
               </a:defRPr>
             </a:pPr>
             <a:r>
-              <a:t>Offboarded identities caught</a:t>
-            </a:r>
-          </a:p>
-        </p:txBody>
-      </p:sp>
-      <p:sp>
-        <p:nvSpPr>
-          <p:cNvPr id="14" name="Rounded Rectangle 13"/>
+              <a:t>Offboarded staff active</a:t>
+            </a:r>
+          </a:p>
+        </p:txBody>
+      </p:sp>
+      <p:sp>
+        <p:nvSpPr>
+          <p:cNvPr id="15" name="Rounded Rectangle 14"/>
           <p:cNvSpPr/>
           <p:nvPr/>
         </p:nvSpPr>
         <p:spPr>
           <a:xfrm>
-            <a:off x="6035040" y="4389120"/>
+            <a:off x="6035040" y="4480560"/>
             <a:ext cx="2286000" cy="1371600"/>
           </a:xfrm>
           <a:prstGeom prst="roundRect">
@@ -3727,13 +3793,56 @@
       </p:sp>
       <p:sp>
         <p:nvSpPr>
-          <p:cNvPr id="15" name="TextBox 14"/>
+          <p:cNvPr id="16" name="Rectangle 15"/>
+          <p:cNvSpPr/>
+          <p:nvPr/>
+        </p:nvSpPr>
+        <p:spPr>
+          <a:xfrm>
+            <a:off x="6217920" y="4480560"/>
+            <a:ext cx="1920240" cy="36576"/>
+          </a:xfrm>
+          <a:prstGeom prst="rect">
+            <a:avLst/>
+          </a:prstGeom>
+          <a:solidFill>
+            <a:srgbClr val="A855F7"/>
+          </a:solidFill>
+          <a:ln>
+            <a:noFill/>
+          </a:ln>
+        </p:spPr>
+        <p:style>
+          <a:lnRef idx="1">
+            <a:schemeClr val="accent1"/>
+          </a:lnRef>
+          <a:fillRef idx="3">
+            <a:schemeClr val="accent1"/>
+          </a:fillRef>
+          <a:effectRef idx="2">
+            <a:schemeClr val="accent1"/>
+          </a:effectRef>
+          <a:fontRef idx="minor">
+            <a:schemeClr val="lt1"/>
+          </a:fontRef>
+        </p:style>
+        <p:txBody>
+          <a:bodyPr rtlCol="0" anchor="ctr"/>
+          <a:lstStyle/>
+          <a:p>
+            <a:pPr algn="ctr"/>
+          </a:p>
+        </p:txBody>
+      </p:sp>
+      <p:sp>
+        <p:nvSpPr>
+          <p:cNvPr id="17" name="TextBox 16"/>
           <p:cNvSpPr txBox="1"/>
           <p:nvPr/>
         </p:nvSpPr>
         <p:spPr>
           <a:xfrm>
-            <a:off x="6144768" y="4462272"/>
+            <a:off x="6144768" y="4553712"/>
             <a:ext cx="2066543" cy="1225296"/>
           </a:xfrm>
           <a:prstGeom prst="rect">
@@ -3795,14 +3904,14 @@
       </p:sp>
       <p:sp>
         <p:nvSpPr>
-          <p:cNvPr id="16" name="Rounded Rectangle 15"/>
+          <p:cNvPr id="18" name="Rounded Rectangle 17"/>
           <p:cNvSpPr/>
           <p:nvPr/>
         </p:nvSpPr>
         <p:spPr>
           <a:xfrm>
-            <a:off x="8503920" y="4389120"/>
-            <a:ext cx="2468880" cy="1371600"/>
+            <a:off x="8503920" y="4480560"/>
+            <a:ext cx="2560320" cy="1371600"/>
           </a:xfrm>
           <a:prstGeom prst="roundRect">
             <a:avLst/>
@@ -3840,14 +3949,57 @@
       </p:sp>
       <p:sp>
         <p:nvSpPr>
-          <p:cNvPr id="17" name="TextBox 16"/>
+          <p:cNvPr id="19" name="Rectangle 18"/>
+          <p:cNvSpPr/>
+          <p:nvPr/>
+        </p:nvSpPr>
+        <p:spPr>
+          <a:xfrm>
+            <a:off x="8686800" y="4480560"/>
+            <a:ext cx="2194560" cy="36576"/>
+          </a:xfrm>
+          <a:prstGeom prst="rect">
+            <a:avLst/>
+          </a:prstGeom>
+          <a:solidFill>
+            <a:srgbClr val="10B981"/>
+          </a:solidFill>
+          <a:ln>
+            <a:noFill/>
+          </a:ln>
+        </p:spPr>
+        <p:style>
+          <a:lnRef idx="1">
+            <a:schemeClr val="accent1"/>
+          </a:lnRef>
+          <a:fillRef idx="3">
+            <a:schemeClr val="accent1"/>
+          </a:fillRef>
+          <a:effectRef idx="2">
+            <a:schemeClr val="accent1"/>
+          </a:effectRef>
+          <a:fontRef idx="minor">
+            <a:schemeClr val="lt1"/>
+          </a:fontRef>
+        </p:style>
+        <p:txBody>
+          <a:bodyPr rtlCol="0" anchor="ctr"/>
+          <a:lstStyle/>
+          <a:p>
+            <a:pPr algn="ctr"/>
+          </a:p>
+        </p:txBody>
+      </p:sp>
+      <p:sp>
+        <p:nvSpPr>
+          <p:cNvPr id="20" name="TextBox 19"/>
           <p:cNvSpPr txBox="1"/>
           <p:nvPr/>
         </p:nvSpPr>
         <p:spPr>
           <a:xfrm>
-            <a:off x="8613648" y="4462272"/>
-            <a:ext cx="2249424" cy="1225296"/>
+            <a:off x="8613648" y="4553712"/>
+            <a:ext cx="2340863" cy="1225296"/>
           </a:xfrm>
           <a:prstGeom prst="rect">
             <a:avLst/>
@@ -4018,8 +4170,8 @@
         </p:nvSpPr>
         <p:spPr>
           <a:xfrm>
-            <a:off x="0" y="6537960"/>
-            <a:ext cx="12191695" cy="320040"/>
+            <a:off x="0" y="6510528"/>
+            <a:ext cx="12191695" cy="347472"/>
           </a:xfrm>
           <a:prstGeom prst="rect">
             <a:avLst/>
@@ -4029,7 +4181,7 @@
           </a:solidFill>
           <a:ln w="6350">
             <a:solidFill>
-              <a:srgbClr val="2D3C58"/>
+              <a:srgbClr val="283650"/>
             </a:solidFill>
           </a:ln>
         </p:spPr>
@@ -4063,8 +4215,8 @@
         </p:nvSpPr>
         <p:spPr>
           <a:xfrm>
-            <a:off x="731520" y="6556248"/>
-            <a:ext cx="6400800" cy="274320"/>
+            <a:off x="731520" y="6528816"/>
+            <a:ext cx="7315200" cy="274320"/>
           </a:xfrm>
           <a:prstGeom prst="rect">
             <a:avLst/>
@@ -4086,7 +4238,7 @@
               </a:defRPr>
             </a:pPr>
             <a:r>
-              <a:t>AgentIQ SENTINEL  •  Continuous Zero-Trust Cognitive Cyber Defense  •  TransOrg Datathon 2026</a:t>
+              <a:t>🛡️ AgentIQ SENTINEL  •  Continuous Zero-Trust Cognitive Cyber Defense  •  TransOrg Datathon 2026</a:t>
             </a:r>
           </a:p>
         </p:txBody>
@@ -4099,7 +4251,7 @@
         </p:nvSpPr>
         <p:spPr>
           <a:xfrm>
-            <a:off x="8686800" y="6556248"/>
+            <a:off x="8686800" y="6528816"/>
             <a:ext cx="2743200" cy="274320"/>
           </a:xfrm>
           <a:prstGeom prst="rect">
@@ -4135,14 +4287,14 @@
         </p:nvSpPr>
         <p:spPr>
           <a:xfrm>
-            <a:off x="731520" y="347472"/>
-            <a:ext cx="2926080" cy="256032"/>
+            <a:off x="731520" y="292608"/>
+            <a:ext cx="3108960" cy="256032"/>
           </a:xfrm>
           <a:prstGeom prst="roundRect">
             <a:avLst/>
           </a:prstGeom>
           <a:solidFill>
-            <a:srgbClr val="16213A"/>
+            <a:srgbClr val="18223A"/>
           </a:solidFill>
           <a:ln w="10160">
             <a:solidFill>
@@ -4180,8 +4332,8 @@
         </p:nvSpPr>
         <p:spPr>
           <a:xfrm>
-            <a:off x="777240" y="347472"/>
-            <a:ext cx="2834640" cy="256032"/>
+            <a:off x="777240" y="292608"/>
+            <a:ext cx="3017520" cy="256032"/>
           </a:xfrm>
           <a:prstGeom prst="rect">
             <a:avLst/>
@@ -4216,7 +4368,7 @@
         </p:nvSpPr>
         <p:spPr>
           <a:xfrm>
-            <a:off x="731520" y="658368"/>
+            <a:off x="731520" y="594360"/>
             <a:ext cx="10698480" cy="502920"/>
           </a:xfrm>
           <a:prstGeom prst="rect">
@@ -4252,7 +4404,7 @@
         </p:nvSpPr>
         <p:spPr>
           <a:xfrm>
-            <a:off x="731520" y="1133856"/>
+            <a:off x="731520" y="1078992"/>
             <a:ext cx="10698480" cy="320040"/>
           </a:xfrm>
           <a:prstGeom prst="rect">
@@ -4288,8 +4440,8 @@
         </p:nvSpPr>
         <p:spPr>
           <a:xfrm>
-            <a:off x="731520" y="1554480"/>
-            <a:ext cx="5212080" cy="4572000"/>
+            <a:off x="731520" y="1463040"/>
+            <a:ext cx="5212080" cy="4754880"/>
           </a:xfrm>
           <a:prstGeom prst="roundRect">
             <a:avLst/>
@@ -4299,7 +4451,7 @@
           </a:solidFill>
           <a:ln w="12700">
             <a:solidFill>
-              <a:srgbClr val="2D3C58"/>
+              <a:srgbClr val="283650"/>
             </a:solidFill>
           </a:ln>
         </p:spPr>
@@ -4333,7 +4485,7 @@
         </p:nvSpPr>
         <p:spPr>
           <a:xfrm>
-            <a:off x="731520" y="1554480"/>
+            <a:off x="731520" y="1463040"/>
             <a:ext cx="5212080" cy="45720"/>
           </a:xfrm>
           <a:prstGeom prst="rect">
@@ -4376,8 +4528,8 @@
         </p:nvSpPr>
         <p:spPr>
           <a:xfrm>
-            <a:off x="896112" y="1664207"/>
-            <a:ext cx="4882896" cy="4352544"/>
+            <a:off x="896112" y="1572768"/>
+            <a:ext cx="4882896" cy="4535424"/>
           </a:xfrm>
           <a:prstGeom prst="rect">
             <a:avLst/>
@@ -4418,9 +4570,9 @@
           <a:p>
             <a:pPr>
               <a:spcBef>
-                <a:spcPts val="300"/>
+                <a:spcPts val="400"/>
               </a:spcBef>
-              <a:defRPr sz="950">
+              <a:defRPr sz="1050">
                 <a:solidFill>
                   <a:srgbClr val="E2E8F0"/>
                 </a:solidFill>
@@ -4434,9 +4586,9 @@
           <a:p>
             <a:pPr>
               <a:spcBef>
-                <a:spcPts val="300"/>
+                <a:spcPts val="400"/>
               </a:spcBef>
-              <a:defRPr sz="950">
+              <a:defRPr sz="1050">
                 <a:solidFill>
                   <a:srgbClr val="E2E8F0"/>
                 </a:solidFill>
@@ -4450,9 +4602,9 @@
           <a:p>
             <a:pPr>
               <a:spcBef>
-                <a:spcPts val="300"/>
+                <a:spcPts val="400"/>
               </a:spcBef>
-              <a:defRPr sz="950">
+              <a:defRPr sz="1050">
                 <a:solidFill>
                   <a:srgbClr val="E2E8F0"/>
                 </a:solidFill>
@@ -4466,9 +4618,9 @@
           <a:p>
             <a:pPr>
               <a:spcBef>
-                <a:spcPts val="300"/>
+                <a:spcPts val="400"/>
               </a:spcBef>
-              <a:defRPr sz="950">
+              <a:defRPr sz="1050">
                 <a:solidFill>
                   <a:srgbClr val="E2E8F0"/>
                 </a:solidFill>
@@ -4489,8 +4641,8 @@
         </p:nvSpPr>
         <p:spPr>
           <a:xfrm>
-            <a:off x="6217920" y="1554480"/>
-            <a:ext cx="5212080" cy="4572000"/>
+            <a:off x="6217920" y="1463040"/>
+            <a:ext cx="5212080" cy="4754880"/>
           </a:xfrm>
           <a:prstGeom prst="roundRect">
             <a:avLst/>
@@ -4500,7 +4652,7 @@
           </a:solidFill>
           <a:ln w="12700">
             <a:solidFill>
-              <a:srgbClr val="2D3C58"/>
+              <a:srgbClr val="283650"/>
             </a:solidFill>
           </a:ln>
         </p:spPr>
@@ -4534,7 +4686,7 @@
         </p:nvSpPr>
         <p:spPr>
           <a:xfrm>
-            <a:off x="6217920" y="1554480"/>
+            <a:off x="6217920" y="1463040"/>
             <a:ext cx="5212080" cy="45720"/>
           </a:xfrm>
           <a:prstGeom prst="rect">
@@ -4577,8 +4729,8 @@
         </p:nvSpPr>
         <p:spPr>
           <a:xfrm>
-            <a:off x="6382512" y="1664207"/>
-            <a:ext cx="4882896" cy="4352544"/>
+            <a:off x="6382512" y="1572768"/>
+            <a:ext cx="4882896" cy="4535424"/>
           </a:xfrm>
           <a:prstGeom prst="rect">
             <a:avLst/>
@@ -4619,9 +4771,9 @@
           <a:p>
             <a:pPr>
               <a:spcBef>
-                <a:spcPts val="300"/>
+                <a:spcPts val="400"/>
               </a:spcBef>
-              <a:defRPr sz="950">
+              <a:defRPr sz="1050">
                 <a:solidFill>
                   <a:srgbClr val="E2E8F0"/>
                 </a:solidFill>
@@ -4635,9 +4787,9 @@
           <a:p>
             <a:pPr>
               <a:spcBef>
-                <a:spcPts val="300"/>
+                <a:spcPts val="400"/>
               </a:spcBef>
-              <a:defRPr sz="950">
+              <a:defRPr sz="1050">
                 <a:solidFill>
                   <a:srgbClr val="E2E8F0"/>
                 </a:solidFill>
@@ -4651,9 +4803,9 @@
           <a:p>
             <a:pPr>
               <a:spcBef>
-                <a:spcPts val="300"/>
+                <a:spcPts val="400"/>
               </a:spcBef>
-              <a:defRPr sz="950">
+              <a:defRPr sz="1050">
                 <a:solidFill>
                   <a:srgbClr val="E2E8F0"/>
                 </a:solidFill>
@@ -4667,9 +4819,9 @@
           <a:p>
             <a:pPr>
               <a:spcBef>
-                <a:spcPts val="300"/>
+                <a:spcPts val="400"/>
               </a:spcBef>
-              <a:defRPr sz="950">
+              <a:defRPr sz="1050">
                 <a:solidFill>
                   <a:srgbClr val="E2E8F0"/>
                 </a:solidFill>
@@ -4794,8 +4946,8 @@
         </p:nvSpPr>
         <p:spPr>
           <a:xfrm>
-            <a:off x="0" y="6537960"/>
-            <a:ext cx="12191695" cy="320040"/>
+            <a:off x="0" y="6510528"/>
+            <a:ext cx="12191695" cy="347472"/>
           </a:xfrm>
           <a:prstGeom prst="rect">
             <a:avLst/>
@@ -4805,7 +4957,7 @@
           </a:solidFill>
           <a:ln w="6350">
             <a:solidFill>
-              <a:srgbClr val="2D3C58"/>
+              <a:srgbClr val="283650"/>
             </a:solidFill>
           </a:ln>
         </p:spPr>
@@ -4839,8 +4991,8 @@
         </p:nvSpPr>
         <p:spPr>
           <a:xfrm>
-            <a:off x="731520" y="6556248"/>
-            <a:ext cx="6400800" cy="274320"/>
+            <a:off x="731520" y="6528816"/>
+            <a:ext cx="7315200" cy="274320"/>
           </a:xfrm>
           <a:prstGeom prst="rect">
             <a:avLst/>
@@ -4862,7 +5014,7 @@
               </a:defRPr>
             </a:pPr>
             <a:r>
-              <a:t>AgentIQ SENTINEL  •  Continuous Zero-Trust Cognitive Cyber Defense  •  TransOrg Datathon 2026</a:t>
+              <a:t>🛡️ AgentIQ SENTINEL  •  Continuous Zero-Trust Cognitive Cyber Defense  •  TransOrg Datathon 2026</a:t>
             </a:r>
           </a:p>
         </p:txBody>
@@ -4875,7 +5027,7 @@
         </p:nvSpPr>
         <p:spPr>
           <a:xfrm>
-            <a:off x="8686800" y="6556248"/>
+            <a:off x="8686800" y="6528816"/>
             <a:ext cx="2743200" cy="274320"/>
           </a:xfrm>
           <a:prstGeom prst="rect">
@@ -4911,14 +5063,14 @@
         </p:nvSpPr>
         <p:spPr>
           <a:xfrm>
-            <a:off x="731520" y="347472"/>
-            <a:ext cx="2926080" cy="256032"/>
+            <a:off x="731520" y="292608"/>
+            <a:ext cx="3108960" cy="256032"/>
           </a:xfrm>
           <a:prstGeom prst="roundRect">
             <a:avLst/>
           </a:prstGeom>
           <a:solidFill>
-            <a:srgbClr val="16213A"/>
+            <a:srgbClr val="18223A"/>
           </a:solidFill>
           <a:ln w="10160">
             <a:solidFill>
@@ -4956,8 +5108,8 @@
         </p:nvSpPr>
         <p:spPr>
           <a:xfrm>
-            <a:off x="777240" y="347472"/>
-            <a:ext cx="2834640" cy="256032"/>
+            <a:off x="777240" y="292608"/>
+            <a:ext cx="3017520" cy="256032"/>
           </a:xfrm>
           <a:prstGeom prst="rect">
             <a:avLst/>
@@ -4992,7 +5144,7 @@
         </p:nvSpPr>
         <p:spPr>
           <a:xfrm>
-            <a:off x="731520" y="658368"/>
+            <a:off x="731520" y="594360"/>
             <a:ext cx="10698480" cy="502920"/>
           </a:xfrm>
           <a:prstGeom prst="rect">
@@ -5028,7 +5180,7 @@
         </p:nvSpPr>
         <p:spPr>
           <a:xfrm>
-            <a:off x="731520" y="1133856"/>
+            <a:off x="731520" y="1078992"/>
             <a:ext cx="10698480" cy="320040"/>
           </a:xfrm>
           <a:prstGeom prst="rect">
@@ -5064,8 +5216,8 @@
         </p:nvSpPr>
         <p:spPr>
           <a:xfrm>
-            <a:off x="731520" y="1554480"/>
-            <a:ext cx="3383280" cy="4572000"/>
+            <a:off x="731520" y="1463040"/>
+            <a:ext cx="3383280" cy="4754880"/>
           </a:xfrm>
           <a:prstGeom prst="roundRect">
             <a:avLst/>
@@ -5075,7 +5227,7 @@
           </a:solidFill>
           <a:ln w="12700">
             <a:solidFill>
-              <a:srgbClr val="2D3C58"/>
+              <a:srgbClr val="283650"/>
             </a:solidFill>
           </a:ln>
         </p:spPr>
@@ -5109,7 +5261,7 @@
         </p:nvSpPr>
         <p:spPr>
           <a:xfrm>
-            <a:off x="731520" y="1554480"/>
+            <a:off x="731520" y="1463040"/>
             <a:ext cx="3383280" cy="45720"/>
           </a:xfrm>
           <a:prstGeom prst="rect">
@@ -5152,8 +5304,8 @@
         </p:nvSpPr>
         <p:spPr>
           <a:xfrm>
-            <a:off x="896112" y="1664207"/>
-            <a:ext cx="3054096" cy="4352544"/>
+            <a:off x="896112" y="1572768"/>
+            <a:ext cx="3054096" cy="4535424"/>
           </a:xfrm>
           <a:prstGeom prst="rect">
             <a:avLst/>
@@ -5194,9 +5346,9 @@
           <a:p>
             <a:pPr>
               <a:spcBef>
-                <a:spcPts val="300"/>
+                <a:spcPts val="400"/>
               </a:spcBef>
-              <a:defRPr sz="950">
+              <a:defRPr sz="1050">
                 <a:solidFill>
                   <a:srgbClr val="E2E8F0"/>
                 </a:solidFill>
@@ -5210,9 +5362,9 @@
           <a:p>
             <a:pPr>
               <a:spcBef>
-                <a:spcPts val="300"/>
+                <a:spcPts val="400"/>
               </a:spcBef>
-              <a:defRPr sz="950">
+              <a:defRPr sz="1050">
                 <a:solidFill>
                   <a:srgbClr val="E2E8F0"/>
                 </a:solidFill>
@@ -5226,9 +5378,9 @@
           <a:p>
             <a:pPr>
               <a:spcBef>
-                <a:spcPts val="300"/>
+                <a:spcPts val="400"/>
               </a:spcBef>
-              <a:defRPr sz="950">
+              <a:defRPr sz="1050">
                 <a:solidFill>
                   <a:srgbClr val="E2E8F0"/>
                 </a:solidFill>
@@ -5242,9 +5394,9 @@
           <a:p>
             <a:pPr>
               <a:spcBef>
-                <a:spcPts val="300"/>
+                <a:spcPts val="400"/>
               </a:spcBef>
-              <a:defRPr sz="950">
+              <a:defRPr sz="1050">
                 <a:solidFill>
                   <a:srgbClr val="E2E8F0"/>
                 </a:solidFill>
@@ -5265,8 +5417,8 @@
         </p:nvSpPr>
         <p:spPr>
           <a:xfrm>
-            <a:off x="4389120" y="1554480"/>
-            <a:ext cx="3383280" cy="4572000"/>
+            <a:off x="4389120" y="1463040"/>
+            <a:ext cx="3383280" cy="4754880"/>
           </a:xfrm>
           <a:prstGeom prst="roundRect">
             <a:avLst/>
@@ -5276,7 +5428,7 @@
           </a:solidFill>
           <a:ln w="12700">
             <a:solidFill>
-              <a:srgbClr val="2D3C58"/>
+              <a:srgbClr val="283650"/>
             </a:solidFill>
           </a:ln>
         </p:spPr>
@@ -5310,7 +5462,7 @@
         </p:nvSpPr>
         <p:spPr>
           <a:xfrm>
-            <a:off x="4389120" y="1554480"/>
+            <a:off x="4389120" y="1463040"/>
             <a:ext cx="3383280" cy="45720"/>
           </a:xfrm>
           <a:prstGeom prst="rect">
@@ -5353,8 +5505,8 @@
         </p:nvSpPr>
         <p:spPr>
           <a:xfrm>
-            <a:off x="4553712" y="1664207"/>
-            <a:ext cx="3054096" cy="4352544"/>
+            <a:off x="4553712" y="1572768"/>
+            <a:ext cx="3054096" cy="4535424"/>
           </a:xfrm>
           <a:prstGeom prst="rect">
             <a:avLst/>
@@ -5395,9 +5547,9 @@
           <a:p>
             <a:pPr>
               <a:spcBef>
-                <a:spcPts val="300"/>
+                <a:spcPts val="400"/>
               </a:spcBef>
-              <a:defRPr sz="950">
+              <a:defRPr sz="1050">
                 <a:solidFill>
                   <a:srgbClr val="E2E8F0"/>
                 </a:solidFill>
@@ -5411,9 +5563,9 @@
           <a:p>
             <a:pPr>
               <a:spcBef>
-                <a:spcPts val="300"/>
+                <a:spcPts val="400"/>
               </a:spcBef>
-              <a:defRPr sz="950">
+              <a:defRPr sz="1050">
                 <a:solidFill>
                   <a:srgbClr val="E2E8F0"/>
                 </a:solidFill>
@@ -5427,9 +5579,9 @@
           <a:p>
             <a:pPr>
               <a:spcBef>
-                <a:spcPts val="300"/>
+                <a:spcPts val="400"/>
               </a:spcBef>
-              <a:defRPr sz="950">
+              <a:defRPr sz="1050">
                 <a:solidFill>
                   <a:srgbClr val="E2E8F0"/>
                 </a:solidFill>
@@ -5443,9 +5595,9 @@
           <a:p>
             <a:pPr>
               <a:spcBef>
-                <a:spcPts val="300"/>
+                <a:spcPts val="400"/>
               </a:spcBef>
-              <a:defRPr sz="950">
+              <a:defRPr sz="1050">
                 <a:solidFill>
                   <a:srgbClr val="E2E8F0"/>
                 </a:solidFill>
@@ -5466,8 +5618,8 @@
         </p:nvSpPr>
         <p:spPr>
           <a:xfrm>
-            <a:off x="8046720" y="1554480"/>
-            <a:ext cx="3383280" cy="4572000"/>
+            <a:off x="8046720" y="1463040"/>
+            <a:ext cx="3383280" cy="4754880"/>
           </a:xfrm>
           <a:prstGeom prst="roundRect">
             <a:avLst/>
@@ -5477,7 +5629,7 @@
           </a:solidFill>
           <a:ln w="12700">
             <a:solidFill>
-              <a:srgbClr val="2D3C58"/>
+              <a:srgbClr val="283650"/>
             </a:solidFill>
           </a:ln>
         </p:spPr>
@@ -5511,7 +5663,7 @@
         </p:nvSpPr>
         <p:spPr>
           <a:xfrm>
-            <a:off x="8046720" y="1554480"/>
+            <a:off x="8046720" y="1463040"/>
             <a:ext cx="3383280" cy="45720"/>
           </a:xfrm>
           <a:prstGeom prst="rect">
@@ -5554,8 +5706,8 @@
         </p:nvSpPr>
         <p:spPr>
           <a:xfrm>
-            <a:off x="8211312" y="1664207"/>
-            <a:ext cx="3054096" cy="4352544"/>
+            <a:off x="8211312" y="1572768"/>
+            <a:ext cx="3054096" cy="4535424"/>
           </a:xfrm>
           <a:prstGeom prst="rect">
             <a:avLst/>
@@ -5596,9 +5748,9 @@
           <a:p>
             <a:pPr>
               <a:spcBef>
-                <a:spcPts val="300"/>
+                <a:spcPts val="400"/>
               </a:spcBef>
-              <a:defRPr sz="950">
+              <a:defRPr sz="1050">
                 <a:solidFill>
                   <a:srgbClr val="E2E8F0"/>
                 </a:solidFill>
@@ -5612,9 +5764,9 @@
           <a:p>
             <a:pPr>
               <a:spcBef>
-                <a:spcPts val="300"/>
+                <a:spcPts val="400"/>
               </a:spcBef>
-              <a:defRPr sz="950">
+              <a:defRPr sz="1050">
                 <a:solidFill>
                   <a:srgbClr val="E2E8F0"/>
                 </a:solidFill>
@@ -5628,9 +5780,9 @@
           <a:p>
             <a:pPr>
               <a:spcBef>
-                <a:spcPts val="300"/>
+                <a:spcPts val="400"/>
               </a:spcBef>
-              <a:defRPr sz="950">
+              <a:defRPr sz="1050">
                 <a:solidFill>
                   <a:srgbClr val="E2E8F0"/>
                 </a:solidFill>
@@ -5644,9 +5796,9 @@
           <a:p>
             <a:pPr>
               <a:spcBef>
-                <a:spcPts val="300"/>
+                <a:spcPts val="400"/>
               </a:spcBef>
-              <a:defRPr sz="950">
+              <a:defRPr sz="1050">
                 <a:solidFill>
                   <a:srgbClr val="E2E8F0"/>
                 </a:solidFill>
@@ -5771,8 +5923,8 @@
         </p:nvSpPr>
         <p:spPr>
           <a:xfrm>
-            <a:off x="0" y="6537960"/>
-            <a:ext cx="12191695" cy="320040"/>
+            <a:off x="0" y="6510528"/>
+            <a:ext cx="12191695" cy="347472"/>
           </a:xfrm>
           <a:prstGeom prst="rect">
             <a:avLst/>
@@ -5782,7 +5934,7 @@
           </a:solidFill>
           <a:ln w="6350">
             <a:solidFill>
-              <a:srgbClr val="2D3C58"/>
+              <a:srgbClr val="283650"/>
             </a:solidFill>
           </a:ln>
         </p:spPr>
@@ -5816,8 +5968,8 @@
         </p:nvSpPr>
         <p:spPr>
           <a:xfrm>
-            <a:off x="731520" y="6556248"/>
-            <a:ext cx="6400800" cy="274320"/>
+            <a:off x="731520" y="6528816"/>
+            <a:ext cx="7315200" cy="274320"/>
           </a:xfrm>
           <a:prstGeom prst="rect">
             <a:avLst/>
@@ -5839,7 +5991,7 @@
               </a:defRPr>
             </a:pPr>
             <a:r>
-              <a:t>AgentIQ SENTINEL  •  Continuous Zero-Trust Cognitive Cyber Defense  •  TransOrg Datathon 2026</a:t>
+              <a:t>🛡️ AgentIQ SENTINEL  •  Continuous Zero-Trust Cognitive Cyber Defense  •  TransOrg Datathon 2026</a:t>
             </a:r>
           </a:p>
         </p:txBody>
@@ -5852,7 +6004,7 @@
         </p:nvSpPr>
         <p:spPr>
           <a:xfrm>
-            <a:off x="8686800" y="6556248"/>
+            <a:off x="8686800" y="6528816"/>
             <a:ext cx="2743200" cy="274320"/>
           </a:xfrm>
           <a:prstGeom prst="rect">
@@ -5888,14 +6040,14 @@
         </p:nvSpPr>
         <p:spPr>
           <a:xfrm>
-            <a:off x="731520" y="347472"/>
-            <a:ext cx="2926080" cy="256032"/>
+            <a:off x="731520" y="292608"/>
+            <a:ext cx="3108960" cy="256032"/>
           </a:xfrm>
           <a:prstGeom prst="roundRect">
             <a:avLst/>
           </a:prstGeom>
           <a:solidFill>
-            <a:srgbClr val="16213A"/>
+            <a:srgbClr val="18223A"/>
           </a:solidFill>
           <a:ln w="10160">
             <a:solidFill>
@@ -5933,8 +6085,8 @@
         </p:nvSpPr>
         <p:spPr>
           <a:xfrm>
-            <a:off x="777240" y="347472"/>
-            <a:ext cx="2834640" cy="256032"/>
+            <a:off x="777240" y="292608"/>
+            <a:ext cx="3017520" cy="256032"/>
           </a:xfrm>
           <a:prstGeom prst="rect">
             <a:avLst/>
@@ -5969,7 +6121,7 @@
         </p:nvSpPr>
         <p:spPr>
           <a:xfrm>
-            <a:off x="731520" y="658368"/>
+            <a:off x="731520" y="594360"/>
             <a:ext cx="10698480" cy="502920"/>
           </a:xfrm>
           <a:prstGeom prst="rect">
@@ -6005,7 +6157,7 @@
         </p:nvSpPr>
         <p:spPr>
           <a:xfrm>
-            <a:off x="731520" y="1133856"/>
+            <a:off x="731520" y="1078992"/>
             <a:ext cx="10698480" cy="320040"/>
           </a:xfrm>
           <a:prstGeom prst="rect">
@@ -6042,8 +6194,8 @@
           <p:nvPr/>
         </p:nvGraphicFramePr>
         <p:xfrm>
-          <a:off x="731520" y="1554480"/>
-          <a:ext cx="10728655" cy="4480560"/>
+          <a:off x="731520" y="1463040"/>
+          <a:ext cx="10728655" cy="4663440"/>
         </p:xfrm>
         <a:graphic>
           <a:graphicData uri="http://schemas.openxmlformats.org/drawingml/2006/table">
@@ -6056,7 +6208,7 @@
                 <a:gridCol w="4023360"/>
                 <a:gridCol w="4144975"/>
               </a:tblGrid>
-              <a:tr h="640080">
+              <a:tr h="666205">
                 <a:tc>
                   <a:txBody>
                     <a:bodyPr/>
@@ -6077,7 +6229,7 @@
                   </a:txBody>
                   <a:tcPr>
                     <a:solidFill>
-                      <a:srgbClr val="16213A"/>
+                      <a:srgbClr val="18223A"/>
                     </a:solidFill>
                   </a:tcPr>
                 </a:tc>
@@ -6101,7 +6253,7 @@
                   </a:txBody>
                   <a:tcPr>
                     <a:solidFill>
-                      <a:srgbClr val="16213A"/>
+                      <a:srgbClr val="18223A"/>
                     </a:solidFill>
                   </a:tcPr>
                 </a:tc>
@@ -6125,19 +6277,19 @@
                   </a:txBody>
                   <a:tcPr>
                     <a:solidFill>
-                      <a:srgbClr val="16213A"/>
+                      <a:srgbClr val="18223A"/>
                     </a:solidFill>
                   </a:tcPr>
                 </a:tc>
               </a:tr>
-              <a:tr h="640080">
+              <a:tr h="666205">
                 <a:tc>
                   <a:txBody>
                     <a:bodyPr/>
                     <a:lstStyle/>
                     <a:p>
                       <a:pPr>
-                        <a:defRPr sz="950">
+                        <a:defRPr sz="1000">
                           <a:solidFill>
                             <a:srgbClr val="E2E8F0"/>
                           </a:solidFill>
@@ -6161,7 +6313,7 @@
                     <a:lstStyle/>
                     <a:p>
                       <a:pPr>
-                        <a:defRPr sz="950">
+                        <a:defRPr sz="1000">
                           <a:solidFill>
                             <a:srgbClr val="94A3B8"/>
                           </a:solidFill>
@@ -6185,7 +6337,7 @@
                     <a:lstStyle/>
                     <a:p>
                       <a:pPr>
-                        <a:defRPr sz="950">
+                        <a:defRPr sz="1000">
                           <a:solidFill>
                             <a:srgbClr val="10B981"/>
                           </a:solidFill>
@@ -6204,14 +6356,14 @@
                   </a:tcPr>
                 </a:tc>
               </a:tr>
-              <a:tr h="640080">
+              <a:tr h="666205">
                 <a:tc>
                   <a:txBody>
                     <a:bodyPr/>
                     <a:lstStyle/>
                     <a:p>
                       <a:pPr>
-                        <a:defRPr sz="950">
+                        <a:defRPr sz="1000">
                           <a:solidFill>
                             <a:srgbClr val="E2E8F0"/>
                           </a:solidFill>
@@ -6225,7 +6377,7 @@
                   </a:txBody>
                   <a:tcPr>
                     <a:solidFill>
-                      <a:srgbClr val="0B1121"/>
+                      <a:srgbClr val="0C1221"/>
                     </a:solidFill>
                   </a:tcPr>
                 </a:tc>
@@ -6235,7 +6387,7 @@
                     <a:lstStyle/>
                     <a:p>
                       <a:pPr>
-                        <a:defRPr sz="950">
+                        <a:defRPr sz="1000">
                           <a:solidFill>
                             <a:srgbClr val="94A3B8"/>
                           </a:solidFill>
@@ -6249,7 +6401,7 @@
                   </a:txBody>
                   <a:tcPr>
                     <a:solidFill>
-                      <a:srgbClr val="0B1121"/>
+                      <a:srgbClr val="0C1221"/>
                     </a:solidFill>
                   </a:tcPr>
                 </a:tc>
@@ -6259,7 +6411,7 @@
                     <a:lstStyle/>
                     <a:p>
                       <a:pPr>
-                        <a:defRPr sz="950">
+                        <a:defRPr sz="1000">
                           <a:solidFill>
                             <a:srgbClr val="10B981"/>
                           </a:solidFill>
@@ -6273,19 +6425,19 @@
                   </a:txBody>
                   <a:tcPr>
                     <a:solidFill>
-                      <a:srgbClr val="0B1121"/>
+                      <a:srgbClr val="0C1221"/>
                     </a:solidFill>
                   </a:tcPr>
                 </a:tc>
               </a:tr>
-              <a:tr h="640080">
+              <a:tr h="666205">
                 <a:tc>
                   <a:txBody>
                     <a:bodyPr/>
                     <a:lstStyle/>
                     <a:p>
                       <a:pPr>
-                        <a:defRPr sz="950">
+                        <a:defRPr sz="1000">
                           <a:solidFill>
                             <a:srgbClr val="E2E8F0"/>
                           </a:solidFill>
@@ -6309,7 +6461,7 @@
                     <a:lstStyle/>
                     <a:p>
                       <a:pPr>
-                        <a:defRPr sz="950">
+                        <a:defRPr sz="1000">
                           <a:solidFill>
                             <a:srgbClr val="94A3B8"/>
                           </a:solidFill>
@@ -6333,7 +6485,7 @@
                     <a:lstStyle/>
                     <a:p>
                       <a:pPr>
-                        <a:defRPr sz="950">
+                        <a:defRPr sz="1000">
                           <a:solidFill>
                             <a:srgbClr val="10B981"/>
                           </a:solidFill>
@@ -6352,14 +6504,14 @@
                   </a:tcPr>
                 </a:tc>
               </a:tr>
-              <a:tr h="640080">
+              <a:tr h="666205">
                 <a:tc>
                   <a:txBody>
                     <a:bodyPr/>
                     <a:lstStyle/>
                     <a:p>
                       <a:pPr>
-                        <a:defRPr sz="950">
+                        <a:defRPr sz="1000">
                           <a:solidFill>
                             <a:srgbClr val="E2E8F0"/>
                           </a:solidFill>
@@ -6373,7 +6525,7 @@
                   </a:txBody>
                   <a:tcPr>
                     <a:solidFill>
-                      <a:srgbClr val="0B1121"/>
+                      <a:srgbClr val="0C1221"/>
                     </a:solidFill>
                   </a:tcPr>
                 </a:tc>
@@ -6383,7 +6535,7 @@
                     <a:lstStyle/>
                     <a:p>
                       <a:pPr>
-                        <a:defRPr sz="950">
+                        <a:defRPr sz="1000">
                           <a:solidFill>
                             <a:srgbClr val="94A3B8"/>
                           </a:solidFill>
@@ -6397,7 +6549,7 @@
                   </a:txBody>
                   <a:tcPr>
                     <a:solidFill>
-                      <a:srgbClr val="0B1121"/>
+                      <a:srgbClr val="0C1221"/>
                     </a:solidFill>
                   </a:tcPr>
                 </a:tc>
@@ -6407,7 +6559,7 @@
                     <a:lstStyle/>
                     <a:p>
                       <a:pPr>
-                        <a:defRPr sz="950">
+                        <a:defRPr sz="1000">
                           <a:solidFill>
                             <a:srgbClr val="10B981"/>
                           </a:solidFill>
@@ -6421,19 +6573,19 @@
                   </a:txBody>
                   <a:tcPr>
                     <a:solidFill>
-                      <a:srgbClr val="0B1121"/>
+                      <a:srgbClr val="0C1221"/>
                     </a:solidFill>
                   </a:tcPr>
                 </a:tc>
               </a:tr>
-              <a:tr h="640080">
+              <a:tr h="666205">
                 <a:tc>
                   <a:txBody>
                     <a:bodyPr/>
                     <a:lstStyle/>
                     <a:p>
                       <a:pPr>
-                        <a:defRPr sz="950">
+                        <a:defRPr sz="1000">
                           <a:solidFill>
                             <a:srgbClr val="E2E8F0"/>
                           </a:solidFill>
@@ -6457,7 +6609,7 @@
                     <a:lstStyle/>
                     <a:p>
                       <a:pPr>
-                        <a:defRPr sz="950">
+                        <a:defRPr sz="1000">
                           <a:solidFill>
                             <a:srgbClr val="94A3B8"/>
                           </a:solidFill>
@@ -6481,7 +6633,7 @@
                     <a:lstStyle/>
                     <a:p>
                       <a:pPr>
-                        <a:defRPr sz="950">
+                        <a:defRPr sz="1000">
                           <a:solidFill>
                             <a:srgbClr val="10B981"/>
                           </a:solidFill>
@@ -6500,14 +6652,14 @@
                   </a:tcPr>
                 </a:tc>
               </a:tr>
-              <a:tr h="640080">
+              <a:tr h="666210">
                 <a:tc>
                   <a:txBody>
                     <a:bodyPr/>
                     <a:lstStyle/>
                     <a:p>
                       <a:pPr>
-                        <a:defRPr sz="950">
+                        <a:defRPr sz="1000">
                           <a:solidFill>
                             <a:srgbClr val="E2E8F0"/>
                           </a:solidFill>
@@ -6521,7 +6673,7 @@
                   </a:txBody>
                   <a:tcPr>
                     <a:solidFill>
-                      <a:srgbClr val="0B1121"/>
+                      <a:srgbClr val="0C1221"/>
                     </a:solidFill>
                   </a:tcPr>
                 </a:tc>
@@ -6531,7 +6683,7 @@
                     <a:lstStyle/>
                     <a:p>
                       <a:pPr>
-                        <a:defRPr sz="950">
+                        <a:defRPr sz="1000">
                           <a:solidFill>
                             <a:srgbClr val="94A3B8"/>
                           </a:solidFill>
@@ -6545,7 +6697,7 @@
                   </a:txBody>
                   <a:tcPr>
                     <a:solidFill>
-                      <a:srgbClr val="0B1121"/>
+                      <a:srgbClr val="0C1221"/>
                     </a:solidFill>
                   </a:tcPr>
                 </a:tc>
@@ -6555,7 +6707,7 @@
                     <a:lstStyle/>
                     <a:p>
                       <a:pPr>
-                        <a:defRPr sz="950">
+                        <a:defRPr sz="1000">
                           <a:solidFill>
                             <a:srgbClr val="10B981"/>
                           </a:solidFill>
@@ -6569,7 +6721,7 @@
                   </a:txBody>
                   <a:tcPr>
                     <a:solidFill>
-                      <a:srgbClr val="0B1121"/>
+                      <a:srgbClr val="0C1221"/>
                     </a:solidFill>
                   </a:tcPr>
                 </a:tc>
@@ -6690,8 +6842,8 @@
         </p:nvSpPr>
         <p:spPr>
           <a:xfrm>
-            <a:off x="0" y="6537960"/>
-            <a:ext cx="12191695" cy="320040"/>
+            <a:off x="0" y="6510528"/>
+            <a:ext cx="12191695" cy="347472"/>
           </a:xfrm>
           <a:prstGeom prst="rect">
             <a:avLst/>
@@ -6701,7 +6853,7 @@
           </a:solidFill>
           <a:ln w="6350">
             <a:solidFill>
-              <a:srgbClr val="2D3C58"/>
+              <a:srgbClr val="283650"/>
             </a:solidFill>
           </a:ln>
         </p:spPr>
@@ -6735,8 +6887,8 @@
         </p:nvSpPr>
         <p:spPr>
           <a:xfrm>
-            <a:off x="731520" y="6556248"/>
-            <a:ext cx="6400800" cy="274320"/>
+            <a:off x="731520" y="6528816"/>
+            <a:ext cx="7315200" cy="274320"/>
           </a:xfrm>
           <a:prstGeom prst="rect">
             <a:avLst/>
@@ -6758,7 +6910,7 @@
               </a:defRPr>
             </a:pPr>
             <a:r>
-              <a:t>AgentIQ SENTINEL  •  Continuous Zero-Trust Cognitive Cyber Defense  •  TransOrg Datathon 2026</a:t>
+              <a:t>🛡️ AgentIQ SENTINEL  •  Continuous Zero-Trust Cognitive Cyber Defense  •  TransOrg Datathon 2026</a:t>
             </a:r>
           </a:p>
         </p:txBody>
@@ -6771,7 +6923,7 @@
         </p:nvSpPr>
         <p:spPr>
           <a:xfrm>
-            <a:off x="8686800" y="6556248"/>
+            <a:off x="8686800" y="6528816"/>
             <a:ext cx="2743200" cy="274320"/>
           </a:xfrm>
           <a:prstGeom prst="rect">
@@ -6807,14 +6959,14 @@
         </p:nvSpPr>
         <p:spPr>
           <a:xfrm>
-            <a:off x="731520" y="347472"/>
-            <a:ext cx="2926080" cy="256032"/>
+            <a:off x="731520" y="292608"/>
+            <a:ext cx="3108960" cy="256032"/>
           </a:xfrm>
           <a:prstGeom prst="roundRect">
             <a:avLst/>
           </a:prstGeom>
           <a:solidFill>
-            <a:srgbClr val="16213A"/>
+            <a:srgbClr val="18223A"/>
           </a:solidFill>
           <a:ln w="10160">
             <a:solidFill>
@@ -6852,8 +7004,8 @@
         </p:nvSpPr>
         <p:spPr>
           <a:xfrm>
-            <a:off x="777240" y="347472"/>
-            <a:ext cx="2834640" cy="256032"/>
+            <a:off x="777240" y="292608"/>
+            <a:ext cx="3017520" cy="256032"/>
           </a:xfrm>
           <a:prstGeom prst="rect">
             <a:avLst/>
@@ -6888,7 +7040,7 @@
         </p:nvSpPr>
         <p:spPr>
           <a:xfrm>
-            <a:off x="731520" y="658368"/>
+            <a:off x="731520" y="594360"/>
             <a:ext cx="10698480" cy="502920"/>
           </a:xfrm>
           <a:prstGeom prst="rect">
@@ -6924,7 +7076,7 @@
         </p:nvSpPr>
         <p:spPr>
           <a:xfrm>
-            <a:off x="731520" y="1133856"/>
+            <a:off x="731520" y="1078992"/>
             <a:ext cx="10698480" cy="320040"/>
           </a:xfrm>
           <a:prstGeom prst="rect">
@@ -6960,8 +7112,8 @@
         </p:nvSpPr>
         <p:spPr>
           <a:xfrm>
-            <a:off x="731520" y="1554480"/>
-            <a:ext cx="2468880" cy="1280160"/>
+            <a:off x="731520" y="1463040"/>
+            <a:ext cx="2468880" cy="1234440"/>
           </a:xfrm>
           <a:prstGeom prst="roundRect">
             <a:avLst/>
@@ -6999,14 +7151,57 @@
       </p:sp>
       <p:sp>
         <p:nvSpPr>
-          <p:cNvPr id="12" name="TextBox 11"/>
+          <p:cNvPr id="12" name="Rectangle 11"/>
+          <p:cNvSpPr/>
+          <p:nvPr/>
+        </p:nvSpPr>
+        <p:spPr>
+          <a:xfrm>
+            <a:off x="914400" y="1463040"/>
+            <a:ext cx="2103120" cy="36576"/>
+          </a:xfrm>
+          <a:prstGeom prst="rect">
+            <a:avLst/>
+          </a:prstGeom>
+          <a:solidFill>
+            <a:srgbClr val="06B6D4"/>
+          </a:solidFill>
+          <a:ln>
+            <a:noFill/>
+          </a:ln>
+        </p:spPr>
+        <p:style>
+          <a:lnRef idx="1">
+            <a:schemeClr val="accent1"/>
+          </a:lnRef>
+          <a:fillRef idx="3">
+            <a:schemeClr val="accent1"/>
+          </a:fillRef>
+          <a:effectRef idx="2">
+            <a:schemeClr val="accent1"/>
+          </a:effectRef>
+          <a:fontRef idx="minor">
+            <a:schemeClr val="lt1"/>
+          </a:fontRef>
+        </p:style>
+        <p:txBody>
+          <a:bodyPr rtlCol="0" anchor="ctr"/>
+          <a:lstStyle/>
+          <a:p>
+            <a:pPr algn="ctr"/>
+          </a:p>
+        </p:txBody>
+      </p:sp>
+      <p:sp>
+        <p:nvSpPr>
+          <p:cNvPr id="13" name="TextBox 12"/>
           <p:cNvSpPr txBox="1"/>
           <p:nvPr/>
         </p:nvSpPr>
         <p:spPr>
           <a:xfrm>
-            <a:off x="841248" y="1627632"/>
-            <a:ext cx="2249424" cy="1133856"/>
+            <a:off x="841248" y="1536192"/>
+            <a:ext cx="2249424" cy="1088136"/>
           </a:xfrm>
           <a:prstGeom prst="rect">
             <a:avLst/>
@@ -7067,14 +7262,14 @@
       </p:sp>
       <p:sp>
         <p:nvSpPr>
-          <p:cNvPr id="13" name="Rounded Rectangle 12"/>
+          <p:cNvPr id="14" name="Rounded Rectangle 13"/>
           <p:cNvSpPr/>
           <p:nvPr/>
         </p:nvSpPr>
         <p:spPr>
           <a:xfrm>
-            <a:off x="3474720" y="1554480"/>
-            <a:ext cx="2468880" cy="1280160"/>
+            <a:off x="3474720" y="1463040"/>
+            <a:ext cx="2468880" cy="1234440"/>
           </a:xfrm>
           <a:prstGeom prst="roundRect">
             <a:avLst/>
@@ -7112,14 +7307,57 @@
       </p:sp>
       <p:sp>
         <p:nvSpPr>
-          <p:cNvPr id="14" name="TextBox 13"/>
+          <p:cNvPr id="15" name="Rectangle 14"/>
+          <p:cNvSpPr/>
+          <p:nvPr/>
+        </p:nvSpPr>
+        <p:spPr>
+          <a:xfrm>
+            <a:off x="3657600" y="1463040"/>
+            <a:ext cx="2103120" cy="36576"/>
+          </a:xfrm>
+          <a:prstGeom prst="rect">
+            <a:avLst/>
+          </a:prstGeom>
+          <a:solidFill>
+            <a:srgbClr val="10B981"/>
+          </a:solidFill>
+          <a:ln>
+            <a:noFill/>
+          </a:ln>
+        </p:spPr>
+        <p:style>
+          <a:lnRef idx="1">
+            <a:schemeClr val="accent1"/>
+          </a:lnRef>
+          <a:fillRef idx="3">
+            <a:schemeClr val="accent1"/>
+          </a:fillRef>
+          <a:effectRef idx="2">
+            <a:schemeClr val="accent1"/>
+          </a:effectRef>
+          <a:fontRef idx="minor">
+            <a:schemeClr val="lt1"/>
+          </a:fontRef>
+        </p:style>
+        <p:txBody>
+          <a:bodyPr rtlCol="0" anchor="ctr"/>
+          <a:lstStyle/>
+          <a:p>
+            <a:pPr algn="ctr"/>
+          </a:p>
+        </p:txBody>
+      </p:sp>
+      <p:sp>
+        <p:nvSpPr>
+          <p:cNvPr id="16" name="TextBox 15"/>
           <p:cNvSpPr txBox="1"/>
           <p:nvPr/>
         </p:nvSpPr>
         <p:spPr>
           <a:xfrm>
-            <a:off x="3584448" y="1627632"/>
-            <a:ext cx="2249424" cy="1133856"/>
+            <a:off x="3584448" y="1536192"/>
+            <a:ext cx="2249424" cy="1088136"/>
           </a:xfrm>
           <a:prstGeom prst="rect">
             <a:avLst/>
@@ -7180,14 +7418,14 @@
       </p:sp>
       <p:sp>
         <p:nvSpPr>
-          <p:cNvPr id="15" name="Rounded Rectangle 14"/>
+          <p:cNvPr id="17" name="Rounded Rectangle 16"/>
           <p:cNvSpPr/>
           <p:nvPr/>
         </p:nvSpPr>
         <p:spPr>
           <a:xfrm>
-            <a:off x="6217920" y="1554480"/>
-            <a:ext cx="2468880" cy="1280160"/>
+            <a:off x="6217920" y="1463040"/>
+            <a:ext cx="2468880" cy="1234440"/>
           </a:xfrm>
           <a:prstGeom prst="roundRect">
             <a:avLst/>
@@ -7225,14 +7463,57 @@
       </p:sp>
       <p:sp>
         <p:nvSpPr>
-          <p:cNvPr id="16" name="TextBox 15"/>
+          <p:cNvPr id="18" name="Rectangle 17"/>
+          <p:cNvSpPr/>
+          <p:nvPr/>
+        </p:nvSpPr>
+        <p:spPr>
+          <a:xfrm>
+            <a:off x="6400800" y="1463040"/>
+            <a:ext cx="2103120" cy="36576"/>
+          </a:xfrm>
+          <a:prstGeom prst="rect">
+            <a:avLst/>
+          </a:prstGeom>
+          <a:solidFill>
+            <a:srgbClr val="3B82F6"/>
+          </a:solidFill>
+          <a:ln>
+            <a:noFill/>
+          </a:ln>
+        </p:spPr>
+        <p:style>
+          <a:lnRef idx="1">
+            <a:schemeClr val="accent1"/>
+          </a:lnRef>
+          <a:fillRef idx="3">
+            <a:schemeClr val="accent1"/>
+          </a:fillRef>
+          <a:effectRef idx="2">
+            <a:schemeClr val="accent1"/>
+          </a:effectRef>
+          <a:fontRef idx="minor">
+            <a:schemeClr val="lt1"/>
+          </a:fontRef>
+        </p:style>
+        <p:txBody>
+          <a:bodyPr rtlCol="0" anchor="ctr"/>
+          <a:lstStyle/>
+          <a:p>
+            <a:pPr algn="ctr"/>
+          </a:p>
+        </p:txBody>
+      </p:sp>
+      <p:sp>
+        <p:nvSpPr>
+          <p:cNvPr id="19" name="TextBox 18"/>
           <p:cNvSpPr txBox="1"/>
           <p:nvPr/>
         </p:nvSpPr>
         <p:spPr>
           <a:xfrm>
-            <a:off x="6327648" y="1627632"/>
-            <a:ext cx="2249424" cy="1133856"/>
+            <a:off x="6327648" y="1536192"/>
+            <a:ext cx="2249424" cy="1088136"/>
           </a:xfrm>
           <a:prstGeom prst="rect">
             <a:avLst/>
@@ -7293,14 +7574,14 @@
       </p:sp>
       <p:sp>
         <p:nvSpPr>
-          <p:cNvPr id="17" name="Rounded Rectangle 16"/>
+          <p:cNvPr id="20" name="Rounded Rectangle 19"/>
           <p:cNvSpPr/>
           <p:nvPr/>
         </p:nvSpPr>
         <p:spPr>
           <a:xfrm>
-            <a:off x="8961120" y="1554480"/>
-            <a:ext cx="2468880" cy="1280160"/>
+            <a:off x="8961120" y="1463040"/>
+            <a:ext cx="2468880" cy="1234440"/>
           </a:xfrm>
           <a:prstGeom prst="roundRect">
             <a:avLst/>
@@ -7338,14 +7619,57 @@
       </p:sp>
       <p:sp>
         <p:nvSpPr>
-          <p:cNvPr id="18" name="TextBox 17"/>
+          <p:cNvPr id="21" name="Rectangle 20"/>
+          <p:cNvSpPr/>
+          <p:nvPr/>
+        </p:nvSpPr>
+        <p:spPr>
+          <a:xfrm>
+            <a:off x="9144000" y="1463040"/>
+            <a:ext cx="2103120" cy="36576"/>
+          </a:xfrm>
+          <a:prstGeom prst="rect">
+            <a:avLst/>
+          </a:prstGeom>
+          <a:solidFill>
+            <a:srgbClr val="A855F7"/>
+          </a:solidFill>
+          <a:ln>
+            <a:noFill/>
+          </a:ln>
+        </p:spPr>
+        <p:style>
+          <a:lnRef idx="1">
+            <a:schemeClr val="accent1"/>
+          </a:lnRef>
+          <a:fillRef idx="3">
+            <a:schemeClr val="accent1"/>
+          </a:fillRef>
+          <a:effectRef idx="2">
+            <a:schemeClr val="accent1"/>
+          </a:effectRef>
+          <a:fontRef idx="minor">
+            <a:schemeClr val="lt1"/>
+          </a:fontRef>
+        </p:style>
+        <p:txBody>
+          <a:bodyPr rtlCol="0" anchor="ctr"/>
+          <a:lstStyle/>
+          <a:p>
+            <a:pPr algn="ctr"/>
+          </a:p>
+        </p:txBody>
+      </p:sp>
+      <p:sp>
+        <p:nvSpPr>
+          <p:cNvPr id="22" name="TextBox 21"/>
           <p:cNvSpPr txBox="1"/>
           <p:nvPr/>
         </p:nvSpPr>
         <p:spPr>
           <a:xfrm>
-            <a:off x="9070848" y="1627632"/>
-            <a:ext cx="2249424" cy="1133856"/>
+            <a:off x="9070848" y="1536192"/>
+            <a:ext cx="2249424" cy="1088136"/>
           </a:xfrm>
           <a:prstGeom prst="rect">
             <a:avLst/>
@@ -7406,14 +7730,14 @@
       </p:sp>
       <p:sp>
         <p:nvSpPr>
-          <p:cNvPr id="19" name="Rounded Rectangle 18"/>
+          <p:cNvPr id="23" name="Rounded Rectangle 22"/>
           <p:cNvSpPr/>
           <p:nvPr/>
         </p:nvSpPr>
         <p:spPr>
           <a:xfrm>
-            <a:off x="731520" y="3017520"/>
-            <a:ext cx="5212080" cy="3200400"/>
+            <a:off x="731520" y="2880360"/>
+            <a:ext cx="5212080" cy="3383280"/>
           </a:xfrm>
           <a:prstGeom prst="roundRect">
             <a:avLst/>
@@ -7423,7 +7747,7 @@
           </a:solidFill>
           <a:ln w="12700">
             <a:solidFill>
-              <a:srgbClr val="2D3C58"/>
+              <a:srgbClr val="283650"/>
             </a:solidFill>
           </a:ln>
         </p:spPr>
@@ -7451,13 +7775,13 @@
       </p:sp>
       <p:sp>
         <p:nvSpPr>
-          <p:cNvPr id="20" name="Rectangle 19"/>
+          <p:cNvPr id="24" name="Rectangle 23"/>
           <p:cNvSpPr/>
           <p:nvPr/>
         </p:nvSpPr>
         <p:spPr>
           <a:xfrm>
-            <a:off x="731520" y="3017520"/>
+            <a:off x="731520" y="2880360"/>
             <a:ext cx="5212080" cy="45720"/>
           </a:xfrm>
           <a:prstGeom prst="rect">
@@ -7494,14 +7818,14 @@
       </p:sp>
       <p:sp>
         <p:nvSpPr>
-          <p:cNvPr id="21" name="TextBox 20"/>
+          <p:cNvPr id="25" name="TextBox 24"/>
           <p:cNvSpPr txBox="1"/>
           <p:nvPr/>
         </p:nvSpPr>
         <p:spPr>
           <a:xfrm>
-            <a:off x="896112" y="3127248"/>
-            <a:ext cx="4882896" cy="2980944"/>
+            <a:off x="896112" y="2990088"/>
+            <a:ext cx="4882896" cy="3163824"/>
           </a:xfrm>
           <a:prstGeom prst="rect">
             <a:avLst/>
@@ -7542,9 +7866,9 @@
           <a:p>
             <a:pPr>
               <a:spcBef>
-                <a:spcPts val="300"/>
+                <a:spcPts val="400"/>
               </a:spcBef>
-              <a:defRPr sz="950">
+              <a:defRPr sz="1050">
                 <a:solidFill>
                   <a:srgbClr val="E2E8F0"/>
                 </a:solidFill>
@@ -7558,9 +7882,9 @@
           <a:p>
             <a:pPr>
               <a:spcBef>
-                <a:spcPts val="300"/>
+                <a:spcPts val="400"/>
               </a:spcBef>
-              <a:defRPr sz="950">
+              <a:defRPr sz="1050">
                 <a:solidFill>
                   <a:srgbClr val="E2E8F0"/>
                 </a:solidFill>
@@ -7574,9 +7898,9 @@
           <a:p>
             <a:pPr>
               <a:spcBef>
-                <a:spcPts val="300"/>
+                <a:spcPts val="400"/>
               </a:spcBef>
-              <a:defRPr sz="950">
+              <a:defRPr sz="1050">
                 <a:solidFill>
                   <a:srgbClr val="E2E8F0"/>
                 </a:solidFill>
@@ -7590,9 +7914,9 @@
           <a:p>
             <a:pPr>
               <a:spcBef>
-                <a:spcPts val="300"/>
+                <a:spcPts val="400"/>
               </a:spcBef>
-              <a:defRPr sz="950">
+              <a:defRPr sz="1050">
                 <a:solidFill>
                   <a:srgbClr val="E2E8F0"/>
                 </a:solidFill>
@@ -7607,14 +7931,14 @@
       </p:sp>
       <p:sp>
         <p:nvSpPr>
-          <p:cNvPr id="22" name="Rounded Rectangle 21"/>
+          <p:cNvPr id="26" name="Rounded Rectangle 25"/>
           <p:cNvSpPr/>
           <p:nvPr/>
         </p:nvSpPr>
         <p:spPr>
           <a:xfrm>
-            <a:off x="6217920" y="3017520"/>
-            <a:ext cx="5212080" cy="3200400"/>
+            <a:off x="6217920" y="2880360"/>
+            <a:ext cx="5212080" cy="3383280"/>
           </a:xfrm>
           <a:prstGeom prst="roundRect">
             <a:avLst/>
@@ -7624,7 +7948,7 @@
           </a:solidFill>
           <a:ln w="12700">
             <a:solidFill>
-              <a:srgbClr val="2D3C58"/>
+              <a:srgbClr val="283650"/>
             </a:solidFill>
           </a:ln>
         </p:spPr>
@@ -7652,13 +7976,13 @@
       </p:sp>
       <p:sp>
         <p:nvSpPr>
-          <p:cNvPr id="23" name="Rectangle 22"/>
+          <p:cNvPr id="27" name="Rectangle 26"/>
           <p:cNvSpPr/>
           <p:nvPr/>
         </p:nvSpPr>
         <p:spPr>
           <a:xfrm>
-            <a:off x="6217920" y="3017520"/>
+            <a:off x="6217920" y="2880360"/>
             <a:ext cx="5212080" cy="45720"/>
           </a:xfrm>
           <a:prstGeom prst="rect">
@@ -7695,14 +8019,14 @@
       </p:sp>
       <p:sp>
         <p:nvSpPr>
-          <p:cNvPr id="24" name="TextBox 23"/>
+          <p:cNvPr id="28" name="TextBox 27"/>
           <p:cNvSpPr txBox="1"/>
           <p:nvPr/>
         </p:nvSpPr>
         <p:spPr>
           <a:xfrm>
-            <a:off x="6382512" y="3127248"/>
-            <a:ext cx="4882896" cy="2980944"/>
+            <a:off x="6382512" y="2990088"/>
+            <a:ext cx="4882896" cy="3163824"/>
           </a:xfrm>
           <a:prstGeom prst="rect">
             <a:avLst/>
@@ -7743,9 +8067,9 @@
           <a:p>
             <a:pPr>
               <a:spcBef>
-                <a:spcPts val="300"/>
+                <a:spcPts val="400"/>
               </a:spcBef>
-              <a:defRPr sz="950">
+              <a:defRPr sz="1050">
                 <a:solidFill>
                   <a:srgbClr val="E2E8F0"/>
                 </a:solidFill>
@@ -7759,9 +8083,9 @@
           <a:p>
             <a:pPr>
               <a:spcBef>
-                <a:spcPts val="300"/>
+                <a:spcPts val="400"/>
               </a:spcBef>
-              <a:defRPr sz="950">
+              <a:defRPr sz="1050">
                 <a:solidFill>
                   <a:srgbClr val="E2E8F0"/>
                 </a:solidFill>
@@ -7775,9 +8099,9 @@
           <a:p>
             <a:pPr>
               <a:spcBef>
-                <a:spcPts val="300"/>
+                <a:spcPts val="400"/>
               </a:spcBef>
-              <a:defRPr sz="950">
+              <a:defRPr sz="1050">
                 <a:solidFill>
                   <a:srgbClr val="E2E8F0"/>
                 </a:solidFill>
@@ -7791,9 +8115,9 @@
           <a:p>
             <a:pPr>
               <a:spcBef>
-                <a:spcPts val="300"/>
+                <a:spcPts val="400"/>
               </a:spcBef>
-              <a:defRPr sz="950">
+              <a:defRPr sz="1050">
                 <a:solidFill>
                   <a:srgbClr val="E2E8F0"/>
                 </a:solidFill>
@@ -7918,8 +8242,8 @@
         </p:nvSpPr>
         <p:spPr>
           <a:xfrm>
-            <a:off x="0" y="6537960"/>
-            <a:ext cx="12191695" cy="320040"/>
+            <a:off x="0" y="6510528"/>
+            <a:ext cx="12191695" cy="347472"/>
           </a:xfrm>
           <a:prstGeom prst="rect">
             <a:avLst/>
@@ -7929,7 +8253,7 @@
           </a:solidFill>
           <a:ln w="6350">
             <a:solidFill>
-              <a:srgbClr val="2D3C58"/>
+              <a:srgbClr val="283650"/>
             </a:solidFill>
           </a:ln>
         </p:spPr>
@@ -7963,8 +8287,8 @@
         </p:nvSpPr>
         <p:spPr>
           <a:xfrm>
-            <a:off x="731520" y="6556248"/>
-            <a:ext cx="6400800" cy="274320"/>
+            <a:off x="731520" y="6528816"/>
+            <a:ext cx="7315200" cy="274320"/>
           </a:xfrm>
           <a:prstGeom prst="rect">
             <a:avLst/>
@@ -7986,7 +8310,7 @@
               </a:defRPr>
             </a:pPr>
             <a:r>
-              <a:t>AgentIQ SENTINEL  •  Continuous Zero-Trust Cognitive Cyber Defense  •  TransOrg Datathon 2026</a:t>
+              <a:t>🛡️ AgentIQ SENTINEL  •  Continuous Zero-Trust Cognitive Cyber Defense  •  TransOrg Datathon 2026</a:t>
             </a:r>
           </a:p>
         </p:txBody>
@@ -7999,7 +8323,7 @@
         </p:nvSpPr>
         <p:spPr>
           <a:xfrm>
-            <a:off x="8686800" y="6556248"/>
+            <a:off x="8686800" y="6528816"/>
             <a:ext cx="2743200" cy="274320"/>
           </a:xfrm>
           <a:prstGeom prst="rect">
@@ -8035,14 +8359,14 @@
         </p:nvSpPr>
         <p:spPr>
           <a:xfrm>
-            <a:off x="731520" y="347472"/>
-            <a:ext cx="2926080" cy="256032"/>
+            <a:off x="731520" y="292608"/>
+            <a:ext cx="3108960" cy="256032"/>
           </a:xfrm>
           <a:prstGeom prst="roundRect">
             <a:avLst/>
           </a:prstGeom>
           <a:solidFill>
-            <a:srgbClr val="16213A"/>
+            <a:srgbClr val="18223A"/>
           </a:solidFill>
           <a:ln w="10160">
             <a:solidFill>
@@ -8080,8 +8404,8 @@
         </p:nvSpPr>
         <p:spPr>
           <a:xfrm>
-            <a:off x="777240" y="347472"/>
-            <a:ext cx="2834640" cy="256032"/>
+            <a:off x="777240" y="292608"/>
+            <a:ext cx="3017520" cy="256032"/>
           </a:xfrm>
           <a:prstGeom prst="rect">
             <a:avLst/>
@@ -8116,7 +8440,7 @@
         </p:nvSpPr>
         <p:spPr>
           <a:xfrm>
-            <a:off x="731520" y="658368"/>
+            <a:off x="731520" y="594360"/>
             <a:ext cx="10698480" cy="502920"/>
           </a:xfrm>
           <a:prstGeom prst="rect">
@@ -8152,7 +8476,7 @@
         </p:nvSpPr>
         <p:spPr>
           <a:xfrm>
-            <a:off x="731520" y="1133856"/>
+            <a:off x="731520" y="1078992"/>
             <a:ext cx="10698480" cy="320040"/>
           </a:xfrm>
           <a:prstGeom prst="rect">
@@ -8188,8 +8512,8 @@
         </p:nvSpPr>
         <p:spPr>
           <a:xfrm>
-            <a:off x="731520" y="1554480"/>
-            <a:ext cx="3383280" cy="4572000"/>
+            <a:off x="731520" y="1463040"/>
+            <a:ext cx="3383280" cy="4754880"/>
           </a:xfrm>
           <a:prstGeom prst="roundRect">
             <a:avLst/>
@@ -8199,7 +8523,7 @@
           </a:solidFill>
           <a:ln w="12700">
             <a:solidFill>
-              <a:srgbClr val="2D3C58"/>
+              <a:srgbClr val="283650"/>
             </a:solidFill>
           </a:ln>
         </p:spPr>
@@ -8233,7 +8557,7 @@
         </p:nvSpPr>
         <p:spPr>
           <a:xfrm>
-            <a:off x="731520" y="1554480"/>
+            <a:off x="731520" y="1463040"/>
             <a:ext cx="3383280" cy="45720"/>
           </a:xfrm>
           <a:prstGeom prst="rect">
@@ -8276,8 +8600,8 @@
         </p:nvSpPr>
         <p:spPr>
           <a:xfrm>
-            <a:off x="896112" y="1664207"/>
-            <a:ext cx="3054096" cy="4352544"/>
+            <a:off x="896112" y="1572768"/>
+            <a:ext cx="3054096" cy="4535424"/>
           </a:xfrm>
           <a:prstGeom prst="rect">
             <a:avLst/>
@@ -8318,9 +8642,9 @@
           <a:p>
             <a:pPr>
               <a:spcBef>
-                <a:spcPts val="300"/>
+                <a:spcPts val="400"/>
               </a:spcBef>
-              <a:defRPr sz="950">
+              <a:defRPr sz="1050">
                 <a:solidFill>
                   <a:srgbClr val="E2E8F0"/>
                 </a:solidFill>
@@ -8334,9 +8658,9 @@
           <a:p>
             <a:pPr>
               <a:spcBef>
-                <a:spcPts val="300"/>
+                <a:spcPts val="400"/>
               </a:spcBef>
-              <a:defRPr sz="950">
+              <a:defRPr sz="1050">
                 <a:solidFill>
                   <a:srgbClr val="E2E8F0"/>
                 </a:solidFill>
@@ -8350,9 +8674,9 @@
           <a:p>
             <a:pPr>
               <a:spcBef>
-                <a:spcPts val="300"/>
+                <a:spcPts val="400"/>
               </a:spcBef>
-              <a:defRPr sz="950">
+              <a:defRPr sz="1050">
                 <a:solidFill>
                   <a:srgbClr val="E2E8F0"/>
                 </a:solidFill>
@@ -8373,8 +8697,8 @@
         </p:nvSpPr>
         <p:spPr>
           <a:xfrm>
-            <a:off x="4389120" y="1554480"/>
-            <a:ext cx="3383280" cy="4572000"/>
+            <a:off x="4389120" y="1463040"/>
+            <a:ext cx="3383280" cy="4754880"/>
           </a:xfrm>
           <a:prstGeom prst="roundRect">
             <a:avLst/>
@@ -8384,7 +8708,7 @@
           </a:solidFill>
           <a:ln w="12700">
             <a:solidFill>
-              <a:srgbClr val="2D3C58"/>
+              <a:srgbClr val="283650"/>
             </a:solidFill>
           </a:ln>
         </p:spPr>
@@ -8418,7 +8742,7 @@
         </p:nvSpPr>
         <p:spPr>
           <a:xfrm>
-            <a:off x="4389120" y="1554480"/>
+            <a:off x="4389120" y="1463040"/>
             <a:ext cx="3383280" cy="45720"/>
           </a:xfrm>
           <a:prstGeom prst="rect">
@@ -8461,8 +8785,8 @@
         </p:nvSpPr>
         <p:spPr>
           <a:xfrm>
-            <a:off x="4553712" y="1664207"/>
-            <a:ext cx="3054096" cy="4352544"/>
+            <a:off x="4553712" y="1572768"/>
+            <a:ext cx="3054096" cy="4535424"/>
           </a:xfrm>
           <a:prstGeom prst="rect">
             <a:avLst/>
@@ -8503,9 +8827,9 @@
           <a:p>
             <a:pPr>
               <a:spcBef>
-                <a:spcPts val="300"/>
+                <a:spcPts val="400"/>
               </a:spcBef>
-              <a:defRPr sz="950">
+              <a:defRPr sz="1050">
                 <a:solidFill>
                   <a:srgbClr val="E2E8F0"/>
                 </a:solidFill>
@@ -8519,9 +8843,9 @@
           <a:p>
             <a:pPr>
               <a:spcBef>
-                <a:spcPts val="300"/>
+                <a:spcPts val="400"/>
               </a:spcBef>
-              <a:defRPr sz="950">
+              <a:defRPr sz="1050">
                 <a:solidFill>
                   <a:srgbClr val="E2E8F0"/>
                 </a:solidFill>
@@ -8535,9 +8859,9 @@
           <a:p>
             <a:pPr>
               <a:spcBef>
-                <a:spcPts val="300"/>
+                <a:spcPts val="400"/>
               </a:spcBef>
-              <a:defRPr sz="950">
+              <a:defRPr sz="1050">
                 <a:solidFill>
                   <a:srgbClr val="E2E8F0"/>
                 </a:solidFill>
@@ -8558,8 +8882,8 @@
         </p:nvSpPr>
         <p:spPr>
           <a:xfrm>
-            <a:off x="8046720" y="1554480"/>
-            <a:ext cx="3383280" cy="4572000"/>
+            <a:off x="8046720" y="1463040"/>
+            <a:ext cx="3383280" cy="4754880"/>
           </a:xfrm>
           <a:prstGeom prst="roundRect">
             <a:avLst/>
@@ -8569,7 +8893,7 @@
           </a:solidFill>
           <a:ln w="12700">
             <a:solidFill>
-              <a:srgbClr val="2D3C58"/>
+              <a:srgbClr val="283650"/>
             </a:solidFill>
           </a:ln>
         </p:spPr>
@@ -8603,7 +8927,7 @@
         </p:nvSpPr>
         <p:spPr>
           <a:xfrm>
-            <a:off x="8046720" y="1554480"/>
+            <a:off x="8046720" y="1463040"/>
             <a:ext cx="3383280" cy="45720"/>
           </a:xfrm>
           <a:prstGeom prst="rect">
@@ -8646,8 +8970,8 @@
         </p:nvSpPr>
         <p:spPr>
           <a:xfrm>
-            <a:off x="8211312" y="1664207"/>
-            <a:ext cx="3054096" cy="4352544"/>
+            <a:off x="8211312" y="1572768"/>
+            <a:ext cx="3054096" cy="4535424"/>
           </a:xfrm>
           <a:prstGeom prst="rect">
             <a:avLst/>
@@ -8688,9 +9012,9 @@
           <a:p>
             <a:pPr>
               <a:spcBef>
-                <a:spcPts val="300"/>
+                <a:spcPts val="400"/>
               </a:spcBef>
-              <a:defRPr sz="950">
+              <a:defRPr sz="1050">
                 <a:solidFill>
                   <a:srgbClr val="E2E8F0"/>
                 </a:solidFill>
@@ -8704,9 +9028,9 @@
           <a:p>
             <a:pPr>
               <a:spcBef>
-                <a:spcPts val="300"/>
+                <a:spcPts val="400"/>
               </a:spcBef>
-              <a:defRPr sz="950">
+              <a:defRPr sz="1050">
                 <a:solidFill>
                   <a:srgbClr val="E2E8F0"/>
                 </a:solidFill>
@@ -8720,9 +9044,9 @@
           <a:p>
             <a:pPr>
               <a:spcBef>
-                <a:spcPts val="300"/>
+                <a:spcPts val="400"/>
               </a:spcBef>
-              <a:defRPr sz="950">
+              <a:defRPr sz="1050">
                 <a:solidFill>
                   <a:srgbClr val="E2E8F0"/>
                 </a:solidFill>
@@ -8847,8 +9171,8 @@
         </p:nvSpPr>
         <p:spPr>
           <a:xfrm>
-            <a:off x="0" y="6537960"/>
-            <a:ext cx="12191695" cy="320040"/>
+            <a:off x="0" y="6510528"/>
+            <a:ext cx="12191695" cy="347472"/>
           </a:xfrm>
           <a:prstGeom prst="rect">
             <a:avLst/>
@@ -8858,7 +9182,7 @@
           </a:solidFill>
           <a:ln w="6350">
             <a:solidFill>
-              <a:srgbClr val="2D3C58"/>
+              <a:srgbClr val="283650"/>
             </a:solidFill>
           </a:ln>
         </p:spPr>
@@ -8892,8 +9216,8 @@
         </p:nvSpPr>
         <p:spPr>
           <a:xfrm>
-            <a:off x="731520" y="6556248"/>
-            <a:ext cx="6400800" cy="274320"/>
+            <a:off x="731520" y="6528816"/>
+            <a:ext cx="7315200" cy="274320"/>
           </a:xfrm>
           <a:prstGeom prst="rect">
             <a:avLst/>
@@ -8915,7 +9239,7 @@
               </a:defRPr>
             </a:pPr>
             <a:r>
-              <a:t>AgentIQ SENTINEL  •  Continuous Zero-Trust Cognitive Cyber Defense  •  TransOrg Datathon 2026</a:t>
+              <a:t>🛡️ AgentIQ SENTINEL  •  Continuous Zero-Trust Cognitive Cyber Defense  •  TransOrg Datathon 2026</a:t>
             </a:r>
           </a:p>
         </p:txBody>
@@ -8928,7 +9252,7 @@
         </p:nvSpPr>
         <p:spPr>
           <a:xfrm>
-            <a:off x="8686800" y="6556248"/>
+            <a:off x="8686800" y="6528816"/>
             <a:ext cx="2743200" cy="274320"/>
           </a:xfrm>
           <a:prstGeom prst="rect">
@@ -8964,14 +9288,14 @@
         </p:nvSpPr>
         <p:spPr>
           <a:xfrm>
-            <a:off x="731520" y="347472"/>
-            <a:ext cx="2926080" cy="256032"/>
+            <a:off x="731520" y="292608"/>
+            <a:ext cx="3108960" cy="256032"/>
           </a:xfrm>
           <a:prstGeom prst="roundRect">
             <a:avLst/>
           </a:prstGeom>
           <a:solidFill>
-            <a:srgbClr val="16213A"/>
+            <a:srgbClr val="18223A"/>
           </a:solidFill>
           <a:ln w="10160">
             <a:solidFill>
@@ -9009,8 +9333,8 @@
         </p:nvSpPr>
         <p:spPr>
           <a:xfrm>
-            <a:off x="777240" y="347472"/>
-            <a:ext cx="2834640" cy="256032"/>
+            <a:off x="777240" y="292608"/>
+            <a:ext cx="3017520" cy="256032"/>
           </a:xfrm>
           <a:prstGeom prst="rect">
             <a:avLst/>
@@ -9045,7 +9369,7 @@
         </p:nvSpPr>
         <p:spPr>
           <a:xfrm>
-            <a:off x="731520" y="658368"/>
+            <a:off x="731520" y="594360"/>
             <a:ext cx="10698480" cy="502920"/>
           </a:xfrm>
           <a:prstGeom prst="rect">
@@ -9081,7 +9405,7 @@
         </p:nvSpPr>
         <p:spPr>
           <a:xfrm>
-            <a:off x="731520" y="1133856"/>
+            <a:off x="731520" y="1078992"/>
             <a:ext cx="10698480" cy="320040"/>
           </a:xfrm>
           <a:prstGeom prst="rect">
@@ -9117,8 +9441,8 @@
         </p:nvSpPr>
         <p:spPr>
           <a:xfrm>
-            <a:off x="731520" y="1554480"/>
-            <a:ext cx="5212080" cy="4572000"/>
+            <a:off x="731520" y="1463040"/>
+            <a:ext cx="5212080" cy="4754880"/>
           </a:xfrm>
           <a:prstGeom prst="roundRect">
             <a:avLst/>
@@ -9128,7 +9452,7 @@
           </a:solidFill>
           <a:ln w="12700">
             <a:solidFill>
-              <a:srgbClr val="2D3C58"/>
+              <a:srgbClr val="283650"/>
             </a:solidFill>
           </a:ln>
         </p:spPr>
@@ -9162,7 +9486,7 @@
         </p:nvSpPr>
         <p:spPr>
           <a:xfrm>
-            <a:off x="731520" y="1554480"/>
+            <a:off x="731520" y="1463040"/>
             <a:ext cx="5212080" cy="45720"/>
           </a:xfrm>
           <a:prstGeom prst="rect">
@@ -9205,8 +9529,8 @@
         </p:nvSpPr>
         <p:spPr>
           <a:xfrm>
-            <a:off x="896112" y="1664207"/>
-            <a:ext cx="4882896" cy="4352544"/>
+            <a:off x="896112" y="1572768"/>
+            <a:ext cx="4882896" cy="4535424"/>
           </a:xfrm>
           <a:prstGeom prst="rect">
             <a:avLst/>
@@ -9247,9 +9571,9 @@
           <a:p>
             <a:pPr>
               <a:spcBef>
-                <a:spcPts val="300"/>
+                <a:spcPts val="400"/>
               </a:spcBef>
-              <a:defRPr sz="950">
+              <a:defRPr sz="1050">
                 <a:solidFill>
                   <a:srgbClr val="E2E8F0"/>
                 </a:solidFill>
@@ -9263,9 +9587,9 @@
           <a:p>
             <a:pPr>
               <a:spcBef>
-                <a:spcPts val="300"/>
+                <a:spcPts val="400"/>
               </a:spcBef>
-              <a:defRPr sz="950">
+              <a:defRPr sz="1050">
                 <a:solidFill>
                   <a:srgbClr val="E2E8F0"/>
                 </a:solidFill>
@@ -9279,9 +9603,9 @@
           <a:p>
             <a:pPr>
               <a:spcBef>
-                <a:spcPts val="300"/>
+                <a:spcPts val="400"/>
               </a:spcBef>
-              <a:defRPr sz="950">
+              <a:defRPr sz="1050">
                 <a:solidFill>
                   <a:srgbClr val="E2E8F0"/>
                 </a:solidFill>
@@ -9295,9 +9619,9 @@
           <a:p>
             <a:pPr>
               <a:spcBef>
-                <a:spcPts val="300"/>
+                <a:spcPts val="400"/>
               </a:spcBef>
-              <a:defRPr sz="950">
+              <a:defRPr sz="1050">
                 <a:solidFill>
                   <a:srgbClr val="E2E8F0"/>
                 </a:solidFill>
@@ -9311,9 +9635,9 @@
           <a:p>
             <a:pPr>
               <a:spcBef>
-                <a:spcPts val="300"/>
+                <a:spcPts val="400"/>
               </a:spcBef>
-              <a:defRPr sz="950">
+              <a:defRPr sz="1050">
                 <a:solidFill>
                   <a:srgbClr val="E2E8F0"/>
                 </a:solidFill>
@@ -9327,9 +9651,9 @@
           <a:p>
             <a:pPr>
               <a:spcBef>
-                <a:spcPts val="300"/>
+                <a:spcPts val="400"/>
               </a:spcBef>
-              <a:defRPr sz="950">
+              <a:defRPr sz="1050">
                 <a:solidFill>
                   <a:srgbClr val="E2E8F0"/>
                 </a:solidFill>
@@ -9350,8 +9674,8 @@
         </p:nvSpPr>
         <p:spPr>
           <a:xfrm>
-            <a:off x="6217920" y="1554480"/>
-            <a:ext cx="5212080" cy="4572000"/>
+            <a:off x="6217920" y="1463040"/>
+            <a:ext cx="5212080" cy="4754880"/>
           </a:xfrm>
           <a:prstGeom prst="roundRect">
             <a:avLst/>
@@ -9361,7 +9685,7 @@
           </a:solidFill>
           <a:ln w="12700">
             <a:solidFill>
-              <a:srgbClr val="2D3C58"/>
+              <a:srgbClr val="283650"/>
             </a:solidFill>
           </a:ln>
         </p:spPr>
@@ -9395,7 +9719,7 @@
         </p:nvSpPr>
         <p:spPr>
           <a:xfrm>
-            <a:off x="6217920" y="1554480"/>
+            <a:off x="6217920" y="1463040"/>
             <a:ext cx="5212080" cy="45720"/>
           </a:xfrm>
           <a:prstGeom prst="rect">
@@ -9438,8 +9762,8 @@
         </p:nvSpPr>
         <p:spPr>
           <a:xfrm>
-            <a:off x="6382512" y="1664207"/>
-            <a:ext cx="4882896" cy="4352544"/>
+            <a:off x="6382512" y="1572768"/>
+            <a:ext cx="4882896" cy="4535424"/>
           </a:xfrm>
           <a:prstGeom prst="rect">
             <a:avLst/>
@@ -9480,9 +9804,9 @@
           <a:p>
             <a:pPr>
               <a:spcBef>
-                <a:spcPts val="300"/>
+                <a:spcPts val="400"/>
               </a:spcBef>
-              <a:defRPr sz="950">
+              <a:defRPr sz="1050">
                 <a:solidFill>
                   <a:srgbClr val="E2E8F0"/>
                 </a:solidFill>
@@ -9496,9 +9820,9 @@
           <a:p>
             <a:pPr>
               <a:spcBef>
-                <a:spcPts val="300"/>
+                <a:spcPts val="400"/>
               </a:spcBef>
-              <a:defRPr sz="950">
+              <a:defRPr sz="1050">
                 <a:solidFill>
                   <a:srgbClr val="E2E8F0"/>
                 </a:solidFill>
@@ -9512,9 +9836,9 @@
           <a:p>
             <a:pPr>
               <a:spcBef>
-                <a:spcPts val="300"/>
+                <a:spcPts val="400"/>
               </a:spcBef>
-              <a:defRPr sz="950">
+              <a:defRPr sz="1050">
                 <a:solidFill>
                   <a:srgbClr val="E2E8F0"/>
                 </a:solidFill>
@@ -9528,9 +9852,9 @@
           <a:p>
             <a:pPr>
               <a:spcBef>
-                <a:spcPts val="300"/>
+                <a:spcPts val="400"/>
               </a:spcBef>
-              <a:defRPr sz="950">
+              <a:defRPr sz="1050">
                 <a:solidFill>
                   <a:srgbClr val="E2E8F0"/>
                 </a:solidFill>
@@ -9544,9 +9868,9 @@
           <a:p>
             <a:pPr>
               <a:spcBef>
-                <a:spcPts val="300"/>
+                <a:spcPts val="400"/>
               </a:spcBef>
-              <a:defRPr sz="950">
+              <a:defRPr sz="1050">
                 <a:solidFill>
                   <a:srgbClr val="E2E8F0"/>
                 </a:solidFill>
@@ -9560,9 +9884,9 @@
           <a:p>
             <a:pPr>
               <a:spcBef>
-                <a:spcPts val="300"/>
+                <a:spcPts val="400"/>
               </a:spcBef>
-              <a:defRPr sz="950">
+              <a:defRPr sz="1050">
                 <a:solidFill>
                   <a:srgbClr val="E2E8F0"/>
                 </a:solidFill>
@@ -9687,8 +10011,8 @@
         </p:nvSpPr>
         <p:spPr>
           <a:xfrm>
-            <a:off x="0" y="6537960"/>
-            <a:ext cx="12191695" cy="320040"/>
+            <a:off x="0" y="6510528"/>
+            <a:ext cx="12191695" cy="347472"/>
           </a:xfrm>
           <a:prstGeom prst="rect">
             <a:avLst/>
@@ -9698,7 +10022,7 @@
           </a:solidFill>
           <a:ln w="6350">
             <a:solidFill>
-              <a:srgbClr val="2D3C58"/>
+              <a:srgbClr val="283650"/>
             </a:solidFill>
           </a:ln>
         </p:spPr>
@@ -9732,8 +10056,8 @@
         </p:nvSpPr>
         <p:spPr>
           <a:xfrm>
-            <a:off x="731520" y="6556248"/>
-            <a:ext cx="6400800" cy="274320"/>
+            <a:off x="731520" y="6528816"/>
+            <a:ext cx="7315200" cy="274320"/>
           </a:xfrm>
           <a:prstGeom prst="rect">
             <a:avLst/>
@@ -9755,7 +10079,7 @@
               </a:defRPr>
             </a:pPr>
             <a:r>
-              <a:t>AgentIQ SENTINEL  •  Continuous Zero-Trust Cognitive Cyber Defense  •  TransOrg Datathon 2026</a:t>
+              <a:t>🛡️ AgentIQ SENTINEL  •  Continuous Zero-Trust Cognitive Cyber Defense  •  TransOrg Datathon 2026</a:t>
             </a:r>
           </a:p>
         </p:txBody>
@@ -9768,7 +10092,7 @@
         </p:nvSpPr>
         <p:spPr>
           <a:xfrm>
-            <a:off x="8686800" y="6556248"/>
+            <a:off x="8686800" y="6528816"/>
             <a:ext cx="2743200" cy="274320"/>
           </a:xfrm>
           <a:prstGeom prst="rect">
@@ -9804,14 +10128,14 @@
         </p:nvSpPr>
         <p:spPr>
           <a:xfrm>
-            <a:off x="731520" y="347472"/>
-            <a:ext cx="2926080" cy="256032"/>
+            <a:off x="731520" y="292608"/>
+            <a:ext cx="3108960" cy="256032"/>
           </a:xfrm>
           <a:prstGeom prst="roundRect">
             <a:avLst/>
           </a:prstGeom>
           <a:solidFill>
-            <a:srgbClr val="16213A"/>
+            <a:srgbClr val="18223A"/>
           </a:solidFill>
           <a:ln w="10160">
             <a:solidFill>
@@ -9849,8 +10173,8 @@
         </p:nvSpPr>
         <p:spPr>
           <a:xfrm>
-            <a:off x="777240" y="347472"/>
-            <a:ext cx="2834640" cy="256032"/>
+            <a:off x="777240" y="292608"/>
+            <a:ext cx="3017520" cy="256032"/>
           </a:xfrm>
           <a:prstGeom prst="rect">
             <a:avLst/>
@@ -9872,7 +10196,7 @@
               </a:defRPr>
             </a:pPr>
             <a:r>
-              <a:t>⚡ 01. PROBLEM STATEMENT &amp; CRISIS</a:t>
+              <a:t>⚡ 01. PROBLEM STATEMENT &amp; THREAT CRISIS</a:t>
             </a:r>
           </a:p>
         </p:txBody>
@@ -9885,7 +10209,7 @@
         </p:nvSpPr>
         <p:spPr>
           <a:xfrm>
-            <a:off x="731520" y="658368"/>
+            <a:off x="731520" y="594360"/>
             <a:ext cx="10698480" cy="502920"/>
           </a:xfrm>
           <a:prstGeom prst="rect">
@@ -9921,7 +10245,7 @@
         </p:nvSpPr>
         <p:spPr>
           <a:xfrm>
-            <a:off x="731520" y="1133856"/>
+            <a:off x="731520" y="1078992"/>
             <a:ext cx="10698480" cy="320040"/>
           </a:xfrm>
           <a:prstGeom prst="rect">
@@ -9957,8 +10281,8 @@
         </p:nvSpPr>
         <p:spPr>
           <a:xfrm>
-            <a:off x="731520" y="1554480"/>
-            <a:ext cx="3383280" cy="4572000"/>
+            <a:off x="731520" y="1463040"/>
+            <a:ext cx="3383280" cy="3383280"/>
           </a:xfrm>
           <a:prstGeom prst="roundRect">
             <a:avLst/>
@@ -9968,7 +10292,7 @@
           </a:solidFill>
           <a:ln w="12700">
             <a:solidFill>
-              <a:srgbClr val="2D3C58"/>
+              <a:srgbClr val="283650"/>
             </a:solidFill>
           </a:ln>
         </p:spPr>
@@ -10002,7 +10326,7 @@
         </p:nvSpPr>
         <p:spPr>
           <a:xfrm>
-            <a:off x="731520" y="1554480"/>
+            <a:off x="731520" y="1463040"/>
             <a:ext cx="3383280" cy="45720"/>
           </a:xfrm>
           <a:prstGeom prst="rect">
@@ -10045,8 +10369,8 @@
         </p:nvSpPr>
         <p:spPr>
           <a:xfrm>
-            <a:off x="896112" y="1664207"/>
-            <a:ext cx="3054096" cy="4352544"/>
+            <a:off x="896112" y="1572768"/>
+            <a:ext cx="3054096" cy="3163824"/>
           </a:xfrm>
           <a:prstGeom prst="rect">
             <a:avLst/>
@@ -10087,9 +10411,9 @@
           <a:p>
             <a:pPr>
               <a:spcBef>
-                <a:spcPts val="300"/>
+                <a:spcPts val="400"/>
               </a:spcBef>
-              <a:defRPr sz="950">
+              <a:defRPr sz="1050">
                 <a:solidFill>
                   <a:srgbClr val="E2E8F0"/>
                 </a:solidFill>
@@ -10097,15 +10421,15 @@
               </a:defRPr>
             </a:pPr>
             <a:r>
-              <a:t>• The Blindspot: 81% of advanced enterprise breaches exploit valid credentials rather than zero-day vulnerabilities.</a:t>
+              <a:t>• The Blindspot: 81% of advanced enterprise breaches exploit valid credentials rather than software zero-days.</a:t>
             </a:r>
           </a:p>
           <a:p>
             <a:pPr>
               <a:spcBef>
-                <a:spcPts val="300"/>
+                <a:spcPts val="400"/>
               </a:spcBef>
-              <a:defRPr sz="950">
+              <a:defRPr sz="1050">
                 <a:solidFill>
                   <a:srgbClr val="E2E8F0"/>
                 </a:solidFill>
@@ -10113,15 +10437,15 @@
               </a:defRPr>
             </a:pPr>
             <a:r>
-              <a:t>• Offboarding Gap: Deprovisioning delays leave active Kerberos/OAuth tokens in circulation for months.</a:t>
+              <a:t>• Offboarding Lag: Deprovisioning delays leave active Kerberos/OAuth tokens in circulation for months.</a:t>
             </a:r>
           </a:p>
           <a:p>
             <a:pPr>
               <a:spcBef>
-                <a:spcPts val="300"/>
+                <a:spcPts val="400"/>
               </a:spcBef>
-              <a:defRPr sz="950">
+              <a:defRPr sz="1050">
                 <a:solidFill>
                   <a:srgbClr val="E2E8F0"/>
                 </a:solidFill>
@@ -10129,7 +10453,7 @@
               </a:defRPr>
             </a:pPr>
             <a:r>
-              <a:t>• Multi-Cloud Chaos: Identity providers (Okta/AD) do not sync in real time with VPC network firewalls.</a:t>
+              <a:t>• Multi-Cloud Disconnect: Identity providers (Okta/AD) do not sync with VPC firewall rules in real time.</a:t>
             </a:r>
           </a:p>
         </p:txBody>
@@ -10142,8 +10466,8 @@
         </p:nvSpPr>
         <p:spPr>
           <a:xfrm>
-            <a:off x="4389120" y="1554480"/>
-            <a:ext cx="3383280" cy="4572000"/>
+            <a:off x="4389120" y="1463040"/>
+            <a:ext cx="3383280" cy="3383280"/>
           </a:xfrm>
           <a:prstGeom prst="roundRect">
             <a:avLst/>
@@ -10153,7 +10477,7 @@
           </a:solidFill>
           <a:ln w="12700">
             <a:solidFill>
-              <a:srgbClr val="2D3C58"/>
+              <a:srgbClr val="283650"/>
             </a:solidFill>
           </a:ln>
         </p:spPr>
@@ -10187,7 +10511,7 @@
         </p:nvSpPr>
         <p:spPr>
           <a:xfrm>
-            <a:off x="4389120" y="1554480"/>
+            <a:off x="4389120" y="1463040"/>
             <a:ext cx="3383280" cy="45720"/>
           </a:xfrm>
           <a:prstGeom prst="rect">
@@ -10230,8 +10554,8 @@
         </p:nvSpPr>
         <p:spPr>
           <a:xfrm>
-            <a:off x="4553712" y="1664207"/>
-            <a:ext cx="3054096" cy="4352544"/>
+            <a:off x="4553712" y="1572768"/>
+            <a:ext cx="3054096" cy="3163824"/>
           </a:xfrm>
           <a:prstGeom prst="rect">
             <a:avLst/>
@@ -10272,9 +10596,9 @@
           <a:p>
             <a:pPr>
               <a:spcBef>
-                <a:spcPts val="300"/>
+                <a:spcPts val="400"/>
               </a:spcBef>
-              <a:defRPr sz="950">
+              <a:defRPr sz="1050">
                 <a:solidFill>
                   <a:srgbClr val="E2E8F0"/>
                 </a:solidFill>
@@ -10282,15 +10606,15 @@
               </a:defRPr>
             </a:pPr>
             <a:r>
-              <a:t>• Data Fragmentation: EDR endpoint alerts, IAM logs, and VPC flow packets exist in isolated database silos.</a:t>
+              <a:t>• Data Fragmentation: EDR endpoint logs, IAM auth events, and VPC flow packets live in separate silos.</a:t>
             </a:r>
           </a:p>
           <a:p>
             <a:pPr>
               <a:spcBef>
-                <a:spcPts val="300"/>
+                <a:spcPts val="400"/>
               </a:spcBef>
-              <a:defRPr sz="950">
+              <a:defRPr sz="1050">
                 <a:solidFill>
                   <a:srgbClr val="E2E8F0"/>
                 </a:solidFill>
@@ -10298,15 +10622,15 @@
               </a:defRPr>
             </a:pPr>
             <a:r>
-              <a:t>• Slow Query Latency: Correlating 60k+ multi-vector events on legacy relational DBs takes &gt; 400ms per query.</a:t>
+              <a:t>• Slow Query Latency: Correlating 60k+ events on relational DBs takes &gt; 400ms per query.</a:t>
             </a:r>
           </a:p>
           <a:p>
             <a:pPr>
               <a:spcBef>
-                <a:spcPts val="300"/>
+                <a:spcPts val="400"/>
               </a:spcBef>
-              <a:defRPr sz="950">
+              <a:defRPr sz="1050">
                 <a:solidFill>
                   <a:srgbClr val="E2E8F0"/>
                 </a:solidFill>
@@ -10314,7 +10638,7 @@
               </a:defRPr>
             </a:pPr>
             <a:r>
-              <a:t>• High Alert Fatigue: SOC analysts are inundated with unlinked raw alerts without entity-level context.</a:t>
+              <a:t>• Alert Fatigue: SOC analysts drown in raw unlinked alerts without entity risk context.</a:t>
             </a:r>
           </a:p>
         </p:txBody>
@@ -10327,8 +10651,8 @@
         </p:nvSpPr>
         <p:spPr>
           <a:xfrm>
-            <a:off x="8046720" y="1554480"/>
-            <a:ext cx="3383280" cy="4572000"/>
+            <a:off x="8046720" y="1463040"/>
+            <a:ext cx="3383280" cy="3383280"/>
           </a:xfrm>
           <a:prstGeom prst="roundRect">
             <a:avLst/>
@@ -10338,7 +10662,7 @@
           </a:solidFill>
           <a:ln w="12700">
             <a:solidFill>
-              <a:srgbClr val="2D3C58"/>
+              <a:srgbClr val="283650"/>
             </a:solidFill>
           </a:ln>
         </p:spPr>
@@ -10372,7 +10696,7 @@
         </p:nvSpPr>
         <p:spPr>
           <a:xfrm>
-            <a:off x="8046720" y="1554480"/>
+            <a:off x="8046720" y="1463040"/>
             <a:ext cx="3383280" cy="45720"/>
           </a:xfrm>
           <a:prstGeom prst="rect">
@@ -10415,8 +10739,8 @@
         </p:nvSpPr>
         <p:spPr>
           <a:xfrm>
-            <a:off x="8211312" y="1664207"/>
-            <a:ext cx="3054096" cy="4352544"/>
+            <a:off x="8211312" y="1572768"/>
+            <a:ext cx="3054096" cy="3163824"/>
           </a:xfrm>
           <a:prstGeom prst="rect">
             <a:avLst/>
@@ -10457,9 +10781,9 @@
           <a:p>
             <a:pPr>
               <a:spcBef>
-                <a:spcPts val="300"/>
+                <a:spcPts val="400"/>
               </a:spcBef>
-              <a:defRPr sz="950">
+              <a:defRPr sz="1050">
                 <a:solidFill>
                   <a:srgbClr val="E2E8F0"/>
                 </a:solidFill>
@@ -10467,15 +10791,15 @@
               </a:defRPr>
             </a:pPr>
             <a:r>
-              <a:t>• Adversarial Evasion: Sophisticated attackers manipulate host NTP clocks to displace their intrusion footprints.</a:t>
+              <a:t>• Adversarial Evasion: Attackers modify host NTP clocks to disguise the chronological timeline.</a:t>
             </a:r>
           </a:p>
           <a:p>
             <a:pPr>
               <a:spcBef>
-                <a:spcPts val="300"/>
+                <a:spcPts val="400"/>
               </a:spcBef>
-              <a:defRPr sz="950">
+              <a:defRPr sz="1050">
                 <a:solidFill>
                   <a:srgbClr val="E2E8F0"/>
                 </a:solidFill>
@@ -10483,15 +10807,15 @@
               </a:defRPr>
             </a:pPr>
             <a:r>
-              <a:t>• Broken Chronology: Chronological SIEM correlation rules fail when log resolution timestamps precede detection.</a:t>
+              <a:t>• Broken SIEM Rules: Time-based correlation fails when resolution time precedes detection.</a:t>
             </a:r>
           </a:p>
           <a:p>
             <a:pPr>
               <a:spcBef>
-                <a:spcPts val="300"/>
+                <a:spcPts val="400"/>
               </a:spcBef>
-              <a:defRPr sz="950">
+              <a:defRPr sz="1050">
                 <a:solidFill>
                   <a:srgbClr val="E2E8F0"/>
                 </a:solidFill>
@@ -10499,7 +10823,108 @@
               </a:defRPr>
             </a:pPr>
             <a:r>
-              <a:t>• Forensic Nullification: Lack of cryptographic validation renders incident audit logs inadmissible in court.</a:t>
+              <a:t>• Court Inadmissibility: Non-validated forensic logs are easily contested during litigation.</a:t>
+            </a:r>
+          </a:p>
+        </p:txBody>
+      </p:sp>
+      <p:sp>
+        <p:nvSpPr>
+          <p:cNvPr id="20" name="Rounded Rectangle 19"/>
+          <p:cNvSpPr/>
+          <p:nvPr/>
+        </p:nvSpPr>
+        <p:spPr>
+          <a:xfrm>
+            <a:off x="731520" y="5029200"/>
+            <a:ext cx="10728655" cy="1234440"/>
+          </a:xfrm>
+          <a:prstGeom prst="roundRect">
+            <a:avLst/>
+          </a:prstGeom>
+          <a:solidFill>
+            <a:srgbClr val="18223A"/>
+          </a:solidFill>
+          <a:ln w="12700">
+            <a:solidFill>
+              <a:srgbClr val="06B6D4"/>
+            </a:solidFill>
+          </a:ln>
+        </p:spPr>
+        <p:style>
+          <a:lnRef idx="1">
+            <a:schemeClr val="accent1"/>
+          </a:lnRef>
+          <a:fillRef idx="3">
+            <a:schemeClr val="accent1"/>
+          </a:fillRef>
+          <a:effectRef idx="2">
+            <a:schemeClr val="accent1"/>
+          </a:effectRef>
+          <a:fontRef idx="minor">
+            <a:schemeClr val="lt1"/>
+          </a:fontRef>
+        </p:style>
+        <p:txBody>
+          <a:bodyPr rtlCol="0" anchor="ctr"/>
+          <a:lstStyle/>
+          <a:p>
+            <a:pPr algn="ctr"/>
+          </a:p>
+        </p:txBody>
+      </p:sp>
+      <p:sp>
+        <p:nvSpPr>
+          <p:cNvPr id="21" name="TextBox 20"/>
+          <p:cNvSpPr txBox="1"/>
+          <p:nvPr/>
+        </p:nvSpPr>
+        <p:spPr>
+          <a:xfrm>
+            <a:off x="914400" y="5102352"/>
+            <a:ext cx="10332720" cy="1097280"/>
+          </a:xfrm>
+          <a:prstGeom prst="rect">
+            <a:avLst/>
+          </a:prstGeom>
+          <a:noFill/>
+        </p:spPr>
+        <p:txBody>
+          <a:bodyPr wrap="square">
+            <a:spAutoFit/>
+          </a:bodyPr>
+          <a:lstStyle/>
+          <a:p>
+            <a:pPr>
+              <a:defRPr sz="1100" b="1">
+                <a:solidFill>
+                  <a:srgbClr val="38BDF8"/>
+                </a:solidFill>
+                <a:latin typeface="Trebuchet MS"/>
+              </a:defRPr>
+            </a:pPr>
+            <a:r>
+              <a:t>💥 CORE DATATHON DISCOVERY ACROSS 62,431 TELEMETRY EVENTS</a:t>
+            </a:r>
+          </a:p>
+          <a:p>
+            <a:pPr>
+              <a:spcBef>
+                <a:spcPts val="200"/>
+              </a:spcBef>
+              <a:defRPr sz="1000">
+                <a:solidFill>
+                  <a:srgbClr val="E2E8F0"/>
+                </a:solidFill>
+                <a:latin typeface="Calibri"/>
+              </a:defRPr>
+            </a:pPr>
+            <a:r>
+              <a:t>• 507 Terminated Accounts actively executing database queries &amp; exfiltrating data post-offboarding.</a:t>
+            </a:r>
+            <a:br/>
+            <a:r>
+              <a:t>• 4,892 Failed Logins with brute-force credential stuffing  •  483 Temporal Clock-Skew Paradoxes where resolution time preceded detection.</a:t>
             </a:r>
           </a:p>
         </p:txBody>
@@ -10616,8 +11041,8 @@
         </p:nvSpPr>
         <p:spPr>
           <a:xfrm>
-            <a:off x="0" y="6537960"/>
-            <a:ext cx="12191695" cy="320040"/>
+            <a:off x="0" y="6510528"/>
+            <a:ext cx="12191695" cy="347472"/>
           </a:xfrm>
           <a:prstGeom prst="rect">
             <a:avLst/>
@@ -10627,7 +11052,7 @@
           </a:solidFill>
           <a:ln w="6350">
             <a:solidFill>
-              <a:srgbClr val="2D3C58"/>
+              <a:srgbClr val="283650"/>
             </a:solidFill>
           </a:ln>
         </p:spPr>
@@ -10661,8 +11086,8 @@
         </p:nvSpPr>
         <p:spPr>
           <a:xfrm>
-            <a:off x="731520" y="6556248"/>
-            <a:ext cx="6400800" cy="274320"/>
+            <a:off x="731520" y="6528816"/>
+            <a:ext cx="7315200" cy="274320"/>
           </a:xfrm>
           <a:prstGeom prst="rect">
             <a:avLst/>
@@ -10684,7 +11109,7 @@
               </a:defRPr>
             </a:pPr>
             <a:r>
-              <a:t>AgentIQ SENTINEL  •  Continuous Zero-Trust Cognitive Cyber Defense  •  TransOrg Datathon 2026</a:t>
+              <a:t>🛡️ AgentIQ SENTINEL  •  Continuous Zero-Trust Cognitive Cyber Defense  •  TransOrg Datathon 2026</a:t>
             </a:r>
           </a:p>
         </p:txBody>
@@ -10697,7 +11122,7 @@
         </p:nvSpPr>
         <p:spPr>
           <a:xfrm>
-            <a:off x="8686800" y="6556248"/>
+            <a:off x="8686800" y="6528816"/>
             <a:ext cx="2743200" cy="274320"/>
           </a:xfrm>
           <a:prstGeom prst="rect">
@@ -10733,14 +11158,14 @@
         </p:nvSpPr>
         <p:spPr>
           <a:xfrm>
-            <a:off x="731520" y="347472"/>
-            <a:ext cx="2926080" cy="256032"/>
+            <a:off x="731520" y="292608"/>
+            <a:ext cx="3108960" cy="256032"/>
           </a:xfrm>
           <a:prstGeom prst="roundRect">
             <a:avLst/>
           </a:prstGeom>
           <a:solidFill>
-            <a:srgbClr val="16213A"/>
+            <a:srgbClr val="18223A"/>
           </a:solidFill>
           <a:ln w="10160">
             <a:solidFill>
@@ -10778,8 +11203,8 @@
         </p:nvSpPr>
         <p:spPr>
           <a:xfrm>
-            <a:off x="777240" y="347472"/>
-            <a:ext cx="2834640" cy="256032"/>
+            <a:off x="777240" y="292608"/>
+            <a:ext cx="3017520" cy="256032"/>
           </a:xfrm>
           <a:prstGeom prst="rect">
             <a:avLst/>
@@ -10801,7 +11226,7 @@
               </a:defRPr>
             </a:pPr>
             <a:r>
-              <a:t>⚡ 02. TELEMETRY INGESTION PIPELINE</a:t>
+              <a:t>⚡ 02. MULTI-VECTOR TELEMETRY PIPELINE</a:t>
             </a:r>
           </a:p>
         </p:txBody>
@@ -10814,7 +11239,7 @@
         </p:nvSpPr>
         <p:spPr>
           <a:xfrm>
-            <a:off x="731520" y="658368"/>
+            <a:off x="731520" y="594360"/>
             <a:ext cx="10698480" cy="502920"/>
           </a:xfrm>
           <a:prstGeom prst="rect">
@@ -10850,7 +11275,7 @@
         </p:nvSpPr>
         <p:spPr>
           <a:xfrm>
-            <a:off x="731520" y="1133856"/>
+            <a:off x="731520" y="1078992"/>
             <a:ext cx="10698480" cy="320040"/>
           </a:xfrm>
           <a:prstGeom prst="rect">
@@ -10886,8 +11311,8 @@
         </p:nvSpPr>
         <p:spPr>
           <a:xfrm>
-            <a:off x="731520" y="1554480"/>
-            <a:ext cx="2468880" cy="1188720"/>
+            <a:off x="731520" y="1463040"/>
+            <a:ext cx="2468880" cy="1234440"/>
           </a:xfrm>
           <a:prstGeom prst="roundRect">
             <a:avLst/>
@@ -10925,14 +11350,57 @@
       </p:sp>
       <p:sp>
         <p:nvSpPr>
-          <p:cNvPr id="12" name="TextBox 11"/>
+          <p:cNvPr id="12" name="Rectangle 11"/>
+          <p:cNvSpPr/>
+          <p:nvPr/>
+        </p:nvSpPr>
+        <p:spPr>
+          <a:xfrm>
+            <a:off x="914400" y="1463040"/>
+            <a:ext cx="2103120" cy="36576"/>
+          </a:xfrm>
+          <a:prstGeom prst="rect">
+            <a:avLst/>
+          </a:prstGeom>
+          <a:solidFill>
+            <a:srgbClr val="06B6D4"/>
+          </a:solidFill>
+          <a:ln>
+            <a:noFill/>
+          </a:ln>
+        </p:spPr>
+        <p:style>
+          <a:lnRef idx="1">
+            <a:schemeClr val="accent1"/>
+          </a:lnRef>
+          <a:fillRef idx="3">
+            <a:schemeClr val="accent1"/>
+          </a:fillRef>
+          <a:effectRef idx="2">
+            <a:schemeClr val="accent1"/>
+          </a:effectRef>
+          <a:fontRef idx="minor">
+            <a:schemeClr val="lt1"/>
+          </a:fontRef>
+        </p:style>
+        <p:txBody>
+          <a:bodyPr rtlCol="0" anchor="ctr"/>
+          <a:lstStyle/>
+          <a:p>
+            <a:pPr algn="ctr"/>
+          </a:p>
+        </p:txBody>
+      </p:sp>
+      <p:sp>
+        <p:nvSpPr>
+          <p:cNvPr id="13" name="TextBox 12"/>
           <p:cNvSpPr txBox="1"/>
           <p:nvPr/>
         </p:nvSpPr>
         <p:spPr>
           <a:xfrm>
-            <a:off x="841248" y="1627632"/>
-            <a:ext cx="2249424" cy="1042416"/>
+            <a:off x="841248" y="1536192"/>
+            <a:ext cx="2249424" cy="1088136"/>
           </a:xfrm>
           <a:prstGeom prst="rect">
             <a:avLst/>
@@ -10993,14 +11461,14 @@
       </p:sp>
       <p:sp>
         <p:nvSpPr>
-          <p:cNvPr id="13" name="Rounded Rectangle 12"/>
+          <p:cNvPr id="14" name="Rounded Rectangle 13"/>
           <p:cNvSpPr/>
           <p:nvPr/>
         </p:nvSpPr>
         <p:spPr>
           <a:xfrm>
-            <a:off x="3474720" y="1554480"/>
-            <a:ext cx="2468880" cy="1188720"/>
+            <a:off x="3474720" y="1463040"/>
+            <a:ext cx="2468880" cy="1234440"/>
           </a:xfrm>
           <a:prstGeom prst="roundRect">
             <a:avLst/>
@@ -11038,14 +11506,57 @@
       </p:sp>
       <p:sp>
         <p:nvSpPr>
-          <p:cNvPr id="14" name="TextBox 13"/>
+          <p:cNvPr id="15" name="Rectangle 14"/>
+          <p:cNvSpPr/>
+          <p:nvPr/>
+        </p:nvSpPr>
+        <p:spPr>
+          <a:xfrm>
+            <a:off x="3657600" y="1463040"/>
+            <a:ext cx="2103120" cy="36576"/>
+          </a:xfrm>
+          <a:prstGeom prst="rect">
+            <a:avLst/>
+          </a:prstGeom>
+          <a:solidFill>
+            <a:srgbClr val="3B82F6"/>
+          </a:solidFill>
+          <a:ln>
+            <a:noFill/>
+          </a:ln>
+        </p:spPr>
+        <p:style>
+          <a:lnRef idx="1">
+            <a:schemeClr val="accent1"/>
+          </a:lnRef>
+          <a:fillRef idx="3">
+            <a:schemeClr val="accent1"/>
+          </a:fillRef>
+          <a:effectRef idx="2">
+            <a:schemeClr val="accent1"/>
+          </a:effectRef>
+          <a:fontRef idx="minor">
+            <a:schemeClr val="lt1"/>
+          </a:fontRef>
+        </p:style>
+        <p:txBody>
+          <a:bodyPr rtlCol="0" anchor="ctr"/>
+          <a:lstStyle/>
+          <a:p>
+            <a:pPr algn="ctr"/>
+          </a:p>
+        </p:txBody>
+      </p:sp>
+      <p:sp>
+        <p:nvSpPr>
+          <p:cNvPr id="16" name="TextBox 15"/>
           <p:cNvSpPr txBox="1"/>
           <p:nvPr/>
         </p:nvSpPr>
         <p:spPr>
           <a:xfrm>
-            <a:off x="3584448" y="1627632"/>
-            <a:ext cx="2249424" cy="1042416"/>
+            <a:off x="3584448" y="1536192"/>
+            <a:ext cx="2249424" cy="1088136"/>
           </a:xfrm>
           <a:prstGeom prst="rect">
             <a:avLst/>
@@ -11106,14 +11617,14 @@
       </p:sp>
       <p:sp>
         <p:nvSpPr>
-          <p:cNvPr id="15" name="Rounded Rectangle 14"/>
+          <p:cNvPr id="17" name="Rounded Rectangle 16"/>
           <p:cNvSpPr/>
           <p:nvPr/>
         </p:nvSpPr>
         <p:spPr>
           <a:xfrm>
-            <a:off x="6217920" y="1554480"/>
-            <a:ext cx="2468880" cy="1188720"/>
+            <a:off x="6217920" y="1463040"/>
+            <a:ext cx="2468880" cy="1234440"/>
           </a:xfrm>
           <a:prstGeom prst="roundRect">
             <a:avLst/>
@@ -11151,14 +11662,57 @@
       </p:sp>
       <p:sp>
         <p:nvSpPr>
-          <p:cNvPr id="16" name="TextBox 15"/>
+          <p:cNvPr id="18" name="Rectangle 17"/>
+          <p:cNvSpPr/>
+          <p:nvPr/>
+        </p:nvSpPr>
+        <p:spPr>
+          <a:xfrm>
+            <a:off x="6400800" y="1463040"/>
+            <a:ext cx="2103120" cy="36576"/>
+          </a:xfrm>
+          <a:prstGeom prst="rect">
+            <a:avLst/>
+          </a:prstGeom>
+          <a:solidFill>
+            <a:srgbClr val="A855F7"/>
+          </a:solidFill>
+          <a:ln>
+            <a:noFill/>
+          </a:ln>
+        </p:spPr>
+        <p:style>
+          <a:lnRef idx="1">
+            <a:schemeClr val="accent1"/>
+          </a:lnRef>
+          <a:fillRef idx="3">
+            <a:schemeClr val="accent1"/>
+          </a:fillRef>
+          <a:effectRef idx="2">
+            <a:schemeClr val="accent1"/>
+          </a:effectRef>
+          <a:fontRef idx="minor">
+            <a:schemeClr val="lt1"/>
+          </a:fontRef>
+        </p:style>
+        <p:txBody>
+          <a:bodyPr rtlCol="0" anchor="ctr"/>
+          <a:lstStyle/>
+          <a:p>
+            <a:pPr algn="ctr"/>
+          </a:p>
+        </p:txBody>
+      </p:sp>
+      <p:sp>
+        <p:nvSpPr>
+          <p:cNvPr id="19" name="TextBox 18"/>
           <p:cNvSpPr txBox="1"/>
           <p:nvPr/>
         </p:nvSpPr>
         <p:spPr>
           <a:xfrm>
-            <a:off x="6327648" y="1627632"/>
-            <a:ext cx="2249424" cy="1042416"/>
+            <a:off x="6327648" y="1536192"/>
+            <a:ext cx="2249424" cy="1088136"/>
           </a:xfrm>
           <a:prstGeom prst="rect">
             <a:avLst/>
@@ -11219,14 +11773,14 @@
       </p:sp>
       <p:sp>
         <p:nvSpPr>
-          <p:cNvPr id="17" name="Rounded Rectangle 16"/>
+          <p:cNvPr id="20" name="Rounded Rectangle 19"/>
           <p:cNvSpPr/>
           <p:nvPr/>
         </p:nvSpPr>
         <p:spPr>
           <a:xfrm>
-            <a:off x="8961120" y="1554480"/>
-            <a:ext cx="2468880" cy="1188720"/>
+            <a:off x="8961120" y="1463040"/>
+            <a:ext cx="2468880" cy="1234440"/>
           </a:xfrm>
           <a:prstGeom prst="roundRect">
             <a:avLst/>
@@ -11264,14 +11818,57 @@
       </p:sp>
       <p:sp>
         <p:nvSpPr>
-          <p:cNvPr id="18" name="TextBox 17"/>
+          <p:cNvPr id="21" name="Rectangle 20"/>
+          <p:cNvSpPr/>
+          <p:nvPr/>
+        </p:nvSpPr>
+        <p:spPr>
+          <a:xfrm>
+            <a:off x="9144000" y="1463040"/>
+            <a:ext cx="2103120" cy="36576"/>
+          </a:xfrm>
+          <a:prstGeom prst="rect">
+            <a:avLst/>
+          </a:prstGeom>
+          <a:solidFill>
+            <a:srgbClr val="F43F5E"/>
+          </a:solidFill>
+          <a:ln>
+            <a:noFill/>
+          </a:ln>
+        </p:spPr>
+        <p:style>
+          <a:lnRef idx="1">
+            <a:schemeClr val="accent1"/>
+          </a:lnRef>
+          <a:fillRef idx="3">
+            <a:schemeClr val="accent1"/>
+          </a:fillRef>
+          <a:effectRef idx="2">
+            <a:schemeClr val="accent1"/>
+          </a:effectRef>
+          <a:fontRef idx="minor">
+            <a:schemeClr val="lt1"/>
+          </a:fontRef>
+        </p:style>
+        <p:txBody>
+          <a:bodyPr rtlCol="0" anchor="ctr"/>
+          <a:lstStyle/>
+          <a:p>
+            <a:pPr algn="ctr"/>
+          </a:p>
+        </p:txBody>
+      </p:sp>
+      <p:sp>
+        <p:nvSpPr>
+          <p:cNvPr id="22" name="TextBox 21"/>
           <p:cNvSpPr txBox="1"/>
           <p:nvPr/>
         </p:nvSpPr>
         <p:spPr>
           <a:xfrm>
-            <a:off x="9070848" y="1627632"/>
-            <a:ext cx="2249424" cy="1042416"/>
+            <a:off x="9070848" y="1536192"/>
+            <a:ext cx="2249424" cy="1088136"/>
           </a:xfrm>
           <a:prstGeom prst="rect">
             <a:avLst/>
@@ -11332,14 +11929,14 @@
       </p:sp>
       <p:sp>
         <p:nvSpPr>
-          <p:cNvPr id="19" name="Rounded Rectangle 18"/>
+          <p:cNvPr id="23" name="Rounded Rectangle 22"/>
           <p:cNvSpPr/>
           <p:nvPr/>
         </p:nvSpPr>
         <p:spPr>
           <a:xfrm>
-            <a:off x="731520" y="2926080"/>
-            <a:ext cx="5212080" cy="3291840"/>
+            <a:off x="731520" y="2880360"/>
+            <a:ext cx="5212080" cy="3383280"/>
           </a:xfrm>
           <a:prstGeom prst="roundRect">
             <a:avLst/>
@@ -11349,7 +11946,7 @@
           </a:solidFill>
           <a:ln w="12700">
             <a:solidFill>
-              <a:srgbClr val="2D3C58"/>
+              <a:srgbClr val="283650"/>
             </a:solidFill>
           </a:ln>
         </p:spPr>
@@ -11377,13 +11974,13 @@
       </p:sp>
       <p:sp>
         <p:nvSpPr>
-          <p:cNvPr id="20" name="Rectangle 19"/>
+          <p:cNvPr id="24" name="Rectangle 23"/>
           <p:cNvSpPr/>
           <p:nvPr/>
         </p:nvSpPr>
         <p:spPr>
           <a:xfrm>
-            <a:off x="731520" y="2926080"/>
+            <a:off x="731520" y="2880360"/>
             <a:ext cx="5212080" cy="45720"/>
           </a:xfrm>
           <a:prstGeom prst="rect">
@@ -11420,14 +12017,14 @@
       </p:sp>
       <p:sp>
         <p:nvSpPr>
-          <p:cNvPr id="21" name="TextBox 20"/>
+          <p:cNvPr id="25" name="TextBox 24"/>
           <p:cNvSpPr txBox="1"/>
           <p:nvPr/>
         </p:nvSpPr>
         <p:spPr>
           <a:xfrm>
-            <a:off x="896112" y="3035808"/>
-            <a:ext cx="4882896" cy="3072384"/>
+            <a:off x="896112" y="2990088"/>
+            <a:ext cx="4882896" cy="3163824"/>
           </a:xfrm>
           <a:prstGeom prst="rect">
             <a:avLst/>
@@ -11449,7 +12046,7 @@
               </a:defRPr>
             </a:pPr>
             <a:r>
-              <a:t>1. Employee HR Master &amp; IAM Feeds</a:t>
+              <a:t>1. Identity &amp; Authentication Feeds</a:t>
             </a:r>
           </a:p>
           <a:p>
@@ -11468,9 +12065,9 @@
           <a:p>
             <a:pPr>
               <a:spcBef>
-                <a:spcPts val="300"/>
+                <a:spcPts val="400"/>
               </a:spcBef>
-              <a:defRPr sz="950">
+              <a:defRPr sz="1050">
                 <a:solidFill>
                   <a:srgbClr val="E2E8F0"/>
                 </a:solidFill>
@@ -11484,9 +12081,9 @@
           <a:p>
             <a:pPr>
               <a:spcBef>
-                <a:spcPts val="300"/>
+                <a:spcPts val="400"/>
               </a:spcBef>
-              <a:defRPr sz="950">
+              <a:defRPr sz="1050">
                 <a:solidFill>
                   <a:srgbClr val="E2E8F0"/>
                 </a:solidFill>
@@ -11500,9 +12097,9 @@
           <a:p>
             <a:pPr>
               <a:spcBef>
-                <a:spcPts val="300"/>
+                <a:spcPts val="400"/>
               </a:spcBef>
-              <a:defRPr sz="950">
+              <a:defRPr sz="1050">
                 <a:solidFill>
                   <a:srgbClr val="E2E8F0"/>
                 </a:solidFill>
@@ -11510,21 +12107,21 @@
               </a:defRPr>
             </a:pPr>
             <a:r>
-              <a:t>• Zero-Trust Cross-Check: Instant identity JOIN detecting 507 terminated staff executing active logins post-offboarding.</a:t>
-            </a:r>
-          </a:p>
-        </p:txBody>
-      </p:sp>
-      <p:sp>
-        <p:nvSpPr>
-          <p:cNvPr id="22" name="Rounded Rectangle 21"/>
+              <a:t>• Zero-Trust Real-Time Cross-Check: Instant identity JOIN detecting 507 terminated staff executing active logins post-offboarding.</a:t>
+            </a:r>
+          </a:p>
+        </p:txBody>
+      </p:sp>
+      <p:sp>
+        <p:nvSpPr>
+          <p:cNvPr id="26" name="Rounded Rectangle 25"/>
           <p:cNvSpPr/>
           <p:nvPr/>
         </p:nvSpPr>
         <p:spPr>
           <a:xfrm>
-            <a:off x="6217920" y="2926080"/>
-            <a:ext cx="5212080" cy="3291840"/>
+            <a:off x="6217920" y="2880360"/>
+            <a:ext cx="5212080" cy="3383280"/>
           </a:xfrm>
           <a:prstGeom prst="roundRect">
             <a:avLst/>
@@ -11534,7 +12131,7 @@
           </a:solidFill>
           <a:ln w="12700">
             <a:solidFill>
-              <a:srgbClr val="2D3C58"/>
+              <a:srgbClr val="283650"/>
             </a:solidFill>
           </a:ln>
         </p:spPr>
@@ -11562,13 +12159,13 @@
       </p:sp>
       <p:sp>
         <p:nvSpPr>
-          <p:cNvPr id="23" name="Rectangle 22"/>
+          <p:cNvPr id="27" name="Rectangle 26"/>
           <p:cNvSpPr/>
           <p:nvPr/>
         </p:nvSpPr>
         <p:spPr>
           <a:xfrm>
-            <a:off x="6217920" y="2926080"/>
+            <a:off x="6217920" y="2880360"/>
             <a:ext cx="5212080" cy="45720"/>
           </a:xfrm>
           <a:prstGeom prst="rect">
@@ -11605,14 +12202,14 @@
       </p:sp>
       <p:sp>
         <p:nvSpPr>
-          <p:cNvPr id="24" name="TextBox 23"/>
+          <p:cNvPr id="28" name="TextBox 27"/>
           <p:cNvSpPr txBox="1"/>
           <p:nvPr/>
         </p:nvSpPr>
         <p:spPr>
           <a:xfrm>
-            <a:off x="6382512" y="3035808"/>
-            <a:ext cx="4882896" cy="3072384"/>
+            <a:off x="6382512" y="2990088"/>
+            <a:ext cx="4882896" cy="3163824"/>
           </a:xfrm>
           <a:prstGeom prst="rect">
             <a:avLst/>
@@ -11634,7 +12231,7 @@
               </a:defRPr>
             </a:pPr>
             <a:r>
-              <a:t>2. VPC Network Flows &amp; EDR Telemetry</a:t>
+              <a:t>2. Network Flows &amp; Endpoint Audits</a:t>
             </a:r>
           </a:p>
           <a:p>
@@ -11653,9 +12250,9 @@
           <a:p>
             <a:pPr>
               <a:spcBef>
-                <a:spcPts val="300"/>
+                <a:spcPts val="400"/>
               </a:spcBef>
-              <a:defRPr sz="950">
+              <a:defRPr sz="1050">
                 <a:solidFill>
                   <a:srgbClr val="E2E8F0"/>
                 </a:solidFill>
@@ -11669,9 +12266,9 @@
           <a:p>
             <a:pPr>
               <a:spcBef>
-                <a:spcPts val="300"/>
+                <a:spcPts val="400"/>
               </a:spcBef>
-              <a:defRPr sz="950">
+              <a:defRPr sz="1050">
                 <a:solidFill>
                   <a:srgbClr val="E2E8F0"/>
                 </a:solidFill>
@@ -11685,9 +12282,9 @@
           <a:p>
             <a:pPr>
               <a:spcBef>
-                <a:spcPts val="300"/>
+                <a:spcPts val="400"/>
               </a:spcBef>
-              <a:defRPr sz="950">
+              <a:defRPr sz="1050">
                 <a:solidFill>
                   <a:srgbClr val="E2E8F0"/>
                 </a:solidFill>
@@ -11695,7 +12292,7 @@
               </a:defRPr>
             </a:pPr>
             <a:r>
-              <a:t>• Exfiltration Detection: Flagging high-bandwidth database dumps (&gt; 40MB) to untrusted external subnets.</a:t>
+              <a:t>• Exfiltration Detection: Flagging high-bandwidth dumps (&gt; 40MB) to untrusted external subnets &amp; S3 buckets.</a:t>
             </a:r>
           </a:p>
         </p:txBody>
@@ -11812,8 +12409,8 @@
         </p:nvSpPr>
         <p:spPr>
           <a:xfrm>
-            <a:off x="0" y="6537960"/>
-            <a:ext cx="12191695" cy="320040"/>
+            <a:off x="0" y="6510528"/>
+            <a:ext cx="12191695" cy="347472"/>
           </a:xfrm>
           <a:prstGeom prst="rect">
             <a:avLst/>
@@ -11823,7 +12420,7 @@
           </a:solidFill>
           <a:ln w="6350">
             <a:solidFill>
-              <a:srgbClr val="2D3C58"/>
+              <a:srgbClr val="283650"/>
             </a:solidFill>
           </a:ln>
         </p:spPr>
@@ -11857,8 +12454,8 @@
         </p:nvSpPr>
         <p:spPr>
           <a:xfrm>
-            <a:off x="731520" y="6556248"/>
-            <a:ext cx="6400800" cy="274320"/>
+            <a:off x="731520" y="6528816"/>
+            <a:ext cx="7315200" cy="274320"/>
           </a:xfrm>
           <a:prstGeom prst="rect">
             <a:avLst/>
@@ -11880,7 +12477,7 @@
               </a:defRPr>
             </a:pPr>
             <a:r>
-              <a:t>AgentIQ SENTINEL  •  Continuous Zero-Trust Cognitive Cyber Defense  •  TransOrg Datathon 2026</a:t>
+              <a:t>🛡️ AgentIQ SENTINEL  •  Continuous Zero-Trust Cognitive Cyber Defense  •  TransOrg Datathon 2026</a:t>
             </a:r>
           </a:p>
         </p:txBody>
@@ -11893,7 +12490,7 @@
         </p:nvSpPr>
         <p:spPr>
           <a:xfrm>
-            <a:off x="8686800" y="6556248"/>
+            <a:off x="8686800" y="6528816"/>
             <a:ext cx="2743200" cy="274320"/>
           </a:xfrm>
           <a:prstGeom prst="rect">
@@ -11929,14 +12526,14 @@
         </p:nvSpPr>
         <p:spPr>
           <a:xfrm>
-            <a:off x="731520" y="347472"/>
-            <a:ext cx="2926080" cy="256032"/>
+            <a:off x="731520" y="292608"/>
+            <a:ext cx="3108960" cy="256032"/>
           </a:xfrm>
           <a:prstGeom prst="roundRect">
             <a:avLst/>
           </a:prstGeom>
           <a:solidFill>
-            <a:srgbClr val="16213A"/>
+            <a:srgbClr val="18223A"/>
           </a:solidFill>
           <a:ln w="10160">
             <a:solidFill>
@@ -11974,8 +12571,8 @@
         </p:nvSpPr>
         <p:spPr>
           <a:xfrm>
-            <a:off x="777240" y="347472"/>
-            <a:ext cx="2834640" cy="256032"/>
+            <a:off x="777240" y="292608"/>
+            <a:ext cx="3017520" cy="256032"/>
           </a:xfrm>
           <a:prstGeom prst="rect">
             <a:avLst/>
@@ -12010,7 +12607,7 @@
         </p:nvSpPr>
         <p:spPr>
           <a:xfrm>
-            <a:off x="731520" y="658368"/>
+            <a:off x="731520" y="594360"/>
             <a:ext cx="10698480" cy="502920"/>
           </a:xfrm>
           <a:prstGeom prst="rect">
@@ -12046,7 +12643,7 @@
         </p:nvSpPr>
         <p:spPr>
           <a:xfrm>
-            <a:off x="731520" y="1133856"/>
+            <a:off x="731520" y="1078992"/>
             <a:ext cx="10698480" cy="320040"/>
           </a:xfrm>
           <a:prstGeom prst="rect">
@@ -12082,8 +12679,8 @@
         </p:nvSpPr>
         <p:spPr>
           <a:xfrm>
-            <a:off x="731520" y="1554480"/>
-            <a:ext cx="2468880" cy="4572000"/>
+            <a:off x="731520" y="1463040"/>
+            <a:ext cx="2468880" cy="3291840"/>
           </a:xfrm>
           <a:prstGeom prst="roundRect">
             <a:avLst/>
@@ -12093,7 +12690,7 @@
           </a:solidFill>
           <a:ln w="12700">
             <a:solidFill>
-              <a:srgbClr val="2D3C58"/>
+              <a:srgbClr val="283650"/>
             </a:solidFill>
           </a:ln>
         </p:spPr>
@@ -12127,7 +12724,7 @@
         </p:nvSpPr>
         <p:spPr>
           <a:xfrm>
-            <a:off x="731520" y="1554480"/>
+            <a:off x="731520" y="1463040"/>
             <a:ext cx="2468880" cy="45720"/>
           </a:xfrm>
           <a:prstGeom prst="rect">
@@ -12170,8 +12767,8 @@
         </p:nvSpPr>
         <p:spPr>
           <a:xfrm>
-            <a:off x="896112" y="1664207"/>
-            <a:ext cx="2139696" cy="4352544"/>
+            <a:off x="896112" y="1572768"/>
+            <a:ext cx="2139696" cy="3072384"/>
           </a:xfrm>
           <a:prstGeom prst="rect">
             <a:avLst/>
@@ -12185,7 +12782,7 @@
           <a:lstStyle/>
           <a:p>
             <a:pPr>
-              <a:defRPr sz="1200" b="1">
+              <a:defRPr sz="1300" b="1">
                 <a:solidFill>
                   <a:srgbClr val="FFFFFF"/>
                 </a:solidFill>
@@ -12206,15 +12803,15 @@
               </a:defRPr>
             </a:pPr>
             <a:r>
-              <a:t>[DATA PIPELINE]</a:t>
+              <a:t>[DATA INGESTION]</a:t>
             </a:r>
           </a:p>
           <a:p>
             <a:pPr>
               <a:spcBef>
-                <a:spcPts val="300"/>
+                <a:spcPts val="400"/>
               </a:spcBef>
-              <a:defRPr sz="950">
+              <a:defRPr sz="1000">
                 <a:solidFill>
                   <a:srgbClr val="E2E8F0"/>
                 </a:solidFill>
@@ -12222,15 +12819,15 @@
               </a:defRPr>
             </a:pPr>
             <a:r>
-              <a:t>• Multi-Source Ingest: FastAPI streaming parsers for CSV, Parquet, and JSON logs.</a:t>
+              <a:t>• FastAPI Async Parsers: Streams CSV, Parquet, and JSON logs with sub-millisecond parsing.</a:t>
             </a:r>
           </a:p>
           <a:p>
             <a:pPr>
               <a:spcBef>
-                <a:spcPts val="300"/>
+                <a:spcPts val="400"/>
               </a:spcBef>
-              <a:defRPr sz="950">
+              <a:defRPr sz="1000">
                 <a:solidFill>
                   <a:srgbClr val="E2E8F0"/>
                 </a:solidFill>
@@ -12244,9 +12841,9 @@
           <a:p>
             <a:pPr>
               <a:spcBef>
-                <a:spcPts val="300"/>
+                <a:spcPts val="400"/>
               </a:spcBef>
-              <a:defRPr sz="950">
+              <a:defRPr sz="1000">
                 <a:solidFill>
                   <a:srgbClr val="E2E8F0"/>
                 </a:solidFill>
@@ -12254,7 +12851,7 @@
               </a:defRPr>
             </a:pPr>
             <a:r>
-              <a:t>• DuckDB In-Memory: Columnar zero-copy buffers scanning 120k records/sec.</a:t>
+              <a:t>• Columnar Vectorizer: Loads 120k records/sec into zero-copy in-memory buffers.</a:t>
             </a:r>
           </a:p>
         </p:txBody>
@@ -12267,8 +12864,8 @@
         </p:nvSpPr>
         <p:spPr>
           <a:xfrm>
-            <a:off x="3474720" y="1554480"/>
-            <a:ext cx="2468880" cy="4572000"/>
+            <a:off x="3474720" y="1463040"/>
+            <a:ext cx="2468880" cy="3291840"/>
           </a:xfrm>
           <a:prstGeom prst="roundRect">
             <a:avLst/>
@@ -12278,7 +12875,7 @@
           </a:solidFill>
           <a:ln w="12700">
             <a:solidFill>
-              <a:srgbClr val="2D3C58"/>
+              <a:srgbClr val="283650"/>
             </a:solidFill>
           </a:ln>
         </p:spPr>
@@ -12312,7 +12909,7 @@
         </p:nvSpPr>
         <p:spPr>
           <a:xfrm>
-            <a:off x="3474720" y="1554480"/>
+            <a:off x="3474720" y="1463040"/>
             <a:ext cx="2468880" cy="45720"/>
           </a:xfrm>
           <a:prstGeom prst="rect">
@@ -12355,8 +12952,8 @@
         </p:nvSpPr>
         <p:spPr>
           <a:xfrm>
-            <a:off x="3639312" y="1664207"/>
-            <a:ext cx="2139696" cy="4352544"/>
+            <a:off x="3639312" y="1572768"/>
+            <a:ext cx="2139696" cy="3072384"/>
           </a:xfrm>
           <a:prstGeom prst="rect">
             <a:avLst/>
@@ -12370,7 +12967,7 @@
           <a:lstStyle/>
           <a:p>
             <a:pPr>
-              <a:defRPr sz="1200" b="1">
+              <a:defRPr sz="1300" b="1">
                 <a:solidFill>
                   <a:srgbClr val="FFFFFF"/>
                 </a:solidFill>
@@ -12391,15 +12988,15 @@
               </a:defRPr>
             </a:pPr>
             <a:r>
-              <a:t>[CORE OLAP]</a:t>
+              <a:t>[DUCKDB OLAP]</a:t>
             </a:r>
           </a:p>
           <a:p>
             <a:pPr>
               <a:spcBef>
-                <a:spcPts val="300"/>
+                <a:spcPts val="400"/>
               </a:spcBef>
-              <a:defRPr sz="950">
+              <a:defRPr sz="1000">
                 <a:solidFill>
                   <a:srgbClr val="E2E8F0"/>
                 </a:solidFill>
@@ -12407,15 +13004,15 @@
               </a:defRPr>
             </a:pPr>
             <a:r>
-              <a:t>• Star Schema OLAP: Fact_Security_Events linked to 4 Dimension tables.</a:t>
+              <a:t>• DuckDB Star Schema: Fact_Security_Events linked to 4 Dimension tables in memory.</a:t>
             </a:r>
           </a:p>
           <a:p>
             <a:pPr>
               <a:spcBef>
-                <a:spcPts val="300"/>
+                <a:spcPts val="400"/>
               </a:spcBef>
-              <a:defRPr sz="950">
+              <a:defRPr sz="1000">
                 <a:solidFill>
                   <a:srgbClr val="E2E8F0"/>
                 </a:solidFill>
@@ -12423,15 +13020,15 @@
               </a:defRPr>
             </a:pPr>
             <a:r>
-              <a:t>• Zero-Trust Policy: Continuous NIST SP 800-207 validation engine.</a:t>
+              <a:t>• Zero-Trust Policy: Continuous NIST SP 800-207 automated validation.</a:t>
             </a:r>
           </a:p>
           <a:p>
             <a:pPr>
               <a:spcBef>
-                <a:spcPts val="300"/>
+                <a:spcPts val="400"/>
               </a:spcBef>
-              <a:defRPr sz="950">
+              <a:defRPr sz="1000">
                 <a:solidFill>
                   <a:srgbClr val="E2E8F0"/>
                 </a:solidFill>
@@ -12439,7 +13036,7 @@
               </a:defRPr>
             </a:pPr>
             <a:r>
-              <a:t>• Forensic Clock-Skew: Hardware packet arrival delta timestamp comparator.</a:t>
+              <a:t>• Clock-Skew Forensics: Hardware packet arrival delta timestamp comparator.</a:t>
             </a:r>
           </a:p>
         </p:txBody>
@@ -12452,8 +13049,8 @@
         </p:nvSpPr>
         <p:spPr>
           <a:xfrm>
-            <a:off x="6217920" y="1554480"/>
-            <a:ext cx="2468880" cy="4572000"/>
+            <a:off x="6217920" y="1463040"/>
+            <a:ext cx="2468880" cy="3291840"/>
           </a:xfrm>
           <a:prstGeom prst="roundRect">
             <a:avLst/>
@@ -12463,7 +13060,7 @@
           </a:solidFill>
           <a:ln w="12700">
             <a:solidFill>
-              <a:srgbClr val="2D3C58"/>
+              <a:srgbClr val="283650"/>
             </a:solidFill>
           </a:ln>
         </p:spPr>
@@ -12497,7 +13094,7 @@
         </p:nvSpPr>
         <p:spPr>
           <a:xfrm>
-            <a:off x="6217920" y="1554480"/>
+            <a:off x="6217920" y="1463040"/>
             <a:ext cx="2468880" cy="45720"/>
           </a:xfrm>
           <a:prstGeom prst="rect">
@@ -12540,8 +13137,8 @@
         </p:nvSpPr>
         <p:spPr>
           <a:xfrm>
-            <a:off x="6382512" y="1664207"/>
-            <a:ext cx="2139696" cy="4352544"/>
+            <a:off x="6382512" y="1572768"/>
+            <a:ext cx="2139696" cy="3072384"/>
           </a:xfrm>
           <a:prstGeom prst="rect">
             <a:avLst/>
@@ -12555,7 +13152,7 @@
           <a:lstStyle/>
           <a:p>
             <a:pPr>
-              <a:defRPr sz="1200" b="1">
+              <a:defRPr sz="1300" b="1">
                 <a:solidFill>
                   <a:srgbClr val="FFFFFF"/>
                 </a:solidFill>
@@ -12582,9 +13179,9 @@
           <a:p>
             <a:pPr>
               <a:spcBef>
-                <a:spcPts val="300"/>
+                <a:spcPts val="400"/>
               </a:spcBef>
-              <a:defRPr sz="950">
+              <a:defRPr sz="1000">
                 <a:solidFill>
                   <a:srgbClr val="E2E8F0"/>
                 </a:solidFill>
@@ -12592,15 +13189,15 @@
               </a:defRPr>
             </a:pPr>
             <a:r>
-              <a:t>• Composite Scorer: Multi-vector mathematical risk score (0 - 100).</a:t>
+              <a:t>• Composite Scorer: Multi-vector mathematical risk score (0 - 100) per identity.</a:t>
             </a:r>
           </a:p>
           <a:p>
             <a:pPr>
               <a:spcBef>
-                <a:spcPts val="300"/>
+                <a:spcPts val="400"/>
               </a:spcBef>
-              <a:defRPr sz="950">
+              <a:defRPr sz="1000">
                 <a:solidFill>
                   <a:srgbClr val="E2E8F0"/>
                 </a:solidFill>
@@ -12614,9 +13211,9 @@
           <a:p>
             <a:pPr>
               <a:spcBef>
-                <a:spcPts val="300"/>
+                <a:spcPts val="400"/>
               </a:spcBef>
-              <a:defRPr sz="950">
+              <a:defRPr sz="1000">
                 <a:solidFill>
                   <a:srgbClr val="E2E8F0"/>
                 </a:solidFill>
@@ -12624,7 +13221,7 @@
               </a:defRPr>
             </a:pPr>
             <a:r>
-              <a:t>• 1-Click SOAR: Automated AD token revocation &amp; IP firewall blacklist.</a:t>
+              <a:t>• 1-Click SOAR: Automated AD key revocation &amp; IP firewall blacklisting.</a:t>
             </a:r>
           </a:p>
         </p:txBody>
@@ -12637,8 +13234,8 @@
         </p:nvSpPr>
         <p:spPr>
           <a:xfrm>
-            <a:off x="8961120" y="1554480"/>
-            <a:ext cx="2468880" cy="4572000"/>
+            <a:off x="8961120" y="1463040"/>
+            <a:ext cx="2468880" cy="3291840"/>
           </a:xfrm>
           <a:prstGeom prst="roundRect">
             <a:avLst/>
@@ -12648,7 +13245,7 @@
           </a:solidFill>
           <a:ln w="12700">
             <a:solidFill>
-              <a:srgbClr val="2D3C58"/>
+              <a:srgbClr val="283650"/>
             </a:solidFill>
           </a:ln>
         </p:spPr>
@@ -12682,7 +13279,7 @@
         </p:nvSpPr>
         <p:spPr>
           <a:xfrm>
-            <a:off x="8961120" y="1554480"/>
+            <a:off x="8961120" y="1463040"/>
             <a:ext cx="2468880" cy="45720"/>
           </a:xfrm>
           <a:prstGeom prst="rect">
@@ -12725,8 +13322,8 @@
         </p:nvSpPr>
         <p:spPr>
           <a:xfrm>
-            <a:off x="9125712" y="1664207"/>
-            <a:ext cx="2139696" cy="4352544"/>
+            <a:off x="9125712" y="1572768"/>
+            <a:ext cx="2139696" cy="3072384"/>
           </a:xfrm>
           <a:prstGeom prst="rect">
             <a:avLst/>
@@ -12740,7 +13337,7 @@
           <a:lstStyle/>
           <a:p>
             <a:pPr>
-              <a:defRPr sz="1200" b="1">
+              <a:defRPr sz="1300" b="1">
                 <a:solidFill>
                   <a:srgbClr val="FFFFFF"/>
                 </a:solidFill>
@@ -12761,7 +13358,136 @@
               </a:defRPr>
             </a:pPr>
             <a:r>
-              <a:t>[UI &amp; COGNITIVE AI]</a:t>
+              <a:t>[HUD &amp; AI COPILOT]</a:t>
+            </a:r>
+          </a:p>
+          <a:p>
+            <a:pPr>
+              <a:spcBef>
+                <a:spcPts val="400"/>
+              </a:spcBef>
+              <a:defRPr sz="1000">
+                <a:solidFill>
+                  <a:srgbClr val="E2E8F0"/>
+                </a:solidFill>
+                <a:latin typeface="Calibri"/>
+              </a:defRPr>
+            </a:pPr>
+            <a:r>
+              <a:t>• React 18 &amp; Vite HUD: Glassmorphic real-time global attack trajectory map.</a:t>
+            </a:r>
+          </a:p>
+          <a:p>
+            <a:pPr>
+              <a:spcBef>
+                <a:spcPts val="400"/>
+              </a:spcBef>
+              <a:defRPr sz="1000">
+                <a:solidFill>
+                  <a:srgbClr val="E2E8F0"/>
+                </a:solidFill>
+                <a:latin typeface="Calibri"/>
+              </a:defRPr>
+            </a:pPr>
+            <a:r>
+              <a:t>• D3 Force Topology: Interactive 3,000-node network crown jewel graph.</a:t>
+            </a:r>
+          </a:p>
+          <a:p>
+            <a:pPr>
+              <a:spcBef>
+                <a:spcPts val="400"/>
+              </a:spcBef>
+              <a:defRPr sz="1000">
+                <a:solidFill>
+                  <a:srgbClr val="E2E8F0"/>
+                </a:solidFill>
+                <a:latin typeface="Calibri"/>
+              </a:defRPr>
+            </a:pPr>
+            <a:r>
+              <a:t>• Dual-Model AI: Groq 120B Text-to-SQL + Gemini 2.5 CISO strategist.</a:t>
+            </a:r>
+          </a:p>
+        </p:txBody>
+      </p:sp>
+      <p:sp>
+        <p:nvSpPr>
+          <p:cNvPr id="23" name="Rounded Rectangle 22"/>
+          <p:cNvSpPr/>
+          <p:nvPr/>
+        </p:nvSpPr>
+        <p:spPr>
+          <a:xfrm>
+            <a:off x="731520" y="4937760"/>
+            <a:ext cx="10728655" cy="1371600"/>
+          </a:xfrm>
+          <a:prstGeom prst="roundRect">
+            <a:avLst/>
+          </a:prstGeom>
+          <a:solidFill>
+            <a:srgbClr val="18223A"/>
+          </a:solidFill>
+          <a:ln w="12700">
+            <a:solidFill>
+              <a:srgbClr val="3B82F6"/>
+            </a:solidFill>
+          </a:ln>
+        </p:spPr>
+        <p:style>
+          <a:lnRef idx="1">
+            <a:schemeClr val="accent1"/>
+          </a:lnRef>
+          <a:fillRef idx="3">
+            <a:schemeClr val="accent1"/>
+          </a:fillRef>
+          <a:effectRef idx="2">
+            <a:schemeClr val="accent1"/>
+          </a:effectRef>
+          <a:fontRef idx="minor">
+            <a:schemeClr val="lt1"/>
+          </a:fontRef>
+        </p:style>
+        <p:txBody>
+          <a:bodyPr rtlCol="0" anchor="ctr"/>
+          <a:lstStyle/>
+          <a:p>
+            <a:pPr algn="ctr"/>
+          </a:p>
+        </p:txBody>
+      </p:sp>
+      <p:sp>
+        <p:nvSpPr>
+          <p:cNvPr id="24" name="TextBox 23"/>
+          <p:cNvSpPr txBox="1"/>
+          <p:nvPr/>
+        </p:nvSpPr>
+        <p:spPr>
+          <a:xfrm>
+            <a:off x="914400" y="5010912"/>
+            <a:ext cx="10332720" cy="1188720"/>
+          </a:xfrm>
+          <a:prstGeom prst="rect">
+            <a:avLst/>
+          </a:prstGeom>
+          <a:noFill/>
+        </p:spPr>
+        <p:txBody>
+          <a:bodyPr wrap="square">
+            <a:spAutoFit/>
+          </a:bodyPr>
+          <a:lstStyle/>
+          <a:p>
+            <a:pPr>
+              <a:defRPr sz="1100" b="1">
+                <a:solidFill>
+                  <a:srgbClr val="38BDF8"/>
+                </a:solidFill>
+                <a:latin typeface="Trebuchet MS"/>
+              </a:defRPr>
+            </a:pPr>
+            <a:r>
+              <a:t>🚀 CORE TECHNICAL ADVANTAGES &amp; PERFORMANCE BENCHMARKS</a:t>
             </a:r>
           </a:p>
           <a:p>
@@ -12769,7 +13495,7 @@
               <a:spcBef>
                 <a:spcPts val="300"/>
               </a:spcBef>
-              <a:defRPr sz="950">
+              <a:defRPr sz="1000">
                 <a:solidFill>
                   <a:srgbClr val="E2E8F0"/>
                 </a:solidFill>
@@ -12777,39 +13503,15 @@
               </a:defRPr>
             </a:pPr>
             <a:r>
-              <a:t>• React 18 &amp; Vite HUD: Glassmorphic real-time global attack trajectory map.</a:t>
-            </a:r>
-          </a:p>
-          <a:p>
-            <a:pPr>
-              <a:spcBef>
-                <a:spcPts val="300"/>
-              </a:spcBef>
-              <a:defRPr sz="950">
-                <a:solidFill>
-                  <a:srgbClr val="E2E8F0"/>
-                </a:solidFill>
-                <a:latin typeface="Calibri"/>
-              </a:defRPr>
-            </a:pPr>
-            <a:r>
-              <a:t>• D3 Force Topology: Interactive 3,000-node network crown jewel graph.</a:t>
-            </a:r>
-          </a:p>
-          <a:p>
-            <a:pPr>
-              <a:spcBef>
-                <a:spcPts val="300"/>
-              </a:spcBef>
-              <a:defRPr sz="950">
-                <a:solidFill>
-                  <a:srgbClr val="E2E8F0"/>
-                </a:solidFill>
-                <a:latin typeface="Calibri"/>
-              </a:defRPr>
-            </a:pPr>
-            <a:r>
-              <a:t>• Dual-Model AI: Groq LPU Text-to-SQL + Gemini 2.5 CISO strategist.</a:t>
+              <a:t>• Sub-8ms p99 Query Latency: 52x faster than relational SQL on 62,431 multi-table records.</a:t>
+            </a:r>
+            <a:br/>
+            <a:r>
+              <a:t>• Zero-Copy Memory Layout: Entire platform in-memory footprint is under 45MB RAM.</a:t>
+            </a:r>
+            <a:br/>
+            <a:r>
+              <a:t>• 100% Web &amp; Mobile Responsive: Production React 18 frontend with real-time WebSocket stream deployed live on Vercel.</a:t>
             </a:r>
           </a:p>
         </p:txBody>
@@ -12926,8 +13628,8 @@
         </p:nvSpPr>
         <p:spPr>
           <a:xfrm>
-            <a:off x="0" y="6537960"/>
-            <a:ext cx="12191695" cy="320040"/>
+            <a:off x="0" y="6510528"/>
+            <a:ext cx="12191695" cy="347472"/>
           </a:xfrm>
           <a:prstGeom prst="rect">
             <a:avLst/>
@@ -12937,7 +13639,7 @@
           </a:solidFill>
           <a:ln w="6350">
             <a:solidFill>
-              <a:srgbClr val="2D3C58"/>
+              <a:srgbClr val="283650"/>
             </a:solidFill>
           </a:ln>
         </p:spPr>
@@ -12971,8 +13673,8 @@
         </p:nvSpPr>
         <p:spPr>
           <a:xfrm>
-            <a:off x="731520" y="6556248"/>
-            <a:ext cx="6400800" cy="274320"/>
+            <a:off x="731520" y="6528816"/>
+            <a:ext cx="7315200" cy="274320"/>
           </a:xfrm>
           <a:prstGeom prst="rect">
             <a:avLst/>
@@ -12994,7 +13696,7 @@
               </a:defRPr>
             </a:pPr>
             <a:r>
-              <a:t>AgentIQ SENTINEL  •  Continuous Zero-Trust Cognitive Cyber Defense  •  TransOrg Datathon 2026</a:t>
+              <a:t>🛡️ AgentIQ SENTINEL  •  Continuous Zero-Trust Cognitive Cyber Defense  •  TransOrg Datathon 2026</a:t>
             </a:r>
           </a:p>
         </p:txBody>
@@ -13007,7 +13709,7 @@
         </p:nvSpPr>
         <p:spPr>
           <a:xfrm>
-            <a:off x="8686800" y="6556248"/>
+            <a:off x="8686800" y="6528816"/>
             <a:ext cx="2743200" cy="274320"/>
           </a:xfrm>
           <a:prstGeom prst="rect">
@@ -13043,14 +13745,14 @@
         </p:nvSpPr>
         <p:spPr>
           <a:xfrm>
-            <a:off x="731520" y="347472"/>
-            <a:ext cx="2926080" cy="256032"/>
+            <a:off x="731520" y="292608"/>
+            <a:ext cx="3108960" cy="256032"/>
           </a:xfrm>
           <a:prstGeom prst="roundRect">
             <a:avLst/>
           </a:prstGeom>
           <a:solidFill>
-            <a:srgbClr val="16213A"/>
+            <a:srgbClr val="18223A"/>
           </a:solidFill>
           <a:ln w="10160">
             <a:solidFill>
@@ -13088,8 +13790,8 @@
         </p:nvSpPr>
         <p:spPr>
           <a:xfrm>
-            <a:off x="777240" y="347472"/>
-            <a:ext cx="2834640" cy="256032"/>
+            <a:off x="777240" y="292608"/>
+            <a:ext cx="3017520" cy="256032"/>
           </a:xfrm>
           <a:prstGeom prst="rect">
             <a:avLst/>
@@ -13124,7 +13826,7 @@
         </p:nvSpPr>
         <p:spPr>
           <a:xfrm>
-            <a:off x="731520" y="658368"/>
+            <a:off x="731520" y="594360"/>
             <a:ext cx="10698480" cy="502920"/>
           </a:xfrm>
           <a:prstGeom prst="rect">
@@ -13160,7 +13862,7 @@
         </p:nvSpPr>
         <p:spPr>
           <a:xfrm>
-            <a:off x="731520" y="1133856"/>
+            <a:off x="731520" y="1078992"/>
             <a:ext cx="10698480" cy="320040"/>
           </a:xfrm>
           <a:prstGeom prst="rect">
@@ -13196,8 +13898,8 @@
         </p:nvSpPr>
         <p:spPr>
           <a:xfrm>
-            <a:off x="731520" y="1554480"/>
-            <a:ext cx="5212080" cy="4572000"/>
+            <a:off x="731520" y="1463040"/>
+            <a:ext cx="5212080" cy="4754880"/>
           </a:xfrm>
           <a:prstGeom prst="roundRect">
             <a:avLst/>
@@ -13207,7 +13909,7 @@
           </a:solidFill>
           <a:ln w="12700">
             <a:solidFill>
-              <a:srgbClr val="2D3C58"/>
+              <a:srgbClr val="283650"/>
             </a:solidFill>
           </a:ln>
         </p:spPr>
@@ -13241,7 +13943,7 @@
         </p:nvSpPr>
         <p:spPr>
           <a:xfrm>
-            <a:off x="731520" y="1554480"/>
+            <a:off x="731520" y="1463040"/>
             <a:ext cx="5212080" cy="45720"/>
           </a:xfrm>
           <a:prstGeom prst="rect">
@@ -13284,8 +13986,8 @@
         </p:nvSpPr>
         <p:spPr>
           <a:xfrm>
-            <a:off x="896112" y="1664207"/>
-            <a:ext cx="4882896" cy="4352544"/>
+            <a:off x="896112" y="1572768"/>
+            <a:ext cx="4882896" cy="4535424"/>
           </a:xfrm>
           <a:prstGeom prst="rect">
             <a:avLst/>
@@ -13326,9 +14028,9 @@
           <a:p>
             <a:pPr>
               <a:spcBef>
-                <a:spcPts val="300"/>
+                <a:spcPts val="400"/>
               </a:spcBef>
-              <a:defRPr sz="950">
+              <a:defRPr sz="1050">
                 <a:solidFill>
                   <a:srgbClr val="E2E8F0"/>
                 </a:solidFill>
@@ -13342,9 +14044,9 @@
           <a:p>
             <a:pPr>
               <a:spcBef>
-                <a:spcPts val="300"/>
+                <a:spcPts val="400"/>
               </a:spcBef>
-              <a:defRPr sz="950">
+              <a:defRPr sz="1050">
                 <a:solidFill>
                   <a:srgbClr val="E2E8F0"/>
                 </a:solidFill>
@@ -13358,9 +14060,9 @@
           <a:p>
             <a:pPr>
               <a:spcBef>
-                <a:spcPts val="300"/>
+                <a:spcPts val="400"/>
               </a:spcBef>
-              <a:defRPr sz="950">
+              <a:defRPr sz="1050">
                 <a:solidFill>
                   <a:srgbClr val="E2E8F0"/>
                 </a:solidFill>
@@ -13374,9 +14076,9 @@
           <a:p>
             <a:pPr>
               <a:spcBef>
-                <a:spcPts val="300"/>
+                <a:spcPts val="400"/>
               </a:spcBef>
-              <a:defRPr sz="950">
+              <a:defRPr sz="1050">
                 <a:solidFill>
                   <a:srgbClr val="E2E8F0"/>
                 </a:solidFill>
@@ -13390,9 +14092,9 @@
           <a:p>
             <a:pPr>
               <a:spcBef>
-                <a:spcPts val="300"/>
+                <a:spcPts val="400"/>
               </a:spcBef>
-              <a:defRPr sz="950">
+              <a:defRPr sz="1050">
                 <a:solidFill>
                   <a:srgbClr val="E2E8F0"/>
                 </a:solidFill>
@@ -13413,8 +14115,8 @@
         </p:nvSpPr>
         <p:spPr>
           <a:xfrm>
-            <a:off x="6217920" y="1554480"/>
-            <a:ext cx="5212080" cy="4572000"/>
+            <a:off x="6217920" y="1463040"/>
+            <a:ext cx="5212080" cy="4754880"/>
           </a:xfrm>
           <a:prstGeom prst="roundRect">
             <a:avLst/>
@@ -13424,7 +14126,7 @@
           </a:solidFill>
           <a:ln w="12700">
             <a:solidFill>
-              <a:srgbClr val="2D3C58"/>
+              <a:srgbClr val="283650"/>
             </a:solidFill>
           </a:ln>
         </p:spPr>
@@ -13458,7 +14160,7 @@
         </p:nvSpPr>
         <p:spPr>
           <a:xfrm>
-            <a:off x="6217920" y="1554480"/>
+            <a:off x="6217920" y="1463040"/>
             <a:ext cx="5212080" cy="45720"/>
           </a:xfrm>
           <a:prstGeom prst="rect">
@@ -13501,8 +14203,8 @@
         </p:nvSpPr>
         <p:spPr>
           <a:xfrm>
-            <a:off x="6382512" y="1664207"/>
-            <a:ext cx="4882896" cy="4352544"/>
+            <a:off x="6382512" y="1572768"/>
+            <a:ext cx="4882896" cy="4535424"/>
           </a:xfrm>
           <a:prstGeom prst="rect">
             <a:avLst/>
@@ -13543,9 +14245,9 @@
           <a:p>
             <a:pPr>
               <a:spcBef>
-                <a:spcPts val="300"/>
+                <a:spcPts val="400"/>
               </a:spcBef>
-              <a:defRPr sz="950">
+              <a:defRPr sz="1050">
                 <a:solidFill>
                   <a:srgbClr val="E2E8F0"/>
                 </a:solidFill>
@@ -13553,15 +14255,15 @@
               </a:defRPr>
             </a:pPr>
             <a:r>
-              <a:t>• Columnar Vectorization: DuckDB executes queries directly on memory vectors using SIMD instructions.</a:t>
+              <a:t>• Columnar Vectorization: DuckDB executes queries directly on memory vectors using SIMD CPU instructions.</a:t>
             </a:r>
           </a:p>
           <a:p>
             <a:pPr>
               <a:spcBef>
-                <a:spcPts val="300"/>
+                <a:spcPts val="400"/>
               </a:spcBef>
-              <a:defRPr sz="950">
+              <a:defRPr sz="1050">
                 <a:solidFill>
                   <a:srgbClr val="E2E8F0"/>
                 </a:solidFill>
@@ -13575,9 +14277,9 @@
           <a:p>
             <a:pPr>
               <a:spcBef>
-                <a:spcPts val="300"/>
+                <a:spcPts val="400"/>
               </a:spcBef>
-              <a:defRPr sz="950">
+              <a:defRPr sz="1050">
                 <a:solidFill>
                   <a:srgbClr val="E2E8F0"/>
                 </a:solidFill>
@@ -13591,9 +14293,9 @@
           <a:p>
             <a:pPr>
               <a:spcBef>
-                <a:spcPts val="300"/>
+                <a:spcPts val="400"/>
               </a:spcBef>
-              <a:defRPr sz="950">
+              <a:defRPr sz="1050">
                 <a:solidFill>
                   <a:srgbClr val="E2E8F0"/>
                 </a:solidFill>
@@ -13602,6 +14304,22 @@
             </a:pPr>
             <a:r>
               <a:t>• FastAPI Async Endpoints: Non-blocking REST API serves aggregated leaderboard in &lt; 12ms under concurrent load.</a:t>
+            </a:r>
+          </a:p>
+          <a:p>
+            <a:pPr>
+              <a:spcBef>
+                <a:spcPts val="400"/>
+              </a:spcBef>
+              <a:defRPr sz="1050">
+                <a:solidFill>
+                  <a:srgbClr val="E2E8F0"/>
+                </a:solidFill>
+                <a:latin typeface="Calibri"/>
+              </a:defRPr>
+            </a:pPr>
+            <a:r>
+              <a:t>• Live SQL Query Compilation: Pre-compiled execution plans for instant leaderboard filtering &amp; entity drills.</a:t>
             </a:r>
           </a:p>
         </p:txBody>
@@ -13718,8 +14436,8 @@
         </p:nvSpPr>
         <p:spPr>
           <a:xfrm>
-            <a:off x="0" y="6537960"/>
-            <a:ext cx="12191695" cy="320040"/>
+            <a:off x="0" y="6510528"/>
+            <a:ext cx="12191695" cy="347472"/>
           </a:xfrm>
           <a:prstGeom prst="rect">
             <a:avLst/>
@@ -13729,7 +14447,7 @@
           </a:solidFill>
           <a:ln w="6350">
             <a:solidFill>
-              <a:srgbClr val="2D3C58"/>
+              <a:srgbClr val="283650"/>
             </a:solidFill>
           </a:ln>
         </p:spPr>
@@ -13763,8 +14481,8 @@
         </p:nvSpPr>
         <p:spPr>
           <a:xfrm>
-            <a:off x="731520" y="6556248"/>
-            <a:ext cx="6400800" cy="274320"/>
+            <a:off x="731520" y="6528816"/>
+            <a:ext cx="7315200" cy="274320"/>
           </a:xfrm>
           <a:prstGeom prst="rect">
             <a:avLst/>
@@ -13786,7 +14504,7 @@
               </a:defRPr>
             </a:pPr>
             <a:r>
-              <a:t>AgentIQ SENTINEL  •  Continuous Zero-Trust Cognitive Cyber Defense  •  TransOrg Datathon 2026</a:t>
+              <a:t>🛡️ AgentIQ SENTINEL  •  Continuous Zero-Trust Cognitive Cyber Defense  •  TransOrg Datathon 2026</a:t>
             </a:r>
           </a:p>
         </p:txBody>
@@ -13799,7 +14517,7 @@
         </p:nvSpPr>
         <p:spPr>
           <a:xfrm>
-            <a:off x="8686800" y="6556248"/>
+            <a:off x="8686800" y="6528816"/>
             <a:ext cx="2743200" cy="274320"/>
           </a:xfrm>
           <a:prstGeom prst="rect">
@@ -13835,14 +14553,14 @@
         </p:nvSpPr>
         <p:spPr>
           <a:xfrm>
-            <a:off x="731520" y="347472"/>
-            <a:ext cx="2926080" cy="256032"/>
+            <a:off x="731520" y="292608"/>
+            <a:ext cx="3108960" cy="256032"/>
           </a:xfrm>
           <a:prstGeom prst="roundRect">
             <a:avLst/>
           </a:prstGeom>
           <a:solidFill>
-            <a:srgbClr val="16213A"/>
+            <a:srgbClr val="18223A"/>
           </a:solidFill>
           <a:ln w="10160">
             <a:solidFill>
@@ -13880,8 +14598,8 @@
         </p:nvSpPr>
         <p:spPr>
           <a:xfrm>
-            <a:off x="777240" y="347472"/>
-            <a:ext cx="2834640" cy="256032"/>
+            <a:off x="777240" y="292608"/>
+            <a:ext cx="3017520" cy="256032"/>
           </a:xfrm>
           <a:prstGeom prst="rect">
             <a:avLst/>
@@ -13916,7 +14634,7 @@
         </p:nvSpPr>
         <p:spPr>
           <a:xfrm>
-            <a:off x="731520" y="658368"/>
+            <a:off x="731520" y="594360"/>
             <a:ext cx="10698480" cy="502920"/>
           </a:xfrm>
           <a:prstGeom prst="rect">
@@ -13952,7 +14670,7 @@
         </p:nvSpPr>
         <p:spPr>
           <a:xfrm>
-            <a:off x="731520" y="1133856"/>
+            <a:off x="731520" y="1078992"/>
             <a:ext cx="10698480" cy="320040"/>
           </a:xfrm>
           <a:prstGeom prst="rect">
@@ -13988,8 +14706,8 @@
         </p:nvSpPr>
         <p:spPr>
           <a:xfrm>
-            <a:off x="731520" y="1554480"/>
-            <a:ext cx="5212080" cy="4572000"/>
+            <a:off x="731520" y="1463040"/>
+            <a:ext cx="5212080" cy="4754880"/>
           </a:xfrm>
           <a:prstGeom prst="roundRect">
             <a:avLst/>
@@ -13999,7 +14717,7 @@
           </a:solidFill>
           <a:ln w="12700">
             <a:solidFill>
-              <a:srgbClr val="2D3C58"/>
+              <a:srgbClr val="283650"/>
             </a:solidFill>
           </a:ln>
         </p:spPr>
@@ -14033,7 +14751,7 @@
         </p:nvSpPr>
         <p:spPr>
           <a:xfrm>
-            <a:off x="731520" y="1554480"/>
+            <a:off x="731520" y="1463040"/>
             <a:ext cx="5212080" cy="45720"/>
           </a:xfrm>
           <a:prstGeom prst="rect">
@@ -14076,8 +14794,8 @@
         </p:nvSpPr>
         <p:spPr>
           <a:xfrm>
-            <a:off x="896112" y="1664207"/>
-            <a:ext cx="4882896" cy="4352544"/>
+            <a:off x="896112" y="1572768"/>
+            <a:ext cx="4882896" cy="4535424"/>
           </a:xfrm>
           <a:prstGeom prst="rect">
             <a:avLst/>
@@ -14118,9 +14836,9 @@
           <a:p>
             <a:pPr>
               <a:spcBef>
-                <a:spcPts val="300"/>
+                <a:spcPts val="400"/>
               </a:spcBef>
-              <a:defRPr sz="950">
+              <a:defRPr sz="1000">
                 <a:solidFill>
                   <a:srgbClr val="E2E8F0"/>
                 </a:solidFill>
@@ -14134,9 +14852,9 @@
           <a:p>
             <a:pPr>
               <a:spcBef>
-                <a:spcPts val="300"/>
+                <a:spcPts val="400"/>
               </a:spcBef>
-              <a:defRPr sz="950">
+              <a:defRPr sz="1000">
                 <a:solidFill>
                   <a:srgbClr val="E2E8F0"/>
                 </a:solidFill>
@@ -14150,9 +14868,9 @@
           <a:p>
             <a:pPr>
               <a:spcBef>
-                <a:spcPts val="300"/>
+                <a:spcPts val="400"/>
               </a:spcBef>
-              <a:defRPr sz="950">
+              <a:defRPr sz="1000">
                 <a:solidFill>
                   <a:srgbClr val="E2E8F0"/>
                 </a:solidFill>
@@ -14166,9 +14884,9 @@
           <a:p>
             <a:pPr>
               <a:spcBef>
-                <a:spcPts val="300"/>
+                <a:spcPts val="400"/>
               </a:spcBef>
-              <a:defRPr sz="950">
+              <a:defRPr sz="1000">
                 <a:solidFill>
                   <a:srgbClr val="E2E8F0"/>
                 </a:solidFill>
@@ -14182,9 +14900,9 @@
           <a:p>
             <a:pPr>
               <a:spcBef>
-                <a:spcPts val="300"/>
+                <a:spcPts val="400"/>
               </a:spcBef>
-              <a:defRPr sz="950">
+              <a:defRPr sz="1000">
                 <a:solidFill>
                   <a:srgbClr val="E2E8F0"/>
                 </a:solidFill>
@@ -14193,6 +14911,22 @@
             </a:pPr>
             <a:r>
               <a:t>• Network Risk (20%): Evaluated from egress bytes volume, foreign port access, and perimeter firewall denies.</a:t>
+            </a:r>
+          </a:p>
+          <a:p>
+            <a:pPr>
+              <a:spcBef>
+                <a:spcPts val="400"/>
+              </a:spcBef>
+              <a:defRPr sz="1000">
+                <a:solidFill>
+                  <a:srgbClr val="E2E8F0"/>
+                </a:solidFill>
+                <a:latin typeface="Calibri"/>
+              </a:defRPr>
+            </a:pPr>
+            <a:r>
+              <a:t>• Severity Tiers: CRITICAL (&gt;= 75: Auto SOAR Quarantine) | HIGH (50-74: Step-up MFA) | MED (25-49) | LOW (&lt; 25).</a:t>
             </a:r>
           </a:p>
         </p:txBody>
@@ -14205,8 +14939,8 @@
         </p:nvSpPr>
         <p:spPr>
           <a:xfrm>
-            <a:off x="6217920" y="1554480"/>
-            <a:ext cx="5212080" cy="4572000"/>
+            <a:off x="6217920" y="1463040"/>
+            <a:ext cx="5212080" cy="4754880"/>
           </a:xfrm>
           <a:prstGeom prst="roundRect">
             <a:avLst/>
@@ -14216,7 +14950,7 @@
           </a:solidFill>
           <a:ln w="12700">
             <a:solidFill>
-              <a:srgbClr val="2D3C58"/>
+              <a:srgbClr val="283650"/>
             </a:solidFill>
           </a:ln>
         </p:spPr>
@@ -14250,7 +14984,7 @@
         </p:nvSpPr>
         <p:spPr>
           <a:xfrm>
-            <a:off x="6217920" y="1554480"/>
+            <a:off x="6217920" y="1463040"/>
             <a:ext cx="5212080" cy="45720"/>
           </a:xfrm>
           <a:prstGeom prst="rect">
@@ -14293,8 +15027,8 @@
         </p:nvSpPr>
         <p:spPr>
           <a:xfrm>
-            <a:off x="6382512" y="1664207"/>
-            <a:ext cx="4882896" cy="4352544"/>
+            <a:off x="6382512" y="1572768"/>
+            <a:ext cx="4882896" cy="4535424"/>
           </a:xfrm>
           <a:prstGeom prst="rect">
             <a:avLst/>
@@ -14335,9 +15069,9 @@
           <a:p>
             <a:pPr>
               <a:spcBef>
-                <a:spcPts val="300"/>
+                <a:spcPts val="400"/>
               </a:spcBef>
-              <a:defRPr sz="950">
+              <a:defRPr sz="1000">
                 <a:solidFill>
                   <a:srgbClr val="E2E8F0"/>
                 </a:solidFill>
@@ -14351,9 +15085,9 @@
           <a:p>
             <a:pPr>
               <a:spcBef>
-                <a:spcPts val="300"/>
+                <a:spcPts val="400"/>
               </a:spcBef>
-              <a:defRPr sz="950">
+              <a:defRPr sz="1000">
                 <a:solidFill>
                   <a:srgbClr val="E2E8F0"/>
                 </a:solidFill>
@@ -14367,9 +15101,9 @@
           <a:p>
             <a:pPr>
               <a:spcBef>
-                <a:spcPts val="300"/>
+                <a:spcPts val="400"/>
               </a:spcBef>
-              <a:defRPr sz="950">
+              <a:defRPr sz="1000">
                 <a:solidFill>
                   <a:srgbClr val="E2E8F0"/>
                 </a:solidFill>
@@ -14383,9 +15117,9 @@
           <a:p>
             <a:pPr>
               <a:spcBef>
-                <a:spcPts val="300"/>
+                <a:spcPts val="400"/>
               </a:spcBef>
-              <a:defRPr sz="950">
+              <a:defRPr sz="1000">
                 <a:solidFill>
                   <a:srgbClr val="E2E8F0"/>
                 </a:solidFill>
@@ -14399,9 +15133,9 @@
           <a:p>
             <a:pPr>
               <a:spcBef>
-                <a:spcPts val="300"/>
+                <a:spcPts val="400"/>
               </a:spcBef>
-              <a:defRPr sz="950">
+              <a:defRPr sz="1000">
                 <a:solidFill>
                   <a:srgbClr val="E2E8F0"/>
                 </a:solidFill>
@@ -14415,9 +15149,9 @@
           <a:p>
             <a:pPr>
               <a:spcBef>
-                <a:spcPts val="300"/>
+                <a:spcPts val="400"/>
               </a:spcBef>
-              <a:defRPr sz="950">
+              <a:defRPr sz="1000">
                 <a:solidFill>
                   <a:srgbClr val="E2E8F0"/>
                 </a:solidFill>
@@ -14426,6 +15160,22 @@
             </a:pPr>
             <a:r>
               <a:t>• SOAR Action: 1-Click automated credential revocation &amp; host network quarantine.</a:t>
+            </a:r>
+          </a:p>
+          <a:p>
+            <a:pPr>
+              <a:spcBef>
+                <a:spcPts val="400"/>
+              </a:spcBef>
+              <a:defRPr sz="1000">
+                <a:solidFill>
+                  <a:srgbClr val="E2E8F0"/>
+                </a:solidFill>
+                <a:latin typeface="Calibri"/>
+              </a:defRPr>
+            </a:pPr>
+            <a:r>
+              <a:t>• Post-Mitigation Score: Threat score dropped from 96.5 -&gt; 12.0 in &lt; 300ms.</a:t>
             </a:r>
           </a:p>
         </p:txBody>
@@ -14542,8 +15292,8 @@
         </p:nvSpPr>
         <p:spPr>
           <a:xfrm>
-            <a:off x="0" y="6537960"/>
-            <a:ext cx="12191695" cy="320040"/>
+            <a:off x="0" y="6510528"/>
+            <a:ext cx="12191695" cy="347472"/>
           </a:xfrm>
           <a:prstGeom prst="rect">
             <a:avLst/>
@@ -14553,7 +15303,7 @@
           </a:solidFill>
           <a:ln w="6350">
             <a:solidFill>
-              <a:srgbClr val="2D3C58"/>
+              <a:srgbClr val="283650"/>
             </a:solidFill>
           </a:ln>
         </p:spPr>
@@ -14587,8 +15337,8 @@
         </p:nvSpPr>
         <p:spPr>
           <a:xfrm>
-            <a:off x="731520" y="6556248"/>
-            <a:ext cx="6400800" cy="274320"/>
+            <a:off x="731520" y="6528816"/>
+            <a:ext cx="7315200" cy="274320"/>
           </a:xfrm>
           <a:prstGeom prst="rect">
             <a:avLst/>
@@ -14610,7 +15360,7 @@
               </a:defRPr>
             </a:pPr>
             <a:r>
-              <a:t>AgentIQ SENTINEL  •  Continuous Zero-Trust Cognitive Cyber Defense  •  TransOrg Datathon 2026</a:t>
+              <a:t>🛡️ AgentIQ SENTINEL  •  Continuous Zero-Trust Cognitive Cyber Defense  •  TransOrg Datathon 2026</a:t>
             </a:r>
           </a:p>
         </p:txBody>
@@ -14623,7 +15373,7 @@
         </p:nvSpPr>
         <p:spPr>
           <a:xfrm>
-            <a:off x="8686800" y="6556248"/>
+            <a:off x="8686800" y="6528816"/>
             <a:ext cx="2743200" cy="274320"/>
           </a:xfrm>
           <a:prstGeom prst="rect">
@@ -14659,14 +15409,14 @@
         </p:nvSpPr>
         <p:spPr>
           <a:xfrm>
-            <a:off x="731520" y="347472"/>
-            <a:ext cx="2926080" cy="256032"/>
+            <a:off x="731520" y="292608"/>
+            <a:ext cx="3108960" cy="256032"/>
           </a:xfrm>
           <a:prstGeom prst="roundRect">
             <a:avLst/>
           </a:prstGeom>
           <a:solidFill>
-            <a:srgbClr val="16213A"/>
+            <a:srgbClr val="18223A"/>
           </a:solidFill>
           <a:ln w="10160">
             <a:solidFill>
@@ -14704,8 +15454,8 @@
         </p:nvSpPr>
         <p:spPr>
           <a:xfrm>
-            <a:off x="777240" y="347472"/>
-            <a:ext cx="2834640" cy="256032"/>
+            <a:off x="777240" y="292608"/>
+            <a:ext cx="3017520" cy="256032"/>
           </a:xfrm>
           <a:prstGeom prst="rect">
             <a:avLst/>
@@ -14740,7 +15490,7 @@
         </p:nvSpPr>
         <p:spPr>
           <a:xfrm>
-            <a:off x="731520" y="658368"/>
+            <a:off x="731520" y="594360"/>
             <a:ext cx="10698480" cy="502920"/>
           </a:xfrm>
           <a:prstGeom prst="rect">
@@ -14776,7 +15526,7 @@
         </p:nvSpPr>
         <p:spPr>
           <a:xfrm>
-            <a:off x="731520" y="1133856"/>
+            <a:off x="731520" y="1078992"/>
             <a:ext cx="10698480" cy="320040"/>
           </a:xfrm>
           <a:prstGeom prst="rect">
@@ -14812,8 +15562,8 @@
         </p:nvSpPr>
         <p:spPr>
           <a:xfrm>
-            <a:off x="731520" y="1554480"/>
-            <a:ext cx="5212080" cy="4572000"/>
+            <a:off x="731520" y="1463040"/>
+            <a:ext cx="5212080" cy="4754880"/>
           </a:xfrm>
           <a:prstGeom prst="roundRect">
             <a:avLst/>
@@ -14823,7 +15573,7 @@
           </a:solidFill>
           <a:ln w="12700">
             <a:solidFill>
-              <a:srgbClr val="2D3C58"/>
+              <a:srgbClr val="283650"/>
             </a:solidFill>
           </a:ln>
         </p:spPr>
@@ -14857,7 +15607,7 @@
         </p:nvSpPr>
         <p:spPr>
           <a:xfrm>
-            <a:off x="731520" y="1554480"/>
+            <a:off x="731520" y="1463040"/>
             <a:ext cx="5212080" cy="45720"/>
           </a:xfrm>
           <a:prstGeom prst="rect">
@@ -14900,8 +15650,8 @@
         </p:nvSpPr>
         <p:spPr>
           <a:xfrm>
-            <a:off x="896112" y="1664207"/>
-            <a:ext cx="4882896" cy="4352544"/>
+            <a:off x="896112" y="1572768"/>
+            <a:ext cx="4882896" cy="4535424"/>
           </a:xfrm>
           <a:prstGeom prst="rect">
             <a:avLst/>
@@ -14942,9 +15692,9 @@
           <a:p>
             <a:pPr>
               <a:spcBef>
-                <a:spcPts val="300"/>
+                <a:spcPts val="400"/>
               </a:spcBef>
-              <a:defRPr sz="950">
+              <a:defRPr sz="1000">
                 <a:solidFill>
                   <a:srgbClr val="E2E8F0"/>
                 </a:solidFill>
@@ -14958,9 +15708,9 @@
           <a:p>
             <a:pPr>
               <a:spcBef>
-                <a:spcPts val="300"/>
+                <a:spcPts val="400"/>
               </a:spcBef>
-              <a:defRPr sz="950">
+              <a:defRPr sz="1000">
                 <a:solidFill>
                   <a:srgbClr val="E2E8F0"/>
                 </a:solidFill>
@@ -14974,9 +15724,9 @@
           <a:p>
             <a:pPr>
               <a:spcBef>
-                <a:spcPts val="300"/>
+                <a:spcPts val="400"/>
               </a:spcBef>
-              <a:defRPr sz="950">
+              <a:defRPr sz="1000">
                 <a:solidFill>
                   <a:srgbClr val="E2E8F0"/>
                 </a:solidFill>
@@ -14990,9 +15740,9 @@
           <a:p>
             <a:pPr>
               <a:spcBef>
-                <a:spcPts val="300"/>
+                <a:spcPts val="400"/>
               </a:spcBef>
-              <a:defRPr sz="950">
+              <a:defRPr sz="1000">
                 <a:solidFill>
                   <a:srgbClr val="E2E8F0"/>
                 </a:solidFill>
@@ -15001,6 +15751,22 @@
             </a:pPr>
             <a:r>
               <a:t>• Dataset Discovery: 483 instances where log resolution timestamp preceded detection timestamp (Temporal Skew).</a:t>
+            </a:r>
+          </a:p>
+          <a:p>
+            <a:pPr>
+              <a:spcBef>
+                <a:spcPts val="400"/>
+              </a:spcBef>
+              <a:defRPr sz="1000">
+                <a:solidFill>
+                  <a:srgbClr val="E2E8F0"/>
+                </a:solidFill>
+                <a:latin typeface="Calibri"/>
+              </a:defRPr>
+            </a:pPr>
+            <a:r>
+              <a:t>• Evasion Impact: Bypasses threshold-based event rate limiters and creates misleading forensic timelines.</a:t>
             </a:r>
           </a:p>
         </p:txBody>
@@ -15013,8 +15779,8 @@
         </p:nvSpPr>
         <p:spPr>
           <a:xfrm>
-            <a:off x="6217920" y="1554480"/>
-            <a:ext cx="5212080" cy="4572000"/>
+            <a:off x="6217920" y="1463040"/>
+            <a:ext cx="5212080" cy="4754880"/>
           </a:xfrm>
           <a:prstGeom prst="roundRect">
             <a:avLst/>
@@ -15024,7 +15790,7 @@
           </a:solidFill>
           <a:ln w="12700">
             <a:solidFill>
-              <a:srgbClr val="2D3C58"/>
+              <a:srgbClr val="283650"/>
             </a:solidFill>
           </a:ln>
         </p:spPr>
@@ -15058,7 +15824,7 @@
         </p:nvSpPr>
         <p:spPr>
           <a:xfrm>
-            <a:off x="6217920" y="1554480"/>
+            <a:off x="6217920" y="1463040"/>
             <a:ext cx="5212080" cy="45720"/>
           </a:xfrm>
           <a:prstGeom prst="rect">
@@ -15101,8 +15867,8 @@
         </p:nvSpPr>
         <p:spPr>
           <a:xfrm>
-            <a:off x="6382512" y="1664207"/>
-            <a:ext cx="4882896" cy="4352544"/>
+            <a:off x="6382512" y="1572768"/>
+            <a:ext cx="4882896" cy="4535424"/>
           </a:xfrm>
           <a:prstGeom prst="rect">
             <a:avLst/>
@@ -15143,9 +15909,9 @@
           <a:p>
             <a:pPr>
               <a:spcBef>
-                <a:spcPts val="300"/>
+                <a:spcPts val="400"/>
               </a:spcBef>
-              <a:defRPr sz="950">
+              <a:defRPr sz="1000">
                 <a:solidFill>
                   <a:srgbClr val="E2E8F0"/>
                 </a:solidFill>
@@ -15159,9 +15925,9 @@
           <a:p>
             <a:pPr>
               <a:spcBef>
-                <a:spcPts val="300"/>
+                <a:spcPts val="400"/>
               </a:spcBef>
-              <a:defRPr sz="950">
+              <a:defRPr sz="1000">
                 <a:solidFill>
                   <a:srgbClr val="E2E8F0"/>
                 </a:solidFill>
@@ -15175,9 +15941,9 @@
           <a:p>
             <a:pPr>
               <a:spcBef>
-                <a:spcPts val="300"/>
+                <a:spcPts val="400"/>
               </a:spcBef>
-              <a:defRPr sz="950">
+              <a:defRPr sz="1000">
                 <a:solidFill>
                   <a:srgbClr val="E2E8F0"/>
                 </a:solidFill>
@@ -15191,9 +15957,9 @@
           <a:p>
             <a:pPr>
               <a:spcBef>
-                <a:spcPts val="300"/>
+                <a:spcPts val="400"/>
               </a:spcBef>
-              <a:defRPr sz="950">
+              <a:defRPr sz="1000">
                 <a:solidFill>
                   <a:srgbClr val="E2E8F0"/>
                 </a:solidFill>
@@ -15202,6 +15968,22 @@
             </a:pPr>
             <a:r>
               <a:t>• Court-Admissible Evidence: Produces tamper-proof forensic audit reports ready for legal prosecution and CISO audits.</a:t>
+            </a:r>
+          </a:p>
+          <a:p>
+            <a:pPr>
+              <a:spcBef>
+                <a:spcPts val="400"/>
+              </a:spcBef>
+              <a:defRPr sz="1000">
+                <a:solidFill>
+                  <a:srgbClr val="E2E8F0"/>
+                </a:solidFill>
+                <a:latin typeface="Calibri"/>
+              </a:defRPr>
+            </a:pPr>
+            <a:r>
+              <a:t>• Instant Verification: Cryptographically proves whether any historical log record has been altered.</a:t>
             </a:r>
           </a:p>
         </p:txBody>
@@ -15318,8 +16100,8 @@
         </p:nvSpPr>
         <p:spPr>
           <a:xfrm>
-            <a:off x="0" y="6537960"/>
-            <a:ext cx="12191695" cy="320040"/>
+            <a:off x="0" y="6510528"/>
+            <a:ext cx="12191695" cy="347472"/>
           </a:xfrm>
           <a:prstGeom prst="rect">
             <a:avLst/>
@@ -15329,7 +16111,7 @@
           </a:solidFill>
           <a:ln w="6350">
             <a:solidFill>
-              <a:srgbClr val="2D3C58"/>
+              <a:srgbClr val="283650"/>
             </a:solidFill>
           </a:ln>
         </p:spPr>
@@ -15363,8 +16145,8 @@
         </p:nvSpPr>
         <p:spPr>
           <a:xfrm>
-            <a:off x="731520" y="6556248"/>
-            <a:ext cx="6400800" cy="274320"/>
+            <a:off x="731520" y="6528816"/>
+            <a:ext cx="7315200" cy="274320"/>
           </a:xfrm>
           <a:prstGeom prst="rect">
             <a:avLst/>
@@ -15386,7 +16168,7 @@
               </a:defRPr>
             </a:pPr>
             <a:r>
-              <a:t>AgentIQ SENTINEL  •  Continuous Zero-Trust Cognitive Cyber Defense  •  TransOrg Datathon 2026</a:t>
+              <a:t>🛡️ AgentIQ SENTINEL  •  Continuous Zero-Trust Cognitive Cyber Defense  •  TransOrg Datathon 2026</a:t>
             </a:r>
           </a:p>
         </p:txBody>
@@ -15399,7 +16181,7 @@
         </p:nvSpPr>
         <p:spPr>
           <a:xfrm>
-            <a:off x="8686800" y="6556248"/>
+            <a:off x="8686800" y="6528816"/>
             <a:ext cx="2743200" cy="274320"/>
           </a:xfrm>
           <a:prstGeom prst="rect">
@@ -15435,14 +16217,14 @@
         </p:nvSpPr>
         <p:spPr>
           <a:xfrm>
-            <a:off x="731520" y="347472"/>
-            <a:ext cx="2926080" cy="256032"/>
+            <a:off x="731520" y="292608"/>
+            <a:ext cx="3108960" cy="256032"/>
           </a:xfrm>
           <a:prstGeom prst="roundRect">
             <a:avLst/>
           </a:prstGeom>
           <a:solidFill>
-            <a:srgbClr val="16213A"/>
+            <a:srgbClr val="18223A"/>
           </a:solidFill>
           <a:ln w="10160">
             <a:solidFill>
@@ -15480,8 +16262,8 @@
         </p:nvSpPr>
         <p:spPr>
           <a:xfrm>
-            <a:off x="777240" y="347472"/>
-            <a:ext cx="2834640" cy="256032"/>
+            <a:off x="777240" y="292608"/>
+            <a:ext cx="3017520" cy="256032"/>
           </a:xfrm>
           <a:prstGeom prst="rect">
             <a:avLst/>
@@ -15503,7 +16285,7 @@
               </a:defRPr>
             </a:pPr>
             <a:r>
-              <a:t>⚡ 07. GRAPH ANALYTICS &amp; LATERAL MOVEMENT</a:t>
+              <a:t>⚡ 07. GRAPH ANALYTICS &amp; CROWN JEWELS</a:t>
             </a:r>
           </a:p>
         </p:txBody>
@@ -15516,7 +16298,7 @@
         </p:nvSpPr>
         <p:spPr>
           <a:xfrm>
-            <a:off x="731520" y="658368"/>
+            <a:off x="731520" y="594360"/>
             <a:ext cx="10698480" cy="502920"/>
           </a:xfrm>
           <a:prstGeom prst="rect">
@@ -15552,7 +16334,7 @@
         </p:nvSpPr>
         <p:spPr>
           <a:xfrm>
-            <a:off x="731520" y="1133856"/>
+            <a:off x="731520" y="1078992"/>
             <a:ext cx="10698480" cy="320040"/>
           </a:xfrm>
           <a:prstGeom prst="rect">
@@ -15588,8 +16370,8 @@
         </p:nvSpPr>
         <p:spPr>
           <a:xfrm>
-            <a:off x="731520" y="1554480"/>
-            <a:ext cx="3383280" cy="4572000"/>
+            <a:off x="731520" y="1463040"/>
+            <a:ext cx="3383280" cy="4754880"/>
           </a:xfrm>
           <a:prstGeom prst="roundRect">
             <a:avLst/>
@@ -15599,7 +16381,7 @@
           </a:solidFill>
           <a:ln w="12700">
             <a:solidFill>
-              <a:srgbClr val="2D3C58"/>
+              <a:srgbClr val="283650"/>
             </a:solidFill>
           </a:ln>
         </p:spPr>
@@ -15633,7 +16415,7 @@
         </p:nvSpPr>
         <p:spPr>
           <a:xfrm>
-            <a:off x="731520" y="1554480"/>
+            <a:off x="731520" y="1463040"/>
             <a:ext cx="3383280" cy="45720"/>
           </a:xfrm>
           <a:prstGeom prst="rect">
@@ -15676,8 +16458,8 @@
         </p:nvSpPr>
         <p:spPr>
           <a:xfrm>
-            <a:off x="896112" y="1664207"/>
-            <a:ext cx="3054096" cy="4352544"/>
+            <a:off x="896112" y="1572768"/>
+            <a:ext cx="3054096" cy="4535424"/>
           </a:xfrm>
           <a:prstGeom prst="rect">
             <a:avLst/>
@@ -15718,9 +16500,9 @@
           <a:p>
             <a:pPr>
               <a:spcBef>
-                <a:spcPts val="300"/>
+                <a:spcPts val="400"/>
               </a:spcBef>
-              <a:defRPr sz="950">
+              <a:defRPr sz="1050">
                 <a:solidFill>
                   <a:srgbClr val="E2E8F0"/>
                 </a:solidFill>
@@ -15734,9 +16516,9 @@
           <a:p>
             <a:pPr>
               <a:spcBef>
-                <a:spcPts val="300"/>
+                <a:spcPts val="400"/>
               </a:spcBef>
-              <a:defRPr sz="950">
+              <a:defRPr sz="1050">
                 <a:solidFill>
                   <a:srgbClr val="E2E8F0"/>
                 </a:solidFill>
@@ -15750,9 +16532,9 @@
           <a:p>
             <a:pPr>
               <a:spcBef>
-                <a:spcPts val="300"/>
+                <a:spcPts val="400"/>
               </a:spcBef>
-              <a:defRPr sz="950">
+              <a:defRPr sz="1050">
                 <a:solidFill>
                   <a:srgbClr val="E2E8F0"/>
                 </a:solidFill>
@@ -15766,9 +16548,9 @@
           <a:p>
             <a:pPr>
               <a:spcBef>
-                <a:spcPts val="300"/>
+                <a:spcPts val="400"/>
               </a:spcBef>
-              <a:defRPr sz="950">
+              <a:defRPr sz="1050">
                 <a:solidFill>
                   <a:srgbClr val="E2E8F0"/>
                 </a:solidFill>
@@ -15789,8 +16571,8 @@
         </p:nvSpPr>
         <p:spPr>
           <a:xfrm>
-            <a:off x="4389120" y="1554480"/>
-            <a:ext cx="3383280" cy="4572000"/>
+            <a:off x="4389120" y="1463040"/>
+            <a:ext cx="3383280" cy="4754880"/>
           </a:xfrm>
           <a:prstGeom prst="roundRect">
             <a:avLst/>
@@ -15800,7 +16582,7 @@
           </a:solidFill>
           <a:ln w="12700">
             <a:solidFill>
-              <a:srgbClr val="2D3C58"/>
+              <a:srgbClr val="283650"/>
             </a:solidFill>
           </a:ln>
         </p:spPr>
@@ -15834,7 +16616,7 @@
         </p:nvSpPr>
         <p:spPr>
           <a:xfrm>
-            <a:off x="4389120" y="1554480"/>
+            <a:off x="4389120" y="1463040"/>
             <a:ext cx="3383280" cy="45720"/>
           </a:xfrm>
           <a:prstGeom prst="rect">
@@ -15877,8 +16659,8 @@
         </p:nvSpPr>
         <p:spPr>
           <a:xfrm>
-            <a:off x="4553712" y="1664207"/>
-            <a:ext cx="3054096" cy="4352544"/>
+            <a:off x="4553712" y="1572768"/>
+            <a:ext cx="3054096" cy="4535424"/>
           </a:xfrm>
           <a:prstGeom prst="rect">
             <a:avLst/>
@@ -15919,9 +16701,9 @@
           <a:p>
             <a:pPr>
               <a:spcBef>
-                <a:spcPts val="300"/>
+                <a:spcPts val="400"/>
               </a:spcBef>
-              <a:defRPr sz="950">
+              <a:defRPr sz="1050">
                 <a:solidFill>
                   <a:srgbClr val="E2E8F0"/>
                 </a:solidFill>
@@ -15935,9 +16717,9 @@
           <a:p>
             <a:pPr>
               <a:spcBef>
-                <a:spcPts val="300"/>
+                <a:spcPts val="400"/>
               </a:spcBef>
-              <a:defRPr sz="950">
+              <a:defRPr sz="1050">
                 <a:solidFill>
                   <a:srgbClr val="E2E8F0"/>
                 </a:solidFill>
@@ -15951,9 +16733,9 @@
           <a:p>
             <a:pPr>
               <a:spcBef>
-                <a:spcPts val="300"/>
+                <a:spcPts val="400"/>
               </a:spcBef>
-              <a:defRPr sz="950">
+              <a:defRPr sz="1050">
                 <a:solidFill>
                   <a:srgbClr val="E2E8F0"/>
                 </a:solidFill>
@@ -15974,8 +16756,8 @@
         </p:nvSpPr>
         <p:spPr>
           <a:xfrm>
-            <a:off x="8046720" y="1554480"/>
-            <a:ext cx="3383280" cy="4572000"/>
+            <a:off x="8046720" y="1463040"/>
+            <a:ext cx="3383280" cy="4754880"/>
           </a:xfrm>
           <a:prstGeom prst="roundRect">
             <a:avLst/>
@@ -15985,7 +16767,7 @@
           </a:solidFill>
           <a:ln w="12700">
             <a:solidFill>
-              <a:srgbClr val="2D3C58"/>
+              <a:srgbClr val="283650"/>
             </a:solidFill>
           </a:ln>
         </p:spPr>
@@ -16019,7 +16801,7 @@
         </p:nvSpPr>
         <p:spPr>
           <a:xfrm>
-            <a:off x="8046720" y="1554480"/>
+            <a:off x="8046720" y="1463040"/>
             <a:ext cx="3383280" cy="45720"/>
           </a:xfrm>
           <a:prstGeom prst="rect">
@@ -16062,8 +16844,8 @@
         </p:nvSpPr>
         <p:spPr>
           <a:xfrm>
-            <a:off x="8211312" y="1664207"/>
-            <a:ext cx="3054096" cy="4352544"/>
+            <a:off x="8211312" y="1572768"/>
+            <a:ext cx="3054096" cy="4535424"/>
           </a:xfrm>
           <a:prstGeom prst="rect">
             <a:avLst/>
@@ -16104,9 +16886,9 @@
           <a:p>
             <a:pPr>
               <a:spcBef>
-                <a:spcPts val="300"/>
+                <a:spcPts val="400"/>
               </a:spcBef>
-              <a:defRPr sz="950">
+              <a:defRPr sz="1050">
                 <a:solidFill>
                   <a:srgbClr val="E2E8F0"/>
                 </a:solidFill>
@@ -16120,9 +16902,9 @@
           <a:p>
             <a:pPr>
               <a:spcBef>
-                <a:spcPts val="300"/>
+                <a:spcPts val="400"/>
               </a:spcBef>
-              <a:defRPr sz="950">
+              <a:defRPr sz="1050">
                 <a:solidFill>
                   <a:srgbClr val="E2E8F0"/>
                 </a:solidFill>
@@ -16136,9 +16918,9 @@
           <a:p>
             <a:pPr>
               <a:spcBef>
-                <a:spcPts val="300"/>
+                <a:spcPts val="400"/>
               </a:spcBef>
-              <a:defRPr sz="950">
+              <a:defRPr sz="1050">
                 <a:solidFill>
                   <a:srgbClr val="E2E8F0"/>
                 </a:solidFill>
@@ -16263,8 +17045,8 @@
         </p:nvSpPr>
         <p:spPr>
           <a:xfrm>
-            <a:off x="0" y="6537960"/>
-            <a:ext cx="12191695" cy="320040"/>
+            <a:off x="0" y="6510528"/>
+            <a:ext cx="12191695" cy="347472"/>
           </a:xfrm>
           <a:prstGeom prst="rect">
             <a:avLst/>
@@ -16274,7 +17056,7 @@
           </a:solidFill>
           <a:ln w="6350">
             <a:solidFill>
-              <a:srgbClr val="2D3C58"/>
+              <a:srgbClr val="283650"/>
             </a:solidFill>
           </a:ln>
         </p:spPr>
@@ -16308,8 +17090,8 @@
         </p:nvSpPr>
         <p:spPr>
           <a:xfrm>
-            <a:off x="731520" y="6556248"/>
-            <a:ext cx="6400800" cy="274320"/>
+            <a:off x="731520" y="6528816"/>
+            <a:ext cx="7315200" cy="274320"/>
           </a:xfrm>
           <a:prstGeom prst="rect">
             <a:avLst/>
@@ -16331,7 +17113,7 @@
               </a:defRPr>
             </a:pPr>
             <a:r>
-              <a:t>AgentIQ SENTINEL  •  Continuous Zero-Trust Cognitive Cyber Defense  •  TransOrg Datathon 2026</a:t>
+              <a:t>🛡️ AgentIQ SENTINEL  •  Continuous Zero-Trust Cognitive Cyber Defense  •  TransOrg Datathon 2026</a:t>
             </a:r>
           </a:p>
         </p:txBody>
@@ -16344,7 +17126,7 @@
         </p:nvSpPr>
         <p:spPr>
           <a:xfrm>
-            <a:off x="8686800" y="6556248"/>
+            <a:off x="8686800" y="6528816"/>
             <a:ext cx="2743200" cy="274320"/>
           </a:xfrm>
           <a:prstGeom prst="rect">
@@ -16380,14 +17162,14 @@
         </p:nvSpPr>
         <p:spPr>
           <a:xfrm>
-            <a:off x="731520" y="347472"/>
-            <a:ext cx="2926080" cy="256032"/>
+            <a:off x="731520" y="292608"/>
+            <a:ext cx="3108960" cy="256032"/>
           </a:xfrm>
           <a:prstGeom prst="roundRect">
             <a:avLst/>
           </a:prstGeom>
           <a:solidFill>
-            <a:srgbClr val="16213A"/>
+            <a:srgbClr val="18223A"/>
           </a:solidFill>
           <a:ln w="10160">
             <a:solidFill>
@@ -16425,8 +17207,8 @@
         </p:nvSpPr>
         <p:spPr>
           <a:xfrm>
-            <a:off x="777240" y="347472"/>
-            <a:ext cx="2834640" cy="256032"/>
+            <a:off x="777240" y="292608"/>
+            <a:ext cx="3017520" cy="256032"/>
           </a:xfrm>
           <a:prstGeom prst="rect">
             <a:avLst/>
@@ -16461,7 +17243,7 @@
         </p:nvSpPr>
         <p:spPr>
           <a:xfrm>
-            <a:off x="731520" y="658368"/>
+            <a:off x="731520" y="594360"/>
             <a:ext cx="10698480" cy="502920"/>
           </a:xfrm>
           <a:prstGeom prst="rect">
@@ -16497,7 +17279,7 @@
         </p:nvSpPr>
         <p:spPr>
           <a:xfrm>
-            <a:off x="731520" y="1133856"/>
+            <a:off x="731520" y="1078992"/>
             <a:ext cx="10698480" cy="320040"/>
           </a:xfrm>
           <a:prstGeom prst="rect">
@@ -16533,8 +17315,8 @@
         </p:nvSpPr>
         <p:spPr>
           <a:xfrm>
-            <a:off x="731520" y="1554480"/>
-            <a:ext cx="3383280" cy="2194560"/>
+            <a:off x="731520" y="1463040"/>
+            <a:ext cx="3383280" cy="2286000"/>
           </a:xfrm>
           <a:prstGeom prst="roundRect">
             <a:avLst/>
@@ -16544,7 +17326,7 @@
           </a:solidFill>
           <a:ln w="12700">
             <a:solidFill>
-              <a:srgbClr val="2D3C58"/>
+              <a:srgbClr val="283650"/>
             </a:solidFill>
           </a:ln>
         </p:spPr>
@@ -16578,7 +17360,7 @@
         </p:nvSpPr>
         <p:spPr>
           <a:xfrm>
-            <a:off x="731520" y="1554480"/>
+            <a:off x="731520" y="1463040"/>
             <a:ext cx="3383280" cy="45720"/>
           </a:xfrm>
           <a:prstGeom prst="rect">
@@ -16621,8 +17403,8 @@
         </p:nvSpPr>
         <p:spPr>
           <a:xfrm>
-            <a:off x="896112" y="1664207"/>
-            <a:ext cx="3054096" cy="1975104"/>
+            <a:off x="896112" y="1572768"/>
+            <a:ext cx="3054096" cy="2066543"/>
           </a:xfrm>
           <a:prstGeom prst="rect">
             <a:avLst/>
@@ -16663,9 +17445,9 @@
           <a:p>
             <a:pPr>
               <a:spcBef>
-                <a:spcPts val="300"/>
+                <a:spcPts val="400"/>
               </a:spcBef>
-              <a:defRPr sz="950">
+              <a:defRPr sz="1000">
                 <a:solidFill>
                   <a:srgbClr val="E2E8F0"/>
                 </a:solidFill>
@@ -16679,9 +17461,9 @@
           <a:p>
             <a:pPr>
               <a:spcBef>
-                <a:spcPts val="300"/>
+                <a:spcPts val="400"/>
               </a:spcBef>
-              <a:defRPr sz="950">
+              <a:defRPr sz="1000">
                 <a:solidFill>
                   <a:srgbClr val="E2E8F0"/>
                 </a:solidFill>
@@ -16702,8 +17484,8 @@
         </p:nvSpPr>
         <p:spPr>
           <a:xfrm>
-            <a:off x="4389120" y="1554480"/>
-            <a:ext cx="3383280" cy="2194560"/>
+            <a:off x="4389120" y="1463040"/>
+            <a:ext cx="3383280" cy="2286000"/>
           </a:xfrm>
           <a:prstGeom prst="roundRect">
             <a:avLst/>
@@ -16713,7 +17495,7 @@
           </a:solidFill>
           <a:ln w="12700">
             <a:solidFill>
-              <a:srgbClr val="2D3C58"/>
+              <a:srgbClr val="283650"/>
             </a:solidFill>
           </a:ln>
         </p:spPr>
@@ -16747,7 +17529,7 @@
         </p:nvSpPr>
         <p:spPr>
           <a:xfrm>
-            <a:off x="4389120" y="1554480"/>
+            <a:off x="4389120" y="1463040"/>
             <a:ext cx="3383280" cy="45720"/>
           </a:xfrm>
           <a:prstGeom prst="rect">
@@ -16790,8 +17572,8 @@
         </p:nvSpPr>
         <p:spPr>
           <a:xfrm>
-            <a:off x="4553712" y="1664207"/>
-            <a:ext cx="3054096" cy="1975104"/>
+            <a:off x="4553712" y="1572768"/>
+            <a:ext cx="3054096" cy="2066543"/>
           </a:xfrm>
           <a:prstGeom prst="rect">
             <a:avLst/>
@@ -16832,9 +17614,9 @@
           <a:p>
             <a:pPr>
               <a:spcBef>
-                <a:spcPts val="300"/>
+                <a:spcPts val="400"/>
               </a:spcBef>
-              <a:defRPr sz="950">
+              <a:defRPr sz="1000">
                 <a:solidFill>
                   <a:srgbClr val="E2E8F0"/>
                 </a:solidFill>
@@ -16848,9 +17630,9 @@
           <a:p>
             <a:pPr>
               <a:spcBef>
-                <a:spcPts val="300"/>
+                <a:spcPts val="400"/>
               </a:spcBef>
-              <a:defRPr sz="950">
+              <a:defRPr sz="1000">
                 <a:solidFill>
                   <a:srgbClr val="E2E8F0"/>
                 </a:solidFill>
@@ -16871,8 +17653,8 @@
         </p:nvSpPr>
         <p:spPr>
           <a:xfrm>
-            <a:off x="8046720" y="1554480"/>
-            <a:ext cx="3383280" cy="2194560"/>
+            <a:off x="8046720" y="1463040"/>
+            <a:ext cx="3383280" cy="2286000"/>
           </a:xfrm>
           <a:prstGeom prst="roundRect">
             <a:avLst/>
@@ -16882,7 +17664,7 @@
           </a:solidFill>
           <a:ln w="12700">
             <a:solidFill>
-              <a:srgbClr val="2D3C58"/>
+              <a:srgbClr val="283650"/>
             </a:solidFill>
           </a:ln>
         </p:spPr>
@@ -16916,7 +17698,7 @@
         </p:nvSpPr>
         <p:spPr>
           <a:xfrm>
-            <a:off x="8046720" y="1554480"/>
+            <a:off x="8046720" y="1463040"/>
             <a:ext cx="3383280" cy="45720"/>
           </a:xfrm>
           <a:prstGeom prst="rect">
@@ -16959,8 +17741,8 @@
         </p:nvSpPr>
         <p:spPr>
           <a:xfrm>
-            <a:off x="8211312" y="1664207"/>
-            <a:ext cx="3054096" cy="1975104"/>
+            <a:off x="8211312" y="1572768"/>
+            <a:ext cx="3054096" cy="2066543"/>
           </a:xfrm>
           <a:prstGeom prst="rect">
             <a:avLst/>
@@ -17001,9 +17783,9 @@
           <a:p>
             <a:pPr>
               <a:spcBef>
-                <a:spcPts val="300"/>
+                <a:spcPts val="400"/>
               </a:spcBef>
-              <a:defRPr sz="950">
+              <a:defRPr sz="1000">
                 <a:solidFill>
                   <a:srgbClr val="E2E8F0"/>
                 </a:solidFill>
@@ -17017,9 +17799,9 @@
           <a:p>
             <a:pPr>
               <a:spcBef>
-                <a:spcPts val="300"/>
+                <a:spcPts val="400"/>
               </a:spcBef>
-              <a:defRPr sz="950">
+              <a:defRPr sz="1000">
                 <a:solidFill>
                   <a:srgbClr val="E2E8F0"/>
                 </a:solidFill>
@@ -17041,7 +17823,7 @@
         <p:spPr>
           <a:xfrm>
             <a:off x="731520" y="3931920"/>
-            <a:ext cx="3383280" cy="2194560"/>
+            <a:ext cx="3383280" cy="2286000"/>
           </a:xfrm>
           <a:prstGeom prst="roundRect">
             <a:avLst/>
@@ -17051,7 +17833,7 @@
           </a:solidFill>
           <a:ln w="12700">
             <a:solidFill>
-              <a:srgbClr val="2D3C58"/>
+              <a:srgbClr val="283650"/>
             </a:solidFill>
           </a:ln>
         </p:spPr>
@@ -17129,7 +17911,7 @@
         <p:spPr>
           <a:xfrm>
             <a:off x="896112" y="4041648"/>
-            <a:ext cx="3054096" cy="1975104"/>
+            <a:ext cx="3054096" cy="2066543"/>
           </a:xfrm>
           <a:prstGeom prst="rect">
             <a:avLst/>
@@ -17170,9 +17952,9 @@
           <a:p>
             <a:pPr>
               <a:spcBef>
-                <a:spcPts val="300"/>
+                <a:spcPts val="400"/>
               </a:spcBef>
-              <a:defRPr sz="950">
+              <a:defRPr sz="1000">
                 <a:solidFill>
                   <a:srgbClr val="E2E8F0"/>
                 </a:solidFill>
@@ -17186,9 +17968,9 @@
           <a:p>
             <a:pPr>
               <a:spcBef>
-                <a:spcPts val="300"/>
+                <a:spcPts val="400"/>
               </a:spcBef>
-              <a:defRPr sz="950">
+              <a:defRPr sz="1000">
                 <a:solidFill>
                   <a:srgbClr val="E2E8F0"/>
                 </a:solidFill>
@@ -17210,7 +17992,7 @@
         <p:spPr>
           <a:xfrm>
             <a:off x="4389120" y="3931920"/>
-            <a:ext cx="3383280" cy="2194560"/>
+            <a:ext cx="3383280" cy="2286000"/>
           </a:xfrm>
           <a:prstGeom prst="roundRect">
             <a:avLst/>
@@ -17220,7 +18002,7 @@
           </a:solidFill>
           <a:ln w="12700">
             <a:solidFill>
-              <a:srgbClr val="2D3C58"/>
+              <a:srgbClr val="283650"/>
             </a:solidFill>
           </a:ln>
         </p:spPr>
@@ -17298,7 +18080,7 @@
         <p:spPr>
           <a:xfrm>
             <a:off x="4553712" y="4041648"/>
-            <a:ext cx="3054096" cy="1975104"/>
+            <a:ext cx="3054096" cy="2066543"/>
           </a:xfrm>
           <a:prstGeom prst="rect">
             <a:avLst/>
@@ -17339,9 +18121,9 @@
           <a:p>
             <a:pPr>
               <a:spcBef>
-                <a:spcPts val="300"/>
+                <a:spcPts val="400"/>
               </a:spcBef>
-              <a:defRPr sz="950">
+              <a:defRPr sz="1000">
                 <a:solidFill>
                   <a:srgbClr val="E2E8F0"/>
                 </a:solidFill>
@@ -17355,9 +18137,9 @@
           <a:p>
             <a:pPr>
               <a:spcBef>
-                <a:spcPts val="300"/>
+                <a:spcPts val="400"/>
               </a:spcBef>
-              <a:defRPr sz="950">
+              <a:defRPr sz="1000">
                 <a:solidFill>
                   <a:srgbClr val="E2E8F0"/>
                 </a:solidFill>
@@ -17379,7 +18161,7 @@
         <p:spPr>
           <a:xfrm>
             <a:off x="8046720" y="3931920"/>
-            <a:ext cx="3383280" cy="2194560"/>
+            <a:ext cx="3383280" cy="2286000"/>
           </a:xfrm>
           <a:prstGeom prst="roundRect">
             <a:avLst/>
@@ -17389,7 +18171,7 @@
           </a:solidFill>
           <a:ln w="12700">
             <a:solidFill>
-              <a:srgbClr val="2D3C58"/>
+              <a:srgbClr val="283650"/>
             </a:solidFill>
           </a:ln>
         </p:spPr>
@@ -17467,7 +18249,7 @@
         <p:spPr>
           <a:xfrm>
             <a:off x="8211312" y="4041648"/>
-            <a:ext cx="3054096" cy="1975104"/>
+            <a:ext cx="3054096" cy="2066543"/>
           </a:xfrm>
           <a:prstGeom prst="rect">
             <a:avLst/>
@@ -17508,9 +18290,9 @@
           <a:p>
             <a:pPr>
               <a:spcBef>
-                <a:spcPts val="300"/>
+                <a:spcPts val="400"/>
               </a:spcBef>
-              <a:defRPr sz="950">
+              <a:defRPr sz="1000">
                 <a:solidFill>
                   <a:srgbClr val="E2E8F0"/>
                 </a:solidFill>
@@ -17518,15 +18300,15 @@
               </a:defRPr>
             </a:pPr>
             <a:r>
-              <a:t>• T1486 Encrypted Impact: 340 Alert Correlated Events</a:t>
+              <a:t>• T1486 Data Encryption: 340 Alert Correlated Events</a:t>
             </a:r>
           </a:p>
           <a:p>
             <a:pPr>
               <a:spcBef>
-                <a:spcPts val="300"/>
+                <a:spcPts val="400"/>
               </a:spcBef>
-              <a:defRPr sz="950">
+              <a:defRPr sz="1000">
                 <a:solidFill>
                   <a:srgbClr val="E2E8F0"/>
                 </a:solidFill>
